--- a/Hinduismus_15_Minuten.pptx
+++ b/Hinduismus_15_Minuten.pptx
@@ -795,6 +795,11 @@
           <a:p>
             <a:r>
               <a:t>Quellen zur Nachprüfung und Vertiefung, keine zusätzliche Vortragszeit eingeplant. https://www.britannica.com/topic/Hinduism ; https://www.britannica.com/topic/caste-social-differentiation ; https://www.britannica.com/topic/Buddhism ; https://www.bbc.co.uk/religion/religions/hinduism/ ; Bhagavadgita: Übersetzungen und Kommentierungen unterscheiden sich, für Zitate eine konkrete Ausgabe nennen. Indische Verfassung: https://legislative.gov.in/constitution-of-india/ , Artikel 17. Bildreferenz laut verlinktem Dateinamen: Raimond Klavins / Unsplash; URL https://www.weroad.de/blog/wp-content/uploads/2023/11/raimond-klavins-KKm1ua7MSf0-unsplash-3-1.jpg . Das Foto wurde nicht in die Datei eingebettet. Die Quellen sind Literaturhinweise; die Webseiten wurden in dieser Sitzung nicht live überprüft.</a:t>
+            </a:r>
+          </a:p>
+          <a:p>
+            <a:r>
+              <a:t>Neugestaltung: Titelbild ist eine KI-generierte Illustration eines hinduistischen Tempels, kein dokumentarisches Foto. Schaubilder, Buchformen und Diya-Illustration sind eigens erstellte PowerPoint-Vektorgrafiken. Kein Foto aus der ursprünglichen Bildreferenz wurde eingebettet.</a:t>
             </a:r>
           </a:p>
         </p:txBody>
@@ -4370,14 +4375,92 @@
       <p:grpSpPr/>
       <p:sp>
         <p:nvSpPr>
-          <p:cNvPr id="2" name="Rectangle 1"/>
+          <p:cNvPr id="2" name="TextBox 1"/>
+          <p:cNvSpPr txBox="1"/>
+          <p:nvPr/>
+        </p:nvSpPr>
+        <p:spPr>
+          <a:xfrm>
+            <a:off x="594360" y="365760"/>
+            <a:ext cx="10058400" cy="274320"/>
+          </a:xfrm>
+          <a:prstGeom prst="rect">
+            <a:avLst/>
+          </a:prstGeom>
+          <a:noFill/>
+        </p:spPr>
+        <p:txBody>
+          <a:bodyPr wrap="square" lIns="0" rIns="0" tIns="0" bIns="0">
+            <a:spAutoFit/>
+          </a:bodyPr>
+          <a:lstStyle/>
+          <a:p>
+            <a:pPr>
+              <a:spcAft>
+                <a:spcPts val="1000"/>
+              </a:spcAft>
+              <a:defRPr sz="1100" b="1">
+                <a:solidFill>
+                  <a:srgbClr val="C89C51"/>
+                </a:solidFill>
+                <a:latin typeface="Aptos"/>
+              </a:defRPr>
+            </a:pPr>
+            <a:r>
+              <a:t>EINE RELIGION – VIELE WEGE?</a:t>
+            </a:r>
+          </a:p>
+        </p:txBody>
+      </p:sp>
+      <p:sp>
+        <p:nvSpPr>
+          <p:cNvPr id="3" name="TextBox 2"/>
+          <p:cNvSpPr txBox="1"/>
+          <p:nvPr/>
+        </p:nvSpPr>
+        <p:spPr>
+          <a:xfrm>
+            <a:off x="594360" y="868680"/>
+            <a:ext cx="10972800" cy="1005840"/>
+          </a:xfrm>
+          <a:prstGeom prst="rect">
+            <a:avLst/>
+          </a:prstGeom>
+          <a:noFill/>
+        </p:spPr>
+        <p:txBody>
+          <a:bodyPr wrap="square" lIns="0" rIns="0" tIns="0" bIns="0">
+            <a:spAutoFit/>
+          </a:bodyPr>
+          <a:lstStyle/>
+          <a:p>
+            <a:pPr>
+              <a:spcAft>
+                <a:spcPts val="1000"/>
+              </a:spcAft>
+              <a:defRPr sz="3400" b="1">
+                <a:solidFill>
+                  <a:srgbClr val="F5EFE3"/>
+                </a:solidFill>
+                <a:latin typeface="Aptos"/>
+              </a:defRPr>
+            </a:pPr>
+            <a:r>
+              <a:t>Hinduismus</a:t>
+            </a:r>
+          </a:p>
+        </p:txBody>
+      </p:sp>
+      <p:sp>
+        <p:nvSpPr>
+          <p:cNvPr id="4" name="Rectangle 3"/>
           <p:cNvSpPr/>
           <p:nvPr/>
         </p:nvSpPr>
         <p:spPr>
           <a:xfrm>
-            <a:off x="548640" y="594360"/>
-            <a:ext cx="109728" cy="5440680"/>
+            <a:off x="594360" y="6382512"/>
+            <a:ext cx="10972800" cy="18288"/>
           </a:xfrm>
           <a:prstGeom prst="rect">
             <a:avLst/>
@@ -4413,14 +4496,14 @@
       </p:sp>
       <p:sp>
         <p:nvSpPr>
-          <p:cNvPr id="3" name="TextBox 2"/>
+          <p:cNvPr id="5" name="TextBox 4"/>
           <p:cNvSpPr txBox="1"/>
           <p:nvPr/>
         </p:nvSpPr>
         <p:spPr>
           <a:xfrm>
-            <a:off x="868680" y="457200"/>
-            <a:ext cx="10607040" cy="365760"/>
+            <a:off x="594360" y="6510528"/>
+            <a:ext cx="8229600" cy="182880"/>
           </a:xfrm>
           <a:prstGeom prst="rect">
             <a:avLst/>
@@ -4428,16 +4511,16 @@
           <a:noFill/>
         </p:spPr>
         <p:txBody>
-          <a:bodyPr wrap="square">
+          <a:bodyPr wrap="square" lIns="0" rIns="0" tIns="0" bIns="0">
             <a:spAutoFit/>
           </a:bodyPr>
           <a:lstStyle/>
           <a:p>
             <a:pPr>
               <a:spcAft>
-                <a:spcPts val="1800"/>
-              </a:spcAft>
-              <a:defRPr sz="1200" b="1">
+                <a:spcPts val="1000"/>
+              </a:spcAft>
+              <a:defRPr sz="900" b="0">
                 <a:solidFill>
                   <a:srgbClr val="C89C51"/>
                 </a:solidFill>
@@ -4445,21 +4528,21 @@
               </a:defRPr>
             </a:pPr>
             <a:r>
-              <a:t>HINDUISMUS · RELIGION 13</a:t>
-            </a:r>
-          </a:p>
-        </p:txBody>
-      </p:sp>
-      <p:sp>
-        <p:nvSpPr>
-          <p:cNvPr id="4" name="TextBox 3"/>
+              <a:t>RELIGION · KLASSE 13     /     VIELFALT VERSTEHEN</a:t>
+            </a:r>
+          </a:p>
+        </p:txBody>
+      </p:sp>
+      <p:sp>
+        <p:nvSpPr>
+          <p:cNvPr id="6" name="TextBox 5"/>
           <p:cNvSpPr txBox="1"/>
           <p:nvPr/>
         </p:nvSpPr>
         <p:spPr>
           <a:xfrm>
-            <a:off x="868680" y="1005840"/>
-            <a:ext cx="10515600" cy="1143000"/>
+            <a:off x="10972800" y="6492240"/>
+            <a:ext cx="594360" cy="228600"/>
           </a:xfrm>
           <a:prstGeom prst="rect">
             <a:avLst/>
@@ -4467,38 +4550,63 @@
           <a:noFill/>
         </p:spPr>
         <p:txBody>
-          <a:bodyPr wrap="square">
+          <a:bodyPr wrap="square" lIns="0" rIns="0" tIns="0" bIns="0">
             <a:spAutoFit/>
           </a:bodyPr>
           <a:lstStyle/>
           <a:p>
             <a:pPr>
               <a:spcAft>
-                <a:spcPts val="1800"/>
-              </a:spcAft>
-              <a:defRPr sz="3400" b="1">
-                <a:solidFill>
-                  <a:srgbClr val="F5EFE3"/>
-                </a:solidFill>
-                <a:latin typeface="Aptos"/>
-              </a:defRPr>
-            </a:pPr>
-            <a:r>
-              <a:t>Hinduismus</a:t>
-            </a:r>
-          </a:p>
-        </p:txBody>
-      </p:sp>
-      <p:sp>
-        <p:nvSpPr>
-          <p:cNvPr id="5" name="TextBox 4"/>
+                <a:spcPts val="1000"/>
+              </a:spcAft>
+              <a:defRPr sz="1000" b="0">
+                <a:solidFill>
+                  <a:srgbClr val="C89C51"/>
+                </a:solidFill>
+                <a:latin typeface="Aptos"/>
+              </a:defRPr>
+            </a:pPr>
+            <a:r>
+              <a:t>01</a:t>
+            </a:r>
+          </a:p>
+        </p:txBody>
+      </p:sp>
+      <p:pic>
+        <p:nvPicPr>
+          <p:cNvPr id="7" name="Picture 6" descr="hindu_illustration.png"/>
+          <p:cNvPicPr>
+            <a:picLocks noChangeAspect="1"/>
+          </p:cNvPicPr>
+          <p:nvPr/>
+        </p:nvPicPr>
+        <p:blipFill>
+          <a:blip r:embed="rId3"/>
+          <a:srcRect l="12480" r="12480"/>
+          <a:stretch>
+            <a:fillRect/>
+          </a:stretch>
+        </p:blipFill>
+        <p:spPr>
+          <a:xfrm>
+            <a:off x="5943600" y="1737360"/>
+            <a:ext cx="5669280" cy="4251960"/>
+          </a:xfrm>
+          <a:prstGeom prst="rect">
+            <a:avLst/>
+          </a:prstGeom>
+        </p:spPr>
+      </p:pic>
+      <p:sp>
+        <p:nvSpPr>
+          <p:cNvPr id="8" name="TextBox 7"/>
           <p:cNvSpPr txBox="1"/>
           <p:nvPr/>
         </p:nvSpPr>
         <p:spPr>
           <a:xfrm>
-            <a:off x="914400" y="2377440"/>
-            <a:ext cx="10241280" cy="3566160"/>
+            <a:off x="5989320" y="6016752"/>
+            <a:ext cx="5486400" cy="210312"/>
           </a:xfrm>
           <a:prstGeom prst="rect">
             <a:avLst/>
@@ -4506,54 +4614,38 @@
           <a:noFill/>
         </p:spPr>
         <p:txBody>
-          <a:bodyPr wrap="square">
+          <a:bodyPr wrap="square" lIns="0" rIns="0" tIns="0" bIns="0">
             <a:spAutoFit/>
           </a:bodyPr>
           <a:lstStyle/>
           <a:p>
             <a:pPr>
               <a:spcAft>
-                <a:spcPts val="1800"/>
-              </a:spcAft>
-              <a:defRPr sz="2500" b="0">
-                <a:solidFill>
-                  <a:srgbClr val="F5EFE3"/>
-                </a:solidFill>
-                <a:latin typeface="Aptos"/>
-              </a:defRPr>
-            </a:pPr>
-            <a:r>
-              <a:t>Eine Religion – viele Wege?</a:t>
-            </a:r>
-          </a:p>
-          <a:p>
-            <a:pPr>
-              <a:spcAft>
-                <a:spcPts val="1800"/>
-              </a:spcAft>
-              <a:defRPr sz="2500" b="0">
-                <a:solidFill>
-                  <a:srgbClr val="F5EFE3"/>
-                </a:solidFill>
-                <a:latin typeface="Aptos"/>
-              </a:defRPr>
-            </a:pPr>
-            <a:r>
-              <a:t>Grundvorstellungen, gelebte Religion und gesellschaftliche Fragen</a:t>
-            </a:r>
-          </a:p>
-        </p:txBody>
-      </p:sp>
-      <p:sp>
-        <p:nvSpPr>
-          <p:cNvPr id="6" name="TextBox 5"/>
+                <a:spcPts val="1000"/>
+              </a:spcAft>
+              <a:defRPr sz="900" b="0">
+                <a:solidFill>
+                  <a:srgbClr val="C89C51"/>
+                </a:solidFill>
+                <a:latin typeface="Aptos"/>
+              </a:defRPr>
+            </a:pPr>
+            <a:r>
+              <a:t>KI-Illustration · kein dokumentarisches Foto</a:t>
+            </a:r>
+          </a:p>
+        </p:txBody>
+      </p:sp>
+      <p:sp>
+        <p:nvSpPr>
+          <p:cNvPr id="9" name="TextBox 8"/>
           <p:cNvSpPr txBox="1"/>
           <p:nvPr/>
         </p:nvSpPr>
         <p:spPr>
           <a:xfrm>
-            <a:off x="914400" y="6446520"/>
-            <a:ext cx="9144000" cy="228600"/>
+            <a:off x="640080" y="2194560"/>
+            <a:ext cx="4846320" cy="2011680"/>
           </a:xfrm>
           <a:prstGeom prst="rect">
             <a:avLst/>
@@ -4561,38 +4653,70 @@
           <a:noFill/>
         </p:spPr>
         <p:txBody>
-          <a:bodyPr wrap="square">
+          <a:bodyPr wrap="square" lIns="0" rIns="0" tIns="0" bIns="0">
             <a:spAutoFit/>
           </a:bodyPr>
           <a:lstStyle/>
           <a:p>
             <a:pPr>
               <a:spcAft>
-                <a:spcPts val="1800"/>
-              </a:spcAft>
-              <a:defRPr sz="1000" b="0">
-                <a:solidFill>
-                  <a:srgbClr val="C89C51"/>
-                </a:solidFill>
-                <a:latin typeface="Aptos"/>
-              </a:defRPr>
-            </a:pPr>
-            <a:r>
-              <a:t>Vielfalt verstehen · Begriffe verbinden · kritisch nachfragen</a:t>
-            </a:r>
-          </a:p>
-        </p:txBody>
-      </p:sp>
-      <p:sp>
-        <p:nvSpPr>
-          <p:cNvPr id="7" name="TextBox 6"/>
+                <a:spcPts val="1000"/>
+              </a:spcAft>
+              <a:defRPr sz="2800" b="0">
+                <a:solidFill>
+                  <a:srgbClr val="F5EFE3"/>
+                </a:solidFill>
+                <a:latin typeface="Aptos"/>
+              </a:defRPr>
+            </a:pPr>
+            <a:r>
+              <a:t>Grundvorstellungen.</a:t>
+            </a:r>
+          </a:p>
+          <a:p>
+            <a:pPr>
+              <a:spcAft>
+                <a:spcPts val="1000"/>
+              </a:spcAft>
+              <a:defRPr sz="2800" b="0">
+                <a:solidFill>
+                  <a:srgbClr val="F5EFE3"/>
+                </a:solidFill>
+                <a:latin typeface="Aptos"/>
+              </a:defRPr>
+            </a:pPr>
+            <a:r>
+              <a:t>Gelebte Religion.</a:t>
+            </a:r>
+          </a:p>
+          <a:p>
+            <a:pPr>
+              <a:spcAft>
+                <a:spcPts val="1000"/>
+              </a:spcAft>
+              <a:defRPr sz="2800" b="0">
+                <a:solidFill>
+                  <a:srgbClr val="F5EFE3"/>
+                </a:solidFill>
+                <a:latin typeface="Aptos"/>
+              </a:defRPr>
+            </a:pPr>
+            <a:r>
+              <a:t>Gesellschaftliche Fragen.</a:t>
+            </a:r>
+          </a:p>
+        </p:txBody>
+      </p:sp>
+      <p:sp>
+        <p:nvSpPr>
+          <p:cNvPr id="10" name="TextBox 9"/>
           <p:cNvSpPr txBox="1"/>
           <p:nvPr/>
         </p:nvSpPr>
         <p:spPr>
           <a:xfrm>
-            <a:off x="10972800" y="6428232"/>
-            <a:ext cx="457200" cy="274320"/>
+            <a:off x="640080" y="5257800"/>
+            <a:ext cx="4846320" cy="548640"/>
           </a:xfrm>
           <a:prstGeom prst="rect">
             <a:avLst/>
@@ -4600,16 +4724,16 @@
           <a:noFill/>
         </p:spPr>
         <p:txBody>
-          <a:bodyPr wrap="square">
+          <a:bodyPr wrap="square" lIns="0" rIns="0" tIns="0" bIns="0">
             <a:spAutoFit/>
           </a:bodyPr>
           <a:lstStyle/>
           <a:p>
             <a:pPr>
               <a:spcAft>
-                <a:spcPts val="1800"/>
-              </a:spcAft>
-              <a:defRPr sz="1100" b="0">
+                <a:spcPts val="1000"/>
+              </a:spcAft>
+              <a:defRPr sz="1600" b="0">
                 <a:solidFill>
                   <a:srgbClr val="C89C51"/>
                 </a:solidFill>
@@ -4617,7 +4741,7 @@
               </a:defRPr>
             </a:pPr>
             <a:r>
-              <a:t>1</a:t>
+              <a:t>15 Minuten · mit kurzer Diskussion</a:t>
             </a:r>
           </a:p>
         </p:txBody>
@@ -4650,14 +4774,92 @@
       <p:grpSpPr/>
       <p:sp>
         <p:nvSpPr>
-          <p:cNvPr id="2" name="Rectangle 1"/>
+          <p:cNvPr id="2" name="TextBox 1"/>
+          <p:cNvSpPr txBox="1"/>
+          <p:nvPr/>
+        </p:nvSpPr>
+        <p:spPr>
+          <a:xfrm>
+            <a:off x="594360" y="365760"/>
+            <a:ext cx="10058400" cy="274320"/>
+          </a:xfrm>
+          <a:prstGeom prst="rect">
+            <a:avLst/>
+          </a:prstGeom>
+          <a:noFill/>
+        </p:spPr>
+        <p:txBody>
+          <a:bodyPr wrap="square" lIns="0" rIns="0" tIns="0" bIns="0">
+            <a:spAutoFit/>
+          </a:bodyPr>
+          <a:lstStyle/>
+          <a:p>
+            <a:pPr>
+              <a:spcAft>
+                <a:spcPts val="1000"/>
+              </a:spcAft>
+              <a:defRPr sz="1100" b="1">
+                <a:solidFill>
+                  <a:srgbClr val="C89C51"/>
+                </a:solidFill>
+                <a:latin typeface="Aptos"/>
+              </a:defRPr>
+            </a:pPr>
+            <a:r>
+              <a:t>09 / RELIGION &amp; GESELLSCHAFT</a:t>
+            </a:r>
+          </a:p>
+        </p:txBody>
+      </p:sp>
+      <p:sp>
+        <p:nvSpPr>
+          <p:cNvPr id="3" name="TextBox 2"/>
+          <p:cNvSpPr txBox="1"/>
+          <p:nvPr/>
+        </p:nvSpPr>
+        <p:spPr>
+          <a:xfrm>
+            <a:off x="594360" y="868680"/>
+            <a:ext cx="10972800" cy="1005840"/>
+          </a:xfrm>
+          <a:prstGeom prst="rect">
+            <a:avLst/>
+          </a:prstGeom>
+          <a:noFill/>
+        </p:spPr>
+        <p:txBody>
+          <a:bodyPr wrap="square" lIns="0" rIns="0" tIns="0" bIns="0">
+            <a:spAutoFit/>
+          </a:bodyPr>
+          <a:lstStyle/>
+          <a:p>
+            <a:pPr>
+              <a:spcAft>
+                <a:spcPts val="1000"/>
+              </a:spcAft>
+              <a:defRPr sz="3400" b="1">
+                <a:solidFill>
+                  <a:srgbClr val="143D43"/>
+                </a:solidFill>
+                <a:latin typeface="Aptos"/>
+              </a:defRPr>
+            </a:pPr>
+            <a:r>
+              <a:t>Tradition trifft Gegenwart</a:t>
+            </a:r>
+          </a:p>
+        </p:txBody>
+      </p:sp>
+      <p:sp>
+        <p:nvSpPr>
+          <p:cNvPr id="4" name="Rectangle 3"/>
           <p:cNvSpPr/>
           <p:nvPr/>
         </p:nvSpPr>
         <p:spPr>
           <a:xfrm>
-            <a:off x="548640" y="594360"/>
-            <a:ext cx="109728" cy="5440680"/>
+            <a:off x="594360" y="6382512"/>
+            <a:ext cx="10972800" cy="18288"/>
           </a:xfrm>
           <a:prstGeom prst="rect">
             <a:avLst/>
@@ -4693,14 +4895,14 @@
       </p:sp>
       <p:sp>
         <p:nvSpPr>
-          <p:cNvPr id="3" name="TextBox 2"/>
+          <p:cNvPr id="5" name="TextBox 4"/>
           <p:cNvSpPr txBox="1"/>
           <p:nvPr/>
         </p:nvSpPr>
         <p:spPr>
           <a:xfrm>
-            <a:off x="868680" y="457200"/>
-            <a:ext cx="10607040" cy="365760"/>
+            <a:off x="594360" y="6510528"/>
+            <a:ext cx="8229600" cy="182880"/>
           </a:xfrm>
           <a:prstGeom prst="rect">
             <a:avLst/>
@@ -4708,16 +4910,16 @@
           <a:noFill/>
         </p:spPr>
         <p:txBody>
-          <a:bodyPr wrap="square">
+          <a:bodyPr wrap="square" lIns="0" rIns="0" tIns="0" bIns="0">
             <a:spAutoFit/>
           </a:bodyPr>
           <a:lstStyle/>
           <a:p>
             <a:pPr>
               <a:spcAft>
-                <a:spcPts val="1800"/>
-              </a:spcAft>
-              <a:defRPr sz="1200" b="1">
+                <a:spcPts val="1000"/>
+              </a:spcAft>
+              <a:defRPr sz="900" b="0">
                 <a:solidFill>
                   <a:srgbClr val="C89C51"/>
                 </a:solidFill>
@@ -4725,21 +4927,21 @@
               </a:defRPr>
             </a:pPr>
             <a:r>
-              <a:t>HINDUISMUS · RELIGION 13</a:t>
-            </a:r>
-          </a:p>
-        </p:txBody>
-      </p:sp>
-      <p:sp>
-        <p:nvSpPr>
-          <p:cNvPr id="4" name="TextBox 3"/>
+              <a:t>RELIGION · KLASSE 13     /     VIELFALT VERSTEHEN</a:t>
+            </a:r>
+          </a:p>
+        </p:txBody>
+      </p:sp>
+      <p:sp>
+        <p:nvSpPr>
+          <p:cNvPr id="6" name="TextBox 5"/>
           <p:cNvSpPr txBox="1"/>
           <p:nvPr/>
         </p:nvSpPr>
         <p:spPr>
           <a:xfrm>
-            <a:off x="868680" y="1005840"/>
-            <a:ext cx="10515600" cy="1143000"/>
+            <a:off x="10972800" y="6492240"/>
+            <a:ext cx="594360" cy="228600"/>
           </a:xfrm>
           <a:prstGeom prst="rect">
             <a:avLst/>
@@ -4747,38 +4949,124 @@
           <a:noFill/>
         </p:spPr>
         <p:txBody>
-          <a:bodyPr wrap="square">
+          <a:bodyPr wrap="square" lIns="0" rIns="0" tIns="0" bIns="0">
             <a:spAutoFit/>
           </a:bodyPr>
           <a:lstStyle/>
           <a:p>
             <a:pPr>
               <a:spcAft>
-                <a:spcPts val="1800"/>
-              </a:spcAft>
-              <a:defRPr sz="3400" b="1">
-                <a:solidFill>
-                  <a:srgbClr val="143D43"/>
-                </a:solidFill>
-                <a:latin typeface="Aptos"/>
-              </a:defRPr>
-            </a:pPr>
-            <a:r>
-              <a:t>Hinduismus in der Gegenwart</a:t>
-            </a:r>
-          </a:p>
-        </p:txBody>
-      </p:sp>
-      <p:sp>
-        <p:nvSpPr>
-          <p:cNvPr id="5" name="TextBox 4"/>
+                <a:spcPts val="1000"/>
+              </a:spcAft>
+              <a:defRPr sz="1000" b="0">
+                <a:solidFill>
+                  <a:srgbClr val="C89C51"/>
+                </a:solidFill>
+                <a:latin typeface="Aptos"/>
+              </a:defRPr>
+            </a:pPr>
+            <a:r>
+              <a:t>10</a:t>
+            </a:r>
+          </a:p>
+        </p:txBody>
+      </p:sp>
+      <p:sp>
+        <p:nvSpPr>
+          <p:cNvPr id="7" name="Rounded Rectangle 6"/>
+          <p:cNvSpPr/>
+          <p:nvPr/>
+        </p:nvSpPr>
+        <p:spPr>
+          <a:xfrm>
+            <a:off x="640080" y="2103120"/>
+            <a:ext cx="3383280" cy="2834640"/>
+          </a:xfrm>
+          <a:prstGeom prst="roundRect">
+            <a:avLst/>
+          </a:prstGeom>
+          <a:solidFill>
+            <a:srgbClr val="FFFFFF"/>
+          </a:solidFill>
+          <a:ln>
+            <a:noFill/>
+          </a:ln>
+        </p:spPr>
+        <p:style>
+          <a:lnRef idx="1">
+            <a:schemeClr val="accent1"/>
+          </a:lnRef>
+          <a:fillRef idx="3">
+            <a:schemeClr val="accent1"/>
+          </a:fillRef>
+          <a:effectRef idx="2">
+            <a:schemeClr val="accent1"/>
+          </a:effectRef>
+          <a:fontRef idx="minor">
+            <a:schemeClr val="lt1"/>
+          </a:fontRef>
+        </p:style>
+        <p:txBody>
+          <a:bodyPr rtlCol="0" anchor="ctr"/>
+          <a:lstStyle/>
+          <a:p>
+            <a:pPr algn="ctr"/>
+          </a:p>
+        </p:txBody>
+      </p:sp>
+      <p:sp>
+        <p:nvSpPr>
+          <p:cNvPr id="8" name="Rectangle 7"/>
+          <p:cNvSpPr/>
+          <p:nvPr/>
+        </p:nvSpPr>
+        <p:spPr>
+          <a:xfrm>
+            <a:off x="822959" y="2304288"/>
+            <a:ext cx="54864" cy="384048"/>
+          </a:xfrm>
+          <a:prstGeom prst="rect">
+            <a:avLst/>
+          </a:prstGeom>
+          <a:solidFill>
+            <a:srgbClr val="C89C51"/>
+          </a:solidFill>
+          <a:ln>
+            <a:noFill/>
+          </a:ln>
+        </p:spPr>
+        <p:style>
+          <a:lnRef idx="1">
+            <a:schemeClr val="accent1"/>
+          </a:lnRef>
+          <a:fillRef idx="3">
+            <a:schemeClr val="accent1"/>
+          </a:fillRef>
+          <a:effectRef idx="2">
+            <a:schemeClr val="accent1"/>
+          </a:effectRef>
+          <a:fontRef idx="minor">
+            <a:schemeClr val="lt1"/>
+          </a:fontRef>
+        </p:style>
+        <p:txBody>
+          <a:bodyPr rtlCol="0" anchor="ctr"/>
+          <a:lstStyle/>
+          <a:p>
+            <a:pPr algn="ctr"/>
+          </a:p>
+        </p:txBody>
+      </p:sp>
+      <p:sp>
+        <p:nvSpPr>
+          <p:cNvPr id="9" name="TextBox 8"/>
           <p:cNvSpPr txBox="1"/>
           <p:nvPr/>
         </p:nvSpPr>
         <p:spPr>
           <a:xfrm>
-            <a:off x="914400" y="2377440"/>
-            <a:ext cx="10241280" cy="3566160"/>
+            <a:off x="1005840" y="2286000"/>
+            <a:ext cx="2834640" cy="548640"/>
           </a:xfrm>
           <a:prstGeom prst="rect">
             <a:avLst/>
@@ -4786,86 +5074,38 @@
           <a:noFill/>
         </p:spPr>
         <p:txBody>
-          <a:bodyPr wrap="square">
+          <a:bodyPr wrap="square" lIns="0" rIns="0" tIns="0" bIns="0">
             <a:spAutoFit/>
           </a:bodyPr>
           <a:lstStyle/>
           <a:p>
             <a:pPr>
               <a:spcAft>
-                <a:spcPts val="1800"/>
-              </a:spcAft>
-              <a:defRPr sz="2500" b="0">
-                <a:solidFill>
-                  <a:srgbClr val="173238"/>
-                </a:solidFill>
-                <a:latin typeface="Aptos"/>
-              </a:defRPr>
-            </a:pPr>
-            <a:r>
-              <a:t>Tradition, Reform und globale Lebenswelten</a:t>
-            </a:r>
-          </a:p>
-          <a:p>
-            <a:pPr>
-              <a:spcAft>
-                <a:spcPts val="1800"/>
-              </a:spcAft>
-              <a:defRPr sz="2500" b="0">
-                <a:solidFill>
-                  <a:srgbClr val="173238"/>
-                </a:solidFill>
-                <a:latin typeface="Aptos"/>
-              </a:defRPr>
-            </a:pPr>
-            <a:r>
-              <a:t>Frauenrollen und soziale Gleichberechtigung</a:t>
-            </a:r>
-          </a:p>
-          <a:p>
-            <a:pPr>
-              <a:spcAft>
-                <a:spcPts val="1800"/>
-              </a:spcAft>
-              <a:defRPr sz="2500" b="0">
-                <a:solidFill>
-                  <a:srgbClr val="173238"/>
-                </a:solidFill>
-                <a:latin typeface="Aptos"/>
-              </a:defRPr>
-            </a:pPr>
-            <a:r>
-              <a:t>Hindutva: politischer Hindu-Nationalismus</a:t>
-            </a:r>
-          </a:p>
-          <a:p>
-            <a:pPr>
-              <a:spcAft>
-                <a:spcPts val="1800"/>
-              </a:spcAft>
-              <a:defRPr sz="2500" b="0">
-                <a:solidFill>
-                  <a:srgbClr val="173238"/>
-                </a:solidFill>
-                <a:latin typeface="Aptos"/>
-              </a:defRPr>
-            </a:pPr>
-            <a:r>
-              <a:t>Religiöser Glaube ≠ automatisch politische Ideologie</a:t>
-            </a:r>
-          </a:p>
-        </p:txBody>
-      </p:sp>
-      <p:sp>
-        <p:nvSpPr>
-          <p:cNvPr id="6" name="TextBox 5"/>
+                <a:spcPts val="1000"/>
+              </a:spcAft>
+              <a:defRPr sz="2300" b="1">
+                <a:solidFill>
+                  <a:srgbClr val="143D43"/>
+                </a:solidFill>
+                <a:latin typeface="Aptos"/>
+              </a:defRPr>
+            </a:pPr>
+            <a:r>
+              <a:t>Reform</a:t>
+            </a:r>
+          </a:p>
+        </p:txBody>
+      </p:sp>
+      <p:sp>
+        <p:nvSpPr>
+          <p:cNvPr id="10" name="TextBox 9"/>
           <p:cNvSpPr txBox="1"/>
           <p:nvPr/>
         </p:nvSpPr>
         <p:spPr>
           <a:xfrm>
-            <a:off x="914400" y="6446520"/>
-            <a:ext cx="9144000" cy="228600"/>
+            <a:off x="914400" y="2971800"/>
+            <a:ext cx="2834640" cy="1874519"/>
           </a:xfrm>
           <a:prstGeom prst="rect">
             <a:avLst/>
@@ -4873,38 +5113,140 @@
           <a:noFill/>
         </p:spPr>
         <p:txBody>
-          <a:bodyPr wrap="square">
+          <a:bodyPr wrap="square" lIns="0" rIns="0" tIns="0" bIns="0">
             <a:spAutoFit/>
           </a:bodyPr>
           <a:lstStyle/>
           <a:p>
             <a:pPr>
               <a:spcAft>
-                <a:spcPts val="1800"/>
-              </a:spcAft>
-              <a:defRPr sz="1000" b="0">
-                <a:solidFill>
-                  <a:srgbClr val="C89C51"/>
-                </a:solidFill>
-                <a:latin typeface="Aptos"/>
-              </a:defRPr>
-            </a:pPr>
-            <a:r>
-              <a:t>Vielfalt verstehen · Begriffe verbinden · kritisch nachfragen</a:t>
-            </a:r>
-          </a:p>
-        </p:txBody>
-      </p:sp>
-      <p:sp>
-        <p:nvSpPr>
-          <p:cNvPr id="7" name="TextBox 6"/>
+                <a:spcPts val="1000"/>
+              </a:spcAft>
+              <a:defRPr sz="2000" b="0">
+                <a:solidFill>
+                  <a:srgbClr val="173238"/>
+                </a:solidFill>
+                <a:latin typeface="Aptos"/>
+              </a:defRPr>
+            </a:pPr>
+            <a:r>
+              <a:t>Frauenrollen und</a:t>
+            </a:r>
+          </a:p>
+          <a:p>
+            <a:pPr>
+              <a:spcAft>
+                <a:spcPts val="1000"/>
+              </a:spcAft>
+              <a:defRPr sz="2000" b="0">
+                <a:solidFill>
+                  <a:srgbClr val="173238"/>
+                </a:solidFill>
+                <a:latin typeface="Aptos"/>
+              </a:defRPr>
+            </a:pPr>
+            <a:r>
+              <a:t>Gleichberechtigung</a:t>
+            </a:r>
+          </a:p>
+        </p:txBody>
+      </p:sp>
+      <p:sp>
+        <p:nvSpPr>
+          <p:cNvPr id="11" name="Rounded Rectangle 10"/>
+          <p:cNvSpPr/>
+          <p:nvPr/>
+        </p:nvSpPr>
+        <p:spPr>
+          <a:xfrm>
+            <a:off x="4389120" y="2103120"/>
+            <a:ext cx="3383280" cy="2834640"/>
+          </a:xfrm>
+          <a:prstGeom prst="roundRect">
+            <a:avLst/>
+          </a:prstGeom>
+          <a:solidFill>
+            <a:srgbClr val="FFFFFF"/>
+          </a:solidFill>
+          <a:ln>
+            <a:noFill/>
+          </a:ln>
+        </p:spPr>
+        <p:style>
+          <a:lnRef idx="1">
+            <a:schemeClr val="accent1"/>
+          </a:lnRef>
+          <a:fillRef idx="3">
+            <a:schemeClr val="accent1"/>
+          </a:fillRef>
+          <a:effectRef idx="2">
+            <a:schemeClr val="accent1"/>
+          </a:effectRef>
+          <a:fontRef idx="minor">
+            <a:schemeClr val="lt1"/>
+          </a:fontRef>
+        </p:style>
+        <p:txBody>
+          <a:bodyPr rtlCol="0" anchor="ctr"/>
+          <a:lstStyle/>
+          <a:p>
+            <a:pPr algn="ctr"/>
+          </a:p>
+        </p:txBody>
+      </p:sp>
+      <p:sp>
+        <p:nvSpPr>
+          <p:cNvPr id="12" name="Rectangle 11"/>
+          <p:cNvSpPr/>
+          <p:nvPr/>
+        </p:nvSpPr>
+        <p:spPr>
+          <a:xfrm>
+            <a:off x="4572000" y="2304288"/>
+            <a:ext cx="54864" cy="384048"/>
+          </a:xfrm>
+          <a:prstGeom prst="rect">
+            <a:avLst/>
+          </a:prstGeom>
+          <a:solidFill>
+            <a:srgbClr val="C89C51"/>
+          </a:solidFill>
+          <a:ln>
+            <a:noFill/>
+          </a:ln>
+        </p:spPr>
+        <p:style>
+          <a:lnRef idx="1">
+            <a:schemeClr val="accent1"/>
+          </a:lnRef>
+          <a:fillRef idx="3">
+            <a:schemeClr val="accent1"/>
+          </a:fillRef>
+          <a:effectRef idx="2">
+            <a:schemeClr val="accent1"/>
+          </a:effectRef>
+          <a:fontRef idx="minor">
+            <a:schemeClr val="lt1"/>
+          </a:fontRef>
+        </p:style>
+        <p:txBody>
+          <a:bodyPr rtlCol="0" anchor="ctr"/>
+          <a:lstStyle/>
+          <a:p>
+            <a:pPr algn="ctr"/>
+          </a:p>
+        </p:txBody>
+      </p:sp>
+      <p:sp>
+        <p:nvSpPr>
+          <p:cNvPr id="13" name="TextBox 12"/>
           <p:cNvSpPr txBox="1"/>
           <p:nvPr/>
         </p:nvSpPr>
         <p:spPr>
           <a:xfrm>
-            <a:off x="10972800" y="6428232"/>
-            <a:ext cx="457200" cy="274320"/>
+            <a:off x="4754880" y="2286000"/>
+            <a:ext cx="2834640" cy="548640"/>
           </a:xfrm>
           <a:prstGeom prst="rect">
             <a:avLst/>
@@ -4912,24 +5254,298 @@
           <a:noFill/>
         </p:spPr>
         <p:txBody>
-          <a:bodyPr wrap="square">
+          <a:bodyPr wrap="square" lIns="0" rIns="0" tIns="0" bIns="0">
             <a:spAutoFit/>
           </a:bodyPr>
           <a:lstStyle/>
           <a:p>
             <a:pPr>
               <a:spcAft>
-                <a:spcPts val="1800"/>
-              </a:spcAft>
-              <a:defRPr sz="1100" b="0">
-                <a:solidFill>
-                  <a:srgbClr val="C89C51"/>
-                </a:solidFill>
-                <a:latin typeface="Aptos"/>
-              </a:defRPr>
-            </a:pPr>
-            <a:r>
-              <a:t>10</a:t>
+                <a:spcPts val="1000"/>
+              </a:spcAft>
+              <a:defRPr sz="2300" b="1">
+                <a:solidFill>
+                  <a:srgbClr val="143D43"/>
+                </a:solidFill>
+                <a:latin typeface="Aptos"/>
+              </a:defRPr>
+            </a:pPr>
+            <a:r>
+              <a:t>Migration</a:t>
+            </a:r>
+          </a:p>
+        </p:txBody>
+      </p:sp>
+      <p:sp>
+        <p:nvSpPr>
+          <p:cNvPr id="14" name="TextBox 13"/>
+          <p:cNvSpPr txBox="1"/>
+          <p:nvPr/>
+        </p:nvSpPr>
+        <p:spPr>
+          <a:xfrm>
+            <a:off x="4663440" y="2971800"/>
+            <a:ext cx="2834640" cy="1874519"/>
+          </a:xfrm>
+          <a:prstGeom prst="rect">
+            <a:avLst/>
+          </a:prstGeom>
+          <a:noFill/>
+        </p:spPr>
+        <p:txBody>
+          <a:bodyPr wrap="square" lIns="0" rIns="0" tIns="0" bIns="0">
+            <a:spAutoFit/>
+          </a:bodyPr>
+          <a:lstStyle/>
+          <a:p>
+            <a:pPr>
+              <a:spcAft>
+                <a:spcPts val="1000"/>
+              </a:spcAft>
+              <a:defRPr sz="2000" b="0">
+                <a:solidFill>
+                  <a:srgbClr val="173238"/>
+                </a:solidFill>
+                <a:latin typeface="Aptos"/>
+              </a:defRPr>
+            </a:pPr>
+            <a:r>
+              <a:t>Glaube in globalen</a:t>
+            </a:r>
+          </a:p>
+          <a:p>
+            <a:pPr>
+              <a:spcAft>
+                <a:spcPts val="1000"/>
+              </a:spcAft>
+              <a:defRPr sz="2000" b="0">
+                <a:solidFill>
+                  <a:srgbClr val="173238"/>
+                </a:solidFill>
+                <a:latin typeface="Aptos"/>
+              </a:defRPr>
+            </a:pPr>
+            <a:r>
+              <a:t>Lebenswelten</a:t>
+            </a:r>
+          </a:p>
+        </p:txBody>
+      </p:sp>
+      <p:sp>
+        <p:nvSpPr>
+          <p:cNvPr id="15" name="Rounded Rectangle 14"/>
+          <p:cNvSpPr/>
+          <p:nvPr/>
+        </p:nvSpPr>
+        <p:spPr>
+          <a:xfrm>
+            <a:off x="8138160" y="2103120"/>
+            <a:ext cx="3383280" cy="2834640"/>
+          </a:xfrm>
+          <a:prstGeom prst="roundRect">
+            <a:avLst/>
+          </a:prstGeom>
+          <a:solidFill>
+            <a:srgbClr val="FFFFFF"/>
+          </a:solidFill>
+          <a:ln>
+            <a:noFill/>
+          </a:ln>
+        </p:spPr>
+        <p:style>
+          <a:lnRef idx="1">
+            <a:schemeClr val="accent1"/>
+          </a:lnRef>
+          <a:fillRef idx="3">
+            <a:schemeClr val="accent1"/>
+          </a:fillRef>
+          <a:effectRef idx="2">
+            <a:schemeClr val="accent1"/>
+          </a:effectRef>
+          <a:fontRef idx="minor">
+            <a:schemeClr val="lt1"/>
+          </a:fontRef>
+        </p:style>
+        <p:txBody>
+          <a:bodyPr rtlCol="0" anchor="ctr"/>
+          <a:lstStyle/>
+          <a:p>
+            <a:pPr algn="ctr"/>
+          </a:p>
+        </p:txBody>
+      </p:sp>
+      <p:sp>
+        <p:nvSpPr>
+          <p:cNvPr id="16" name="Rectangle 15"/>
+          <p:cNvSpPr/>
+          <p:nvPr/>
+        </p:nvSpPr>
+        <p:spPr>
+          <a:xfrm>
+            <a:off x="8321040" y="2304288"/>
+            <a:ext cx="54864" cy="384048"/>
+          </a:xfrm>
+          <a:prstGeom prst="rect">
+            <a:avLst/>
+          </a:prstGeom>
+          <a:solidFill>
+            <a:srgbClr val="C89C51"/>
+          </a:solidFill>
+          <a:ln>
+            <a:noFill/>
+          </a:ln>
+        </p:spPr>
+        <p:style>
+          <a:lnRef idx="1">
+            <a:schemeClr val="accent1"/>
+          </a:lnRef>
+          <a:fillRef idx="3">
+            <a:schemeClr val="accent1"/>
+          </a:fillRef>
+          <a:effectRef idx="2">
+            <a:schemeClr val="accent1"/>
+          </a:effectRef>
+          <a:fontRef idx="minor">
+            <a:schemeClr val="lt1"/>
+          </a:fontRef>
+        </p:style>
+        <p:txBody>
+          <a:bodyPr rtlCol="0" anchor="ctr"/>
+          <a:lstStyle/>
+          <a:p>
+            <a:pPr algn="ctr"/>
+          </a:p>
+        </p:txBody>
+      </p:sp>
+      <p:sp>
+        <p:nvSpPr>
+          <p:cNvPr id="17" name="TextBox 16"/>
+          <p:cNvSpPr txBox="1"/>
+          <p:nvPr/>
+        </p:nvSpPr>
+        <p:spPr>
+          <a:xfrm>
+            <a:off x="8503920" y="2286000"/>
+            <a:ext cx="2834640" cy="548640"/>
+          </a:xfrm>
+          <a:prstGeom prst="rect">
+            <a:avLst/>
+          </a:prstGeom>
+          <a:noFill/>
+        </p:spPr>
+        <p:txBody>
+          <a:bodyPr wrap="square" lIns="0" rIns="0" tIns="0" bIns="0">
+            <a:spAutoFit/>
+          </a:bodyPr>
+          <a:lstStyle/>
+          <a:p>
+            <a:pPr>
+              <a:spcAft>
+                <a:spcPts val="1000"/>
+              </a:spcAft>
+              <a:defRPr sz="2300" b="1">
+                <a:solidFill>
+                  <a:srgbClr val="143D43"/>
+                </a:solidFill>
+                <a:latin typeface="Aptos"/>
+              </a:defRPr>
+            </a:pPr>
+            <a:r>
+              <a:t>Politik</a:t>
+            </a:r>
+          </a:p>
+        </p:txBody>
+      </p:sp>
+      <p:sp>
+        <p:nvSpPr>
+          <p:cNvPr id="18" name="TextBox 17"/>
+          <p:cNvSpPr txBox="1"/>
+          <p:nvPr/>
+        </p:nvSpPr>
+        <p:spPr>
+          <a:xfrm>
+            <a:off x="8412480" y="2971800"/>
+            <a:ext cx="2834640" cy="1874519"/>
+          </a:xfrm>
+          <a:prstGeom prst="rect">
+            <a:avLst/>
+          </a:prstGeom>
+          <a:noFill/>
+        </p:spPr>
+        <p:txBody>
+          <a:bodyPr wrap="square" lIns="0" rIns="0" tIns="0" bIns="0">
+            <a:spAutoFit/>
+          </a:bodyPr>
+          <a:lstStyle/>
+          <a:p>
+            <a:pPr>
+              <a:spcAft>
+                <a:spcPts val="1000"/>
+              </a:spcAft>
+              <a:defRPr sz="2000" b="0">
+                <a:solidFill>
+                  <a:srgbClr val="173238"/>
+                </a:solidFill>
+                <a:latin typeface="Aptos"/>
+              </a:defRPr>
+            </a:pPr>
+            <a:r>
+              <a:t>Hindutva: politischer</a:t>
+            </a:r>
+          </a:p>
+          <a:p>
+            <a:pPr>
+              <a:spcAft>
+                <a:spcPts val="1000"/>
+              </a:spcAft>
+              <a:defRPr sz="2000" b="0">
+                <a:solidFill>
+                  <a:srgbClr val="173238"/>
+                </a:solidFill>
+                <a:latin typeface="Aptos"/>
+              </a:defRPr>
+            </a:pPr>
+            <a:r>
+              <a:t>Hindu-Nationalismus</a:t>
+            </a:r>
+          </a:p>
+        </p:txBody>
+      </p:sp>
+      <p:sp>
+        <p:nvSpPr>
+          <p:cNvPr id="19" name="TextBox 18"/>
+          <p:cNvSpPr txBox="1"/>
+          <p:nvPr/>
+        </p:nvSpPr>
+        <p:spPr>
+          <a:xfrm>
+            <a:off x="777240" y="5440680"/>
+            <a:ext cx="10607040" cy="548640"/>
+          </a:xfrm>
+          <a:prstGeom prst="rect">
+            <a:avLst/>
+          </a:prstGeom>
+          <a:noFill/>
+        </p:spPr>
+        <p:txBody>
+          <a:bodyPr wrap="square" lIns="0" rIns="0" tIns="0" bIns="0">
+            <a:spAutoFit/>
+          </a:bodyPr>
+          <a:lstStyle/>
+          <a:p>
+            <a:pPr>
+              <a:spcAft>
+                <a:spcPts val="1000"/>
+              </a:spcAft>
+              <a:defRPr sz="2100" b="1">
+                <a:solidFill>
+                  <a:srgbClr val="143D43"/>
+                </a:solidFill>
+                <a:latin typeface="Aptos"/>
+              </a:defRPr>
+            </a:pPr>
+            <a:r>
+              <a:t>Religiöser Glaube bedeutet nicht automatisch Zustimmung zu einer politischen Ideologie.</a:t>
             </a:r>
           </a:p>
         </p:txBody>
@@ -4962,14 +5578,92 @@
       <p:grpSpPr/>
       <p:sp>
         <p:nvSpPr>
-          <p:cNvPr id="2" name="Rectangle 1"/>
+          <p:cNvPr id="2" name="TextBox 1"/>
+          <p:cNvSpPr txBox="1"/>
+          <p:nvPr/>
+        </p:nvSpPr>
+        <p:spPr>
+          <a:xfrm>
+            <a:off x="594360" y="365760"/>
+            <a:ext cx="10058400" cy="274320"/>
+          </a:xfrm>
+          <a:prstGeom prst="rect">
+            <a:avLst/>
+          </a:prstGeom>
+          <a:noFill/>
+        </p:spPr>
+        <p:txBody>
+          <a:bodyPr wrap="square" lIns="0" rIns="0" tIns="0" bIns="0">
+            <a:spAutoFit/>
+          </a:bodyPr>
+          <a:lstStyle/>
+          <a:p>
+            <a:pPr>
+              <a:spcAft>
+                <a:spcPts val="1000"/>
+              </a:spcAft>
+              <a:defRPr sz="1100" b="1">
+                <a:solidFill>
+                  <a:srgbClr val="C89C51"/>
+                </a:solidFill>
+                <a:latin typeface="Aptos"/>
+              </a:defRPr>
+            </a:pPr>
+            <a:r>
+              <a:t>10 / GENAU HINSEHEN</a:t>
+            </a:r>
+          </a:p>
+        </p:txBody>
+      </p:sp>
+      <p:sp>
+        <p:nvSpPr>
+          <p:cNvPr id="3" name="TextBox 2"/>
+          <p:cNvSpPr txBox="1"/>
+          <p:nvPr/>
+        </p:nvSpPr>
+        <p:spPr>
+          <a:xfrm>
+            <a:off x="594360" y="868680"/>
+            <a:ext cx="10972800" cy="1005840"/>
+          </a:xfrm>
+          <a:prstGeom prst="rect">
+            <a:avLst/>
+          </a:prstGeom>
+          <a:noFill/>
+        </p:spPr>
+        <p:txBody>
+          <a:bodyPr wrap="square" lIns="0" rIns="0" tIns="0" bIns="0">
+            <a:spAutoFit/>
+          </a:bodyPr>
+          <a:lstStyle/>
+          <a:p>
+            <a:pPr>
+              <a:spcAft>
+                <a:spcPts val="1000"/>
+              </a:spcAft>
+              <a:defRPr sz="3400" b="1">
+                <a:solidFill>
+                  <a:srgbClr val="143D43"/>
+                </a:solidFill>
+                <a:latin typeface="Aptos"/>
+              </a:defRPr>
+            </a:pPr>
+            <a:r>
+              <a:t>Hinduismus ≠ Buddhismus</a:t>
+            </a:r>
+          </a:p>
+        </p:txBody>
+      </p:sp>
+      <p:sp>
+        <p:nvSpPr>
+          <p:cNvPr id="4" name="Rectangle 3"/>
           <p:cNvSpPr/>
           <p:nvPr/>
         </p:nvSpPr>
         <p:spPr>
           <a:xfrm>
-            <a:off x="548640" y="594360"/>
-            <a:ext cx="109728" cy="5440680"/>
+            <a:off x="594360" y="6382512"/>
+            <a:ext cx="10972800" cy="18288"/>
           </a:xfrm>
           <a:prstGeom prst="rect">
             <a:avLst/>
@@ -5005,14 +5699,14 @@
       </p:sp>
       <p:sp>
         <p:nvSpPr>
-          <p:cNvPr id="3" name="TextBox 2"/>
+          <p:cNvPr id="5" name="TextBox 4"/>
           <p:cNvSpPr txBox="1"/>
           <p:nvPr/>
         </p:nvSpPr>
         <p:spPr>
           <a:xfrm>
-            <a:off x="868680" y="457200"/>
-            <a:ext cx="10607040" cy="365760"/>
+            <a:off x="594360" y="6510528"/>
+            <a:ext cx="8229600" cy="182880"/>
           </a:xfrm>
           <a:prstGeom prst="rect">
             <a:avLst/>
@@ -5020,16 +5714,16 @@
           <a:noFill/>
         </p:spPr>
         <p:txBody>
-          <a:bodyPr wrap="square">
+          <a:bodyPr wrap="square" lIns="0" rIns="0" tIns="0" bIns="0">
             <a:spAutoFit/>
           </a:bodyPr>
           <a:lstStyle/>
           <a:p>
             <a:pPr>
               <a:spcAft>
-                <a:spcPts val="1800"/>
-              </a:spcAft>
-              <a:defRPr sz="1200" b="1">
+                <a:spcPts val="1000"/>
+              </a:spcAft>
+              <a:defRPr sz="900" b="0">
                 <a:solidFill>
                   <a:srgbClr val="C89C51"/>
                 </a:solidFill>
@@ -5037,21 +5731,21 @@
               </a:defRPr>
             </a:pPr>
             <a:r>
-              <a:t>HINDUISMUS · RELIGION 13</a:t>
-            </a:r>
-          </a:p>
-        </p:txBody>
-      </p:sp>
-      <p:sp>
-        <p:nvSpPr>
-          <p:cNvPr id="4" name="TextBox 3"/>
+              <a:t>RELIGION · KLASSE 13     /     VIELFALT VERSTEHEN</a:t>
+            </a:r>
+          </a:p>
+        </p:txBody>
+      </p:sp>
+      <p:sp>
+        <p:nvSpPr>
+          <p:cNvPr id="6" name="TextBox 5"/>
           <p:cNvSpPr txBox="1"/>
           <p:nvPr/>
         </p:nvSpPr>
         <p:spPr>
           <a:xfrm>
-            <a:off x="868680" y="1005840"/>
-            <a:ext cx="10515600" cy="1143000"/>
+            <a:off x="10972800" y="6492240"/>
+            <a:ext cx="594360" cy="228600"/>
           </a:xfrm>
           <a:prstGeom prst="rect">
             <a:avLst/>
@@ -5059,38 +5753,124 @@
           <a:noFill/>
         </p:spPr>
         <p:txBody>
-          <a:bodyPr wrap="square">
+          <a:bodyPr wrap="square" lIns="0" rIns="0" tIns="0" bIns="0">
             <a:spAutoFit/>
           </a:bodyPr>
           <a:lstStyle/>
           <a:p>
             <a:pPr>
               <a:spcAft>
-                <a:spcPts val="1800"/>
-              </a:spcAft>
-              <a:defRPr sz="3400" b="1">
-                <a:solidFill>
-                  <a:srgbClr val="143D43"/>
-                </a:solidFill>
-                <a:latin typeface="Aptos"/>
-              </a:defRPr>
-            </a:pPr>
-            <a:r>
-              <a:t>Hinduismus und Buddhismus</a:t>
-            </a:r>
-          </a:p>
-        </p:txBody>
-      </p:sp>
-      <p:sp>
-        <p:nvSpPr>
-          <p:cNvPr id="5" name="TextBox 4"/>
+                <a:spcPts val="1000"/>
+              </a:spcAft>
+              <a:defRPr sz="1000" b="0">
+                <a:solidFill>
+                  <a:srgbClr val="C89C51"/>
+                </a:solidFill>
+                <a:latin typeface="Aptos"/>
+              </a:defRPr>
+            </a:pPr>
+            <a:r>
+              <a:t>11</a:t>
+            </a:r>
+          </a:p>
+        </p:txBody>
+      </p:sp>
+      <p:sp>
+        <p:nvSpPr>
+          <p:cNvPr id="7" name="Rounded Rectangle 6"/>
+          <p:cNvSpPr/>
+          <p:nvPr/>
+        </p:nvSpPr>
+        <p:spPr>
+          <a:xfrm>
+            <a:off x="640080" y="2103120"/>
+            <a:ext cx="5303520" cy="3063240"/>
+          </a:xfrm>
+          <a:prstGeom prst="roundRect">
+            <a:avLst/>
+          </a:prstGeom>
+          <a:solidFill>
+            <a:srgbClr val="FFFFFF"/>
+          </a:solidFill>
+          <a:ln>
+            <a:noFill/>
+          </a:ln>
+        </p:spPr>
+        <p:style>
+          <a:lnRef idx="1">
+            <a:schemeClr val="accent1"/>
+          </a:lnRef>
+          <a:fillRef idx="3">
+            <a:schemeClr val="accent1"/>
+          </a:fillRef>
+          <a:effectRef idx="2">
+            <a:schemeClr val="accent1"/>
+          </a:effectRef>
+          <a:fontRef idx="minor">
+            <a:schemeClr val="lt1"/>
+          </a:fontRef>
+        </p:style>
+        <p:txBody>
+          <a:bodyPr rtlCol="0" anchor="ctr"/>
+          <a:lstStyle/>
+          <a:p>
+            <a:pPr algn="ctr"/>
+          </a:p>
+        </p:txBody>
+      </p:sp>
+      <p:sp>
+        <p:nvSpPr>
+          <p:cNvPr id="8" name="Rectangle 7"/>
+          <p:cNvSpPr/>
+          <p:nvPr/>
+        </p:nvSpPr>
+        <p:spPr>
+          <a:xfrm>
+            <a:off x="822959" y="2304288"/>
+            <a:ext cx="54864" cy="384048"/>
+          </a:xfrm>
+          <a:prstGeom prst="rect">
+            <a:avLst/>
+          </a:prstGeom>
+          <a:solidFill>
+            <a:srgbClr val="C89C51"/>
+          </a:solidFill>
+          <a:ln>
+            <a:noFill/>
+          </a:ln>
+        </p:spPr>
+        <p:style>
+          <a:lnRef idx="1">
+            <a:schemeClr val="accent1"/>
+          </a:lnRef>
+          <a:fillRef idx="3">
+            <a:schemeClr val="accent1"/>
+          </a:fillRef>
+          <a:effectRef idx="2">
+            <a:schemeClr val="accent1"/>
+          </a:effectRef>
+          <a:fontRef idx="minor">
+            <a:schemeClr val="lt1"/>
+          </a:fontRef>
+        </p:style>
+        <p:txBody>
+          <a:bodyPr rtlCol="0" anchor="ctr"/>
+          <a:lstStyle/>
+          <a:p>
+            <a:pPr algn="ctr"/>
+          </a:p>
+        </p:txBody>
+      </p:sp>
+      <p:sp>
+        <p:nvSpPr>
+          <p:cNvPr id="9" name="TextBox 8"/>
           <p:cNvSpPr txBox="1"/>
           <p:nvPr/>
         </p:nvSpPr>
         <p:spPr>
           <a:xfrm>
-            <a:off x="914400" y="2377440"/>
-            <a:ext cx="10241280" cy="3566160"/>
+            <a:off x="1005840" y="2286000"/>
+            <a:ext cx="4754880" cy="548640"/>
           </a:xfrm>
           <a:prstGeom prst="rect">
             <a:avLst/>
@@ -5098,86 +5878,38 @@
           <a:noFill/>
         </p:spPr>
         <p:txBody>
-          <a:bodyPr wrap="square">
+          <a:bodyPr wrap="square" lIns="0" rIns="0" tIns="0" bIns="0">
             <a:spAutoFit/>
           </a:bodyPr>
           <a:lstStyle/>
           <a:p>
             <a:pPr>
               <a:spcAft>
-                <a:spcPts val="1800"/>
-              </a:spcAft>
-              <a:defRPr sz="2500" b="0">
-                <a:solidFill>
-                  <a:srgbClr val="173238"/>
-                </a:solidFill>
-                <a:latin typeface="Aptos"/>
-              </a:defRPr>
-            </a:pPr>
-            <a:r>
-              <a:t>Gemeinsam: Karma, Wiedergeburt, Befreiung</a:t>
-            </a:r>
-          </a:p>
-          <a:p>
-            <a:pPr>
-              <a:spcAft>
-                <a:spcPts val="1800"/>
-              </a:spcAft>
-              <a:defRPr sz="2500" b="0">
-                <a:solidFill>
-                  <a:srgbClr val="173238"/>
-                </a:solidFill>
-                <a:latin typeface="Aptos"/>
-              </a:defRPr>
-            </a:pPr>
-            <a:r>
-              <a:t>Unterschiedliche Deutungen von Selbst und Befreiung</a:t>
-            </a:r>
-          </a:p>
-          <a:p>
-            <a:pPr>
-              <a:spcAft>
-                <a:spcPts val="1800"/>
-              </a:spcAft>
-              <a:defRPr sz="2500" b="0">
-                <a:solidFill>
-                  <a:srgbClr val="173238"/>
-                </a:solidFill>
-                <a:latin typeface="Aptos"/>
-              </a:defRPr>
-            </a:pPr>
-            <a:r>
-              <a:t>Buddhismus: Anatta – kein dauerhaftes, unabhängiges Selbst</a:t>
-            </a:r>
-          </a:p>
-          <a:p>
-            <a:pPr>
-              <a:spcAft>
-                <a:spcPts val="1800"/>
-              </a:spcAft>
-              <a:defRPr sz="2500" b="0">
-                <a:solidFill>
-                  <a:srgbClr val="173238"/>
-                </a:solidFill>
-                <a:latin typeface="Aptos"/>
-              </a:defRPr>
-            </a:pPr>
-            <a:r>
-              <a:t>Die Bildreferenz zeigt eine buddhistische Stupa</a:t>
-            </a:r>
-          </a:p>
-        </p:txBody>
-      </p:sp>
-      <p:sp>
-        <p:nvSpPr>
-          <p:cNvPr id="6" name="TextBox 5"/>
+                <a:spcPts val="1000"/>
+              </a:spcAft>
+              <a:defRPr sz="2300" b="1">
+                <a:solidFill>
+                  <a:srgbClr val="143D43"/>
+                </a:solidFill>
+                <a:latin typeface="Aptos"/>
+              </a:defRPr>
+            </a:pPr>
+            <a:r>
+              <a:t>Hinduistische Schulen</a:t>
+            </a:r>
+          </a:p>
+        </p:txBody>
+      </p:sp>
+      <p:sp>
+        <p:nvSpPr>
+          <p:cNvPr id="10" name="TextBox 9"/>
           <p:cNvSpPr txBox="1"/>
           <p:nvPr/>
         </p:nvSpPr>
         <p:spPr>
           <a:xfrm>
-            <a:off x="914400" y="6446520"/>
-            <a:ext cx="9144000" cy="228600"/>
+            <a:off x="914400" y="2971800"/>
+            <a:ext cx="4754880" cy="2103120"/>
           </a:xfrm>
           <a:prstGeom prst="rect">
             <a:avLst/>
@@ -5185,38 +5917,140 @@
           <a:noFill/>
         </p:spPr>
         <p:txBody>
-          <a:bodyPr wrap="square">
+          <a:bodyPr wrap="square" lIns="0" rIns="0" tIns="0" bIns="0">
             <a:spAutoFit/>
           </a:bodyPr>
           <a:lstStyle/>
           <a:p>
             <a:pPr>
               <a:spcAft>
-                <a:spcPts val="1800"/>
-              </a:spcAft>
-              <a:defRPr sz="1000" b="0">
-                <a:solidFill>
-                  <a:srgbClr val="C89C51"/>
-                </a:solidFill>
-                <a:latin typeface="Aptos"/>
-              </a:defRPr>
-            </a:pPr>
-            <a:r>
-              <a:t>Vielfalt verstehen · Begriffe verbinden · kritisch nachfragen</a:t>
-            </a:r>
-          </a:p>
-        </p:txBody>
-      </p:sp>
-      <p:sp>
-        <p:nvSpPr>
-          <p:cNvPr id="7" name="TextBox 6"/>
+                <a:spcPts val="1000"/>
+              </a:spcAft>
+              <a:defRPr sz="2000" b="0">
+                <a:solidFill>
+                  <a:srgbClr val="173238"/>
+                </a:solidFill>
+                <a:latin typeface="Aptos"/>
+              </a:defRPr>
+            </a:pPr>
+            <a:r>
+              <a:t>Viele sprechen von Atman, dem Selbst.</a:t>
+            </a:r>
+          </a:p>
+          <a:p>
+            <a:pPr>
+              <a:spcAft>
+                <a:spcPts val="1000"/>
+              </a:spcAft>
+              <a:defRPr sz="2000" b="0">
+                <a:solidFill>
+                  <a:srgbClr val="173238"/>
+                </a:solidFill>
+                <a:latin typeface="Aptos"/>
+              </a:defRPr>
+            </a:pPr>
+            <a:r>
+              <a:t>Unterschiedliche Lehren zur Befreiung.</a:t>
+            </a:r>
+          </a:p>
+        </p:txBody>
+      </p:sp>
+      <p:sp>
+        <p:nvSpPr>
+          <p:cNvPr id="11" name="Rounded Rectangle 10"/>
+          <p:cNvSpPr/>
+          <p:nvPr/>
+        </p:nvSpPr>
+        <p:spPr>
+          <a:xfrm>
+            <a:off x="6217920" y="2103120"/>
+            <a:ext cx="5303520" cy="3063240"/>
+          </a:xfrm>
+          <a:prstGeom prst="roundRect">
+            <a:avLst/>
+          </a:prstGeom>
+          <a:solidFill>
+            <a:srgbClr val="FFFFFF"/>
+          </a:solidFill>
+          <a:ln>
+            <a:noFill/>
+          </a:ln>
+        </p:spPr>
+        <p:style>
+          <a:lnRef idx="1">
+            <a:schemeClr val="accent1"/>
+          </a:lnRef>
+          <a:fillRef idx="3">
+            <a:schemeClr val="accent1"/>
+          </a:fillRef>
+          <a:effectRef idx="2">
+            <a:schemeClr val="accent1"/>
+          </a:effectRef>
+          <a:fontRef idx="minor">
+            <a:schemeClr val="lt1"/>
+          </a:fontRef>
+        </p:style>
+        <p:txBody>
+          <a:bodyPr rtlCol="0" anchor="ctr"/>
+          <a:lstStyle/>
+          <a:p>
+            <a:pPr algn="ctr"/>
+          </a:p>
+        </p:txBody>
+      </p:sp>
+      <p:sp>
+        <p:nvSpPr>
+          <p:cNvPr id="12" name="Rectangle 11"/>
+          <p:cNvSpPr/>
+          <p:nvPr/>
+        </p:nvSpPr>
+        <p:spPr>
+          <a:xfrm>
+            <a:off x="6400800" y="2304288"/>
+            <a:ext cx="54864" cy="384048"/>
+          </a:xfrm>
+          <a:prstGeom prst="rect">
+            <a:avLst/>
+          </a:prstGeom>
+          <a:solidFill>
+            <a:srgbClr val="C89C51"/>
+          </a:solidFill>
+          <a:ln>
+            <a:noFill/>
+          </a:ln>
+        </p:spPr>
+        <p:style>
+          <a:lnRef idx="1">
+            <a:schemeClr val="accent1"/>
+          </a:lnRef>
+          <a:fillRef idx="3">
+            <a:schemeClr val="accent1"/>
+          </a:fillRef>
+          <a:effectRef idx="2">
+            <a:schemeClr val="accent1"/>
+          </a:effectRef>
+          <a:fontRef idx="minor">
+            <a:schemeClr val="lt1"/>
+          </a:fontRef>
+        </p:style>
+        <p:txBody>
+          <a:bodyPr rtlCol="0" anchor="ctr"/>
+          <a:lstStyle/>
+          <a:p>
+            <a:pPr algn="ctr"/>
+          </a:p>
+        </p:txBody>
+      </p:sp>
+      <p:sp>
+        <p:nvSpPr>
+          <p:cNvPr id="13" name="TextBox 12"/>
           <p:cNvSpPr txBox="1"/>
           <p:nvPr/>
         </p:nvSpPr>
         <p:spPr>
           <a:xfrm>
-            <a:off x="10972800" y="6428232"/>
-            <a:ext cx="457200" cy="274320"/>
+            <a:off x="6583680" y="2286000"/>
+            <a:ext cx="4754880" cy="548640"/>
           </a:xfrm>
           <a:prstGeom prst="rect">
             <a:avLst/>
@@ -5224,24 +6058,118 @@
           <a:noFill/>
         </p:spPr>
         <p:txBody>
-          <a:bodyPr wrap="square">
+          <a:bodyPr wrap="square" lIns="0" rIns="0" tIns="0" bIns="0">
             <a:spAutoFit/>
           </a:bodyPr>
           <a:lstStyle/>
           <a:p>
             <a:pPr>
               <a:spcAft>
-                <a:spcPts val="1800"/>
-              </a:spcAft>
-              <a:defRPr sz="1100" b="0">
-                <a:solidFill>
-                  <a:srgbClr val="C89C51"/>
-                </a:solidFill>
-                <a:latin typeface="Aptos"/>
-              </a:defRPr>
-            </a:pPr>
-            <a:r>
-              <a:t>11</a:t>
+                <a:spcPts val="1000"/>
+              </a:spcAft>
+              <a:defRPr sz="2300" b="1">
+                <a:solidFill>
+                  <a:srgbClr val="143D43"/>
+                </a:solidFill>
+                <a:latin typeface="Aptos"/>
+              </a:defRPr>
+            </a:pPr>
+            <a:r>
+              <a:t>Buddhistische Traditionen</a:t>
+            </a:r>
+          </a:p>
+        </p:txBody>
+      </p:sp>
+      <p:sp>
+        <p:nvSpPr>
+          <p:cNvPr id="14" name="TextBox 13"/>
+          <p:cNvSpPr txBox="1"/>
+          <p:nvPr/>
+        </p:nvSpPr>
+        <p:spPr>
+          <a:xfrm>
+            <a:off x="6492240" y="2971800"/>
+            <a:ext cx="4754880" cy="2103120"/>
+          </a:xfrm>
+          <a:prstGeom prst="rect">
+            <a:avLst/>
+          </a:prstGeom>
+          <a:noFill/>
+        </p:spPr>
+        <p:txBody>
+          <a:bodyPr wrap="square" lIns="0" rIns="0" tIns="0" bIns="0">
+            <a:spAutoFit/>
+          </a:bodyPr>
+          <a:lstStyle/>
+          <a:p>
+            <a:pPr>
+              <a:spcAft>
+                <a:spcPts val="1000"/>
+              </a:spcAft>
+              <a:defRPr sz="2000" b="0">
+                <a:solidFill>
+                  <a:srgbClr val="173238"/>
+                </a:solidFill>
+                <a:latin typeface="Aptos"/>
+              </a:defRPr>
+            </a:pPr>
+            <a:r>
+              <a:t>Anatta: kein dauerhaftes, unabhängiges Selbst.</a:t>
+            </a:r>
+          </a:p>
+          <a:p>
+            <a:pPr>
+              <a:spcAft>
+                <a:spcPts val="1000"/>
+              </a:spcAft>
+              <a:defRPr sz="2000" b="0">
+                <a:solidFill>
+                  <a:srgbClr val="173238"/>
+                </a:solidFill>
+                <a:latin typeface="Aptos"/>
+              </a:defRPr>
+            </a:pPr>
+            <a:r>
+              <a:t>Nirvana als Befreiungsziel.</a:t>
+            </a:r>
+          </a:p>
+        </p:txBody>
+      </p:sp>
+      <p:sp>
+        <p:nvSpPr>
+          <p:cNvPr id="15" name="TextBox 14"/>
+          <p:cNvSpPr txBox="1"/>
+          <p:nvPr/>
+        </p:nvSpPr>
+        <p:spPr>
+          <a:xfrm>
+            <a:off x="731520" y="5440680"/>
+            <a:ext cx="10698480" cy="640080"/>
+          </a:xfrm>
+          <a:prstGeom prst="rect">
+            <a:avLst/>
+          </a:prstGeom>
+          <a:noFill/>
+        </p:spPr>
+        <p:txBody>
+          <a:bodyPr wrap="square" lIns="0" rIns="0" tIns="0" bIns="0">
+            <a:spAutoFit/>
+          </a:bodyPr>
+          <a:lstStyle/>
+          <a:p>
+            <a:pPr>
+              <a:spcAft>
+                <a:spcPts val="1000"/>
+              </a:spcAft>
+              <a:defRPr sz="1800" b="0">
+                <a:solidFill>
+                  <a:srgbClr val="577477"/>
+                </a:solidFill>
+                <a:latin typeface="Aptos"/>
+              </a:defRPr>
+            </a:pPr>
+            <a:r>
+              <a:t>Gemeinsame Begriffe, unterschiedliche Deutungen. Die Bildreferenz zeigt eine buddhistische Stupa.</a:t>
             </a:r>
           </a:p>
         </p:txBody>
@@ -5274,14 +6202,92 @@
       <p:grpSpPr/>
       <p:sp>
         <p:nvSpPr>
-          <p:cNvPr id="2" name="Rectangle 1"/>
+          <p:cNvPr id="2" name="TextBox 1"/>
+          <p:cNvSpPr txBox="1"/>
+          <p:nvPr/>
+        </p:nvSpPr>
+        <p:spPr>
+          <a:xfrm>
+            <a:off x="594360" y="365760"/>
+            <a:ext cx="10058400" cy="274320"/>
+          </a:xfrm>
+          <a:prstGeom prst="rect">
+            <a:avLst/>
+          </a:prstGeom>
+          <a:noFill/>
+        </p:spPr>
+        <p:txBody>
+          <a:bodyPr wrap="square" lIns="0" rIns="0" tIns="0" bIns="0">
+            <a:spAutoFit/>
+          </a:bodyPr>
+          <a:lstStyle/>
+          <a:p>
+            <a:pPr>
+              <a:spcAft>
+                <a:spcPts val="1000"/>
+              </a:spcAft>
+              <a:defRPr sz="1100" b="1">
+                <a:solidFill>
+                  <a:srgbClr val="C89C51"/>
+                </a:solidFill>
+                <a:latin typeface="Aptos"/>
+              </a:defRPr>
+            </a:pPr>
+            <a:r>
+              <a:t>11 / FAZIT &amp; DISKUSSION</a:t>
+            </a:r>
+          </a:p>
+        </p:txBody>
+      </p:sp>
+      <p:sp>
+        <p:nvSpPr>
+          <p:cNvPr id="3" name="TextBox 2"/>
+          <p:cNvSpPr txBox="1"/>
+          <p:nvPr/>
+        </p:nvSpPr>
+        <p:spPr>
+          <a:xfrm>
+            <a:off x="594360" y="868680"/>
+            <a:ext cx="10972800" cy="1005840"/>
+          </a:xfrm>
+          <a:prstGeom prst="rect">
+            <a:avLst/>
+          </a:prstGeom>
+          <a:noFill/>
+        </p:spPr>
+        <p:txBody>
+          <a:bodyPr wrap="square" lIns="0" rIns="0" tIns="0" bIns="0">
+            <a:spAutoFit/>
+          </a:bodyPr>
+          <a:lstStyle/>
+          <a:p>
+            <a:pPr>
+              <a:spcAft>
+                <a:spcPts val="1000"/>
+              </a:spcAft>
+              <a:defRPr sz="3400" b="1">
+                <a:solidFill>
+                  <a:srgbClr val="F5EFE3"/>
+                </a:solidFill>
+                <a:latin typeface="Aptos"/>
+              </a:defRPr>
+            </a:pPr>
+            <a:r>
+              <a:t>Einheit in der Vielfalt?</a:t>
+            </a:r>
+          </a:p>
+        </p:txBody>
+      </p:sp>
+      <p:sp>
+        <p:nvSpPr>
+          <p:cNvPr id="4" name="Rectangle 3"/>
           <p:cNvSpPr/>
           <p:nvPr/>
         </p:nvSpPr>
         <p:spPr>
           <a:xfrm>
-            <a:off x="548640" y="594360"/>
-            <a:ext cx="109728" cy="5440680"/>
+            <a:off x="594360" y="6382512"/>
+            <a:ext cx="10972800" cy="18288"/>
           </a:xfrm>
           <a:prstGeom prst="rect">
             <a:avLst/>
@@ -5317,14 +6323,14 @@
       </p:sp>
       <p:sp>
         <p:nvSpPr>
-          <p:cNvPr id="3" name="TextBox 2"/>
+          <p:cNvPr id="5" name="TextBox 4"/>
           <p:cNvSpPr txBox="1"/>
           <p:nvPr/>
         </p:nvSpPr>
         <p:spPr>
           <a:xfrm>
-            <a:off x="868680" y="457200"/>
-            <a:ext cx="10607040" cy="365760"/>
+            <a:off x="594360" y="6510528"/>
+            <a:ext cx="8229600" cy="182880"/>
           </a:xfrm>
           <a:prstGeom prst="rect">
             <a:avLst/>
@@ -5332,16 +6338,16 @@
           <a:noFill/>
         </p:spPr>
         <p:txBody>
-          <a:bodyPr wrap="square">
+          <a:bodyPr wrap="square" lIns="0" rIns="0" tIns="0" bIns="0">
             <a:spAutoFit/>
           </a:bodyPr>
           <a:lstStyle/>
           <a:p>
             <a:pPr>
               <a:spcAft>
-                <a:spcPts val="1800"/>
-              </a:spcAft>
-              <a:defRPr sz="1200" b="1">
+                <a:spcPts val="1000"/>
+              </a:spcAft>
+              <a:defRPr sz="900" b="0">
                 <a:solidFill>
                   <a:srgbClr val="C89C51"/>
                 </a:solidFill>
@@ -5349,21 +6355,21 @@
               </a:defRPr>
             </a:pPr>
             <a:r>
-              <a:t>HINDUISMUS · RELIGION 13</a:t>
-            </a:r>
-          </a:p>
-        </p:txBody>
-      </p:sp>
-      <p:sp>
-        <p:nvSpPr>
-          <p:cNvPr id="4" name="TextBox 3"/>
+              <a:t>RELIGION · KLASSE 13     /     VIELFALT VERSTEHEN</a:t>
+            </a:r>
+          </a:p>
+        </p:txBody>
+      </p:sp>
+      <p:sp>
+        <p:nvSpPr>
+          <p:cNvPr id="6" name="TextBox 5"/>
           <p:cNvSpPr txBox="1"/>
           <p:nvPr/>
         </p:nvSpPr>
         <p:spPr>
           <a:xfrm>
-            <a:off x="868680" y="1005840"/>
-            <a:ext cx="10515600" cy="1143000"/>
+            <a:off x="10972800" y="6492240"/>
+            <a:ext cx="594360" cy="228600"/>
           </a:xfrm>
           <a:prstGeom prst="rect">
             <a:avLst/>
@@ -5371,38 +6377,38 @@
           <a:noFill/>
         </p:spPr>
         <p:txBody>
-          <a:bodyPr wrap="square">
+          <a:bodyPr wrap="square" lIns="0" rIns="0" tIns="0" bIns="0">
             <a:spAutoFit/>
           </a:bodyPr>
           <a:lstStyle/>
           <a:p>
             <a:pPr>
               <a:spcAft>
-                <a:spcPts val="1800"/>
-              </a:spcAft>
-              <a:defRPr sz="3400" b="1">
-                <a:solidFill>
-                  <a:srgbClr val="F5EFE3"/>
-                </a:solidFill>
-                <a:latin typeface="Aptos"/>
-              </a:defRPr>
-            </a:pPr>
-            <a:r>
-              <a:t>Fazit: Einheit in der Vielfalt?</a:t>
-            </a:r>
-          </a:p>
-        </p:txBody>
-      </p:sp>
-      <p:sp>
-        <p:nvSpPr>
-          <p:cNvPr id="5" name="TextBox 4"/>
+                <a:spcPts val="1000"/>
+              </a:spcAft>
+              <a:defRPr sz="1000" b="0">
+                <a:solidFill>
+                  <a:srgbClr val="C89C51"/>
+                </a:solidFill>
+                <a:latin typeface="Aptos"/>
+              </a:defRPr>
+            </a:pPr>
+            <a:r>
+              <a:t>12</a:t>
+            </a:r>
+          </a:p>
+        </p:txBody>
+      </p:sp>
+      <p:sp>
+        <p:nvSpPr>
+          <p:cNvPr id="7" name="TextBox 6"/>
           <p:cNvSpPr txBox="1"/>
           <p:nvPr/>
         </p:nvSpPr>
         <p:spPr>
           <a:xfrm>
-            <a:off x="914400" y="2377440"/>
-            <a:ext cx="10241280" cy="3566160"/>
+            <a:off x="731520" y="2103120"/>
+            <a:ext cx="10607040" cy="1325880"/>
           </a:xfrm>
           <a:prstGeom prst="rect">
             <a:avLst/>
@@ -5410,16 +6416,16 @@
           <a:noFill/>
         </p:spPr>
         <p:txBody>
-          <a:bodyPr wrap="square">
+          <a:bodyPr wrap="square" lIns="0" rIns="0" tIns="0" bIns="0">
             <a:spAutoFit/>
           </a:bodyPr>
           <a:lstStyle/>
           <a:p>
             <a:pPr>
               <a:spcAft>
-                <a:spcPts val="1800"/>
-              </a:spcAft>
-              <a:defRPr sz="2500" b="0">
+                <a:spcPts val="1000"/>
+              </a:spcAft>
+              <a:defRPr sz="3800" b="1">
                 <a:solidFill>
                   <a:srgbClr val="F5EFE3"/>
                 </a:solidFill>
@@ -5427,15 +6433,15 @@
               </a:defRPr>
             </a:pPr>
             <a:r>
-              <a:t>Gemeinsame Fragen – unterschiedliche Antworten</a:t>
-            </a:r>
-          </a:p>
-          <a:p>
-            <a:pPr>
-              <a:spcAft>
-                <a:spcPts val="1800"/>
-              </a:spcAft>
-              <a:defRPr sz="2500" b="0">
+              <a:t>Braucht eine Religion</a:t>
+            </a:r>
+          </a:p>
+          <a:p>
+            <a:pPr>
+              <a:spcAft>
+                <a:spcPts val="1000"/>
+              </a:spcAft>
+              <a:defRPr sz="3800" b="1">
                 <a:solidFill>
                   <a:srgbClr val="F5EFE3"/>
                 </a:solidFill>
@@ -5443,37 +6449,64 @@
               </a:defRPr>
             </a:pPr>
             <a:r>
-              <a:t>Religion umfasst Denken, Praxis und soziale Wirklichkeit</a:t>
-            </a:r>
-          </a:p>
-          <a:p>
-            <a:pPr>
-              <a:spcAft>
-                <a:spcPts val="1800"/>
-              </a:spcAft>
-              <a:defRPr sz="2500" b="0">
-                <a:solidFill>
-                  <a:srgbClr val="F5EFE3"/>
-                </a:solidFill>
-                <a:latin typeface="Aptos"/>
-              </a:defRPr>
-            </a:pPr>
-            <a:r>
-              <a:t>Diskussion: Braucht eine Religion eine einheitliche Lehre?</a:t>
-            </a:r>
-          </a:p>
-        </p:txBody>
-      </p:sp>
-      <p:sp>
-        <p:nvSpPr>
-          <p:cNvPr id="6" name="TextBox 5"/>
+              <a:t>eine einheitliche Lehre?</a:t>
+            </a:r>
+          </a:p>
+        </p:txBody>
+      </p:sp>
+      <p:sp>
+        <p:nvSpPr>
+          <p:cNvPr id="8" name="Rounded Rectangle 7"/>
+          <p:cNvSpPr/>
+          <p:nvPr/>
+        </p:nvSpPr>
+        <p:spPr>
+          <a:xfrm>
+            <a:off x="731520" y="4206240"/>
+            <a:ext cx="3383280" cy="1005840"/>
+          </a:xfrm>
+          <a:prstGeom prst="roundRect">
+            <a:avLst/>
+          </a:prstGeom>
+          <a:solidFill>
+            <a:srgbClr val="C89C51"/>
+          </a:solidFill>
+          <a:ln>
+            <a:noFill/>
+          </a:ln>
+        </p:spPr>
+        <p:style>
+          <a:lnRef idx="1">
+            <a:schemeClr val="accent1"/>
+          </a:lnRef>
+          <a:fillRef idx="3">
+            <a:schemeClr val="accent1"/>
+          </a:fillRef>
+          <a:effectRef idx="2">
+            <a:schemeClr val="accent1"/>
+          </a:effectRef>
+          <a:fontRef idx="minor">
+            <a:schemeClr val="lt1"/>
+          </a:fontRef>
+        </p:style>
+        <p:txBody>
+          <a:bodyPr rtlCol="0" anchor="ctr"/>
+          <a:lstStyle/>
+          <a:p>
+            <a:pPr algn="ctr"/>
+          </a:p>
+        </p:txBody>
+      </p:sp>
+      <p:sp>
+        <p:nvSpPr>
+          <p:cNvPr id="9" name="TextBox 8"/>
           <p:cNvSpPr txBox="1"/>
           <p:nvPr/>
         </p:nvSpPr>
         <p:spPr>
           <a:xfrm>
-            <a:off x="914400" y="6446520"/>
-            <a:ext cx="9144000" cy="228600"/>
+            <a:off x="914400" y="4480560"/>
+            <a:ext cx="3017520" cy="594360"/>
           </a:xfrm>
           <a:prstGeom prst="rect">
             <a:avLst/>
@@ -5481,38 +6514,81 @@
           <a:noFill/>
         </p:spPr>
         <p:txBody>
-          <a:bodyPr wrap="square">
+          <a:bodyPr wrap="square" lIns="0" rIns="0" tIns="0" bIns="0">
             <a:spAutoFit/>
           </a:bodyPr>
           <a:lstStyle/>
           <a:p>
             <a:pPr>
               <a:spcAft>
-                <a:spcPts val="1800"/>
-              </a:spcAft>
-              <a:defRPr sz="1000" b="0">
-                <a:solidFill>
-                  <a:srgbClr val="C89C51"/>
-                </a:solidFill>
-                <a:latin typeface="Aptos"/>
-              </a:defRPr>
-            </a:pPr>
-            <a:r>
-              <a:t>Vielfalt verstehen · Begriffe verbinden · kritisch nachfragen</a:t>
-            </a:r>
-          </a:p>
-        </p:txBody>
-      </p:sp>
-      <p:sp>
-        <p:nvSpPr>
-          <p:cNvPr id="7" name="TextBox 6"/>
+                <a:spcPts val="1000"/>
+              </a:spcAft>
+              <a:defRPr sz="2100" b="1">
+                <a:solidFill>
+                  <a:srgbClr val="143D43"/>
+                </a:solidFill>
+                <a:latin typeface="Aptos"/>
+              </a:defRPr>
+            </a:pPr>
+            <a:r>
+              <a:t>Gemeinsame Fragen</a:t>
+            </a:r>
+          </a:p>
+        </p:txBody>
+      </p:sp>
+      <p:sp>
+        <p:nvSpPr>
+          <p:cNvPr id="10" name="Rounded Rectangle 9"/>
+          <p:cNvSpPr/>
+          <p:nvPr/>
+        </p:nvSpPr>
+        <p:spPr>
+          <a:xfrm>
+            <a:off x="4389120" y="4206240"/>
+            <a:ext cx="3383280" cy="1005840"/>
+          </a:xfrm>
+          <a:prstGeom prst="roundRect">
+            <a:avLst/>
+          </a:prstGeom>
+          <a:solidFill>
+            <a:srgbClr val="C89C51"/>
+          </a:solidFill>
+          <a:ln>
+            <a:noFill/>
+          </a:ln>
+        </p:spPr>
+        <p:style>
+          <a:lnRef idx="1">
+            <a:schemeClr val="accent1"/>
+          </a:lnRef>
+          <a:fillRef idx="3">
+            <a:schemeClr val="accent1"/>
+          </a:fillRef>
+          <a:effectRef idx="2">
+            <a:schemeClr val="accent1"/>
+          </a:effectRef>
+          <a:fontRef idx="minor">
+            <a:schemeClr val="lt1"/>
+          </a:fontRef>
+        </p:style>
+        <p:txBody>
+          <a:bodyPr rtlCol="0" anchor="ctr"/>
+          <a:lstStyle/>
+          <a:p>
+            <a:pPr algn="ctr"/>
+          </a:p>
+        </p:txBody>
+      </p:sp>
+      <p:sp>
+        <p:nvSpPr>
+          <p:cNvPr id="11" name="TextBox 10"/>
           <p:cNvSpPr txBox="1"/>
           <p:nvPr/>
         </p:nvSpPr>
         <p:spPr>
           <a:xfrm>
-            <a:off x="10972800" y="6428232"/>
-            <a:ext cx="457200" cy="274320"/>
+            <a:off x="4572000" y="4480560"/>
+            <a:ext cx="3017520" cy="594360"/>
           </a:xfrm>
           <a:prstGeom prst="rect">
             <a:avLst/>
@@ -5520,24 +6596,145 @@
           <a:noFill/>
         </p:spPr>
         <p:txBody>
-          <a:bodyPr wrap="square">
+          <a:bodyPr wrap="square" lIns="0" rIns="0" tIns="0" bIns="0">
             <a:spAutoFit/>
           </a:bodyPr>
           <a:lstStyle/>
           <a:p>
             <a:pPr>
               <a:spcAft>
-                <a:spcPts val="1800"/>
-              </a:spcAft>
-              <a:defRPr sz="1100" b="0">
-                <a:solidFill>
-                  <a:srgbClr val="C89C51"/>
-                </a:solidFill>
-                <a:latin typeface="Aptos"/>
-              </a:defRPr>
-            </a:pPr>
-            <a:r>
-              <a:t>12</a:t>
+                <a:spcPts val="1000"/>
+              </a:spcAft>
+              <a:defRPr sz="2100" b="1">
+                <a:solidFill>
+                  <a:srgbClr val="143D43"/>
+                </a:solidFill>
+                <a:latin typeface="Aptos"/>
+              </a:defRPr>
+            </a:pPr>
+            <a:r>
+              <a:t>Vielfältige Antworten</a:t>
+            </a:r>
+          </a:p>
+        </p:txBody>
+      </p:sp>
+      <p:sp>
+        <p:nvSpPr>
+          <p:cNvPr id="12" name="Rounded Rectangle 11"/>
+          <p:cNvSpPr/>
+          <p:nvPr/>
+        </p:nvSpPr>
+        <p:spPr>
+          <a:xfrm>
+            <a:off x="8046720" y="4206240"/>
+            <a:ext cx="3383280" cy="1005840"/>
+          </a:xfrm>
+          <a:prstGeom prst="roundRect">
+            <a:avLst/>
+          </a:prstGeom>
+          <a:solidFill>
+            <a:srgbClr val="C89C51"/>
+          </a:solidFill>
+          <a:ln>
+            <a:noFill/>
+          </a:ln>
+        </p:spPr>
+        <p:style>
+          <a:lnRef idx="1">
+            <a:schemeClr val="accent1"/>
+          </a:lnRef>
+          <a:fillRef idx="3">
+            <a:schemeClr val="accent1"/>
+          </a:fillRef>
+          <a:effectRef idx="2">
+            <a:schemeClr val="accent1"/>
+          </a:effectRef>
+          <a:fontRef idx="minor">
+            <a:schemeClr val="lt1"/>
+          </a:fontRef>
+        </p:style>
+        <p:txBody>
+          <a:bodyPr rtlCol="0" anchor="ctr"/>
+          <a:lstStyle/>
+          <a:p>
+            <a:pPr algn="ctr"/>
+          </a:p>
+        </p:txBody>
+      </p:sp>
+      <p:sp>
+        <p:nvSpPr>
+          <p:cNvPr id="13" name="TextBox 12"/>
+          <p:cNvSpPr txBox="1"/>
+          <p:nvPr/>
+        </p:nvSpPr>
+        <p:spPr>
+          <a:xfrm>
+            <a:off x="8229600" y="4480560"/>
+            <a:ext cx="3017520" cy="594360"/>
+          </a:xfrm>
+          <a:prstGeom prst="rect">
+            <a:avLst/>
+          </a:prstGeom>
+          <a:noFill/>
+        </p:spPr>
+        <p:txBody>
+          <a:bodyPr wrap="square" lIns="0" rIns="0" tIns="0" bIns="0">
+            <a:spAutoFit/>
+          </a:bodyPr>
+          <a:lstStyle/>
+          <a:p>
+            <a:pPr>
+              <a:spcAft>
+                <a:spcPts val="1000"/>
+              </a:spcAft>
+              <a:defRPr sz="2100" b="1">
+                <a:solidFill>
+                  <a:srgbClr val="143D43"/>
+                </a:solidFill>
+                <a:latin typeface="Aptos"/>
+              </a:defRPr>
+            </a:pPr>
+            <a:r>
+              <a:t>Gelebte Praxis</a:t>
+            </a:r>
+          </a:p>
+        </p:txBody>
+      </p:sp>
+      <p:sp>
+        <p:nvSpPr>
+          <p:cNvPr id="14" name="TextBox 13"/>
+          <p:cNvSpPr txBox="1"/>
+          <p:nvPr/>
+        </p:nvSpPr>
+        <p:spPr>
+          <a:xfrm>
+            <a:off x="731520" y="5577840"/>
+            <a:ext cx="10515600" cy="365760"/>
+          </a:xfrm>
+          <a:prstGeom prst="rect">
+            <a:avLst/>
+          </a:prstGeom>
+          <a:noFill/>
+        </p:spPr>
+        <p:txBody>
+          <a:bodyPr wrap="square" lIns="0" rIns="0" tIns="0" bIns="0">
+            <a:spAutoFit/>
+          </a:bodyPr>
+          <a:lstStyle/>
+          <a:p>
+            <a:pPr>
+              <a:spcAft>
+                <a:spcPts val="1000"/>
+              </a:spcAft>
+              <a:defRPr sz="1800" b="0">
+                <a:solidFill>
+                  <a:srgbClr val="F5EFE3"/>
+                </a:solidFill>
+                <a:latin typeface="Aptos"/>
+              </a:defRPr>
+            </a:pPr>
+            <a:r>
+              <a:t>1 Minute Austausch · Welche Gemeinsamkeiten schaffen Zugehörigkeit?</a:t>
             </a:r>
           </a:p>
         </p:txBody>
@@ -5570,14 +6767,92 @@
       <p:grpSpPr/>
       <p:sp>
         <p:nvSpPr>
-          <p:cNvPr id="2" name="Rectangle 1"/>
+          <p:cNvPr id="2" name="TextBox 1"/>
+          <p:cNvSpPr txBox="1"/>
+          <p:nvPr/>
+        </p:nvSpPr>
+        <p:spPr>
+          <a:xfrm>
+            <a:off x="594360" y="365760"/>
+            <a:ext cx="10058400" cy="274320"/>
+          </a:xfrm>
+          <a:prstGeom prst="rect">
+            <a:avLst/>
+          </a:prstGeom>
+          <a:noFill/>
+        </p:spPr>
+        <p:txBody>
+          <a:bodyPr wrap="square" lIns="0" rIns="0" tIns="0" bIns="0">
+            <a:spAutoFit/>
+          </a:bodyPr>
+          <a:lstStyle/>
+          <a:p>
+            <a:pPr>
+              <a:spcAft>
+                <a:spcPts val="1000"/>
+              </a:spcAft>
+              <a:defRPr sz="1100" b="1">
+                <a:solidFill>
+                  <a:srgbClr val="C89C51"/>
+                </a:solidFill>
+                <a:latin typeface="Aptos"/>
+              </a:defRPr>
+            </a:pPr>
+            <a:r>
+              <a:t>ZUM NACHLESEN</a:t>
+            </a:r>
+          </a:p>
+        </p:txBody>
+      </p:sp>
+      <p:sp>
+        <p:nvSpPr>
+          <p:cNvPr id="3" name="TextBox 2"/>
+          <p:cNvSpPr txBox="1"/>
+          <p:nvPr/>
+        </p:nvSpPr>
+        <p:spPr>
+          <a:xfrm>
+            <a:off x="594360" y="868680"/>
+            <a:ext cx="10972800" cy="1005840"/>
+          </a:xfrm>
+          <a:prstGeom prst="rect">
+            <a:avLst/>
+          </a:prstGeom>
+          <a:noFill/>
+        </p:spPr>
+        <p:txBody>
+          <a:bodyPr wrap="square" lIns="0" rIns="0" tIns="0" bIns="0">
+            <a:spAutoFit/>
+          </a:bodyPr>
+          <a:lstStyle/>
+          <a:p>
+            <a:pPr>
+              <a:spcAft>
+                <a:spcPts val="1000"/>
+              </a:spcAft>
+              <a:defRPr sz="3400" b="1">
+                <a:solidFill>
+                  <a:srgbClr val="143D43"/>
+                </a:solidFill>
+                <a:latin typeface="Aptos"/>
+              </a:defRPr>
+            </a:pPr>
+            <a:r>
+              <a:t>Quellen &amp; Bildnachweise</a:t>
+            </a:r>
+          </a:p>
+        </p:txBody>
+      </p:sp>
+      <p:sp>
+        <p:nvSpPr>
+          <p:cNvPr id="4" name="Rectangle 3"/>
           <p:cNvSpPr/>
           <p:nvPr/>
         </p:nvSpPr>
         <p:spPr>
           <a:xfrm>
-            <a:off x="548640" y="594360"/>
-            <a:ext cx="109728" cy="5440680"/>
+            <a:off x="594360" y="6382512"/>
+            <a:ext cx="10972800" cy="18288"/>
           </a:xfrm>
           <a:prstGeom prst="rect">
             <a:avLst/>
@@ -5613,14 +6888,14 @@
       </p:sp>
       <p:sp>
         <p:nvSpPr>
-          <p:cNvPr id="3" name="TextBox 2"/>
+          <p:cNvPr id="5" name="TextBox 4"/>
           <p:cNvSpPr txBox="1"/>
           <p:nvPr/>
         </p:nvSpPr>
         <p:spPr>
           <a:xfrm>
-            <a:off x="868680" y="457200"/>
-            <a:ext cx="10607040" cy="365760"/>
+            <a:off x="594360" y="6510528"/>
+            <a:ext cx="8229600" cy="182880"/>
           </a:xfrm>
           <a:prstGeom prst="rect">
             <a:avLst/>
@@ -5628,16 +6903,16 @@
           <a:noFill/>
         </p:spPr>
         <p:txBody>
-          <a:bodyPr wrap="square">
+          <a:bodyPr wrap="square" lIns="0" rIns="0" tIns="0" bIns="0">
             <a:spAutoFit/>
           </a:bodyPr>
           <a:lstStyle/>
           <a:p>
             <a:pPr>
               <a:spcAft>
-                <a:spcPts val="1800"/>
-              </a:spcAft>
-              <a:defRPr sz="1200" b="1">
+                <a:spcPts val="1000"/>
+              </a:spcAft>
+              <a:defRPr sz="900" b="0">
                 <a:solidFill>
                   <a:srgbClr val="C89C51"/>
                 </a:solidFill>
@@ -5645,21 +6920,21 @@
               </a:defRPr>
             </a:pPr>
             <a:r>
-              <a:t>HINDUISMUS · RELIGION 13</a:t>
-            </a:r>
-          </a:p>
-        </p:txBody>
-      </p:sp>
-      <p:sp>
-        <p:nvSpPr>
-          <p:cNvPr id="4" name="TextBox 3"/>
+              <a:t>RELIGION · KLASSE 13     /     VIELFALT VERSTEHEN</a:t>
+            </a:r>
+          </a:p>
+        </p:txBody>
+      </p:sp>
+      <p:sp>
+        <p:nvSpPr>
+          <p:cNvPr id="6" name="TextBox 5"/>
           <p:cNvSpPr txBox="1"/>
           <p:nvPr/>
         </p:nvSpPr>
         <p:spPr>
           <a:xfrm>
-            <a:off x="868680" y="1005840"/>
-            <a:ext cx="10515600" cy="1143000"/>
+            <a:off x="10972800" y="6492240"/>
+            <a:ext cx="594360" cy="228600"/>
           </a:xfrm>
           <a:prstGeom prst="rect">
             <a:avLst/>
@@ -5667,38 +6942,38 @@
           <a:noFill/>
         </p:spPr>
         <p:txBody>
-          <a:bodyPr wrap="square">
+          <a:bodyPr wrap="square" lIns="0" rIns="0" tIns="0" bIns="0">
             <a:spAutoFit/>
           </a:bodyPr>
           <a:lstStyle/>
           <a:p>
             <a:pPr>
               <a:spcAft>
-                <a:spcPts val="1800"/>
-              </a:spcAft>
-              <a:defRPr sz="3400" b="1">
-                <a:solidFill>
-                  <a:srgbClr val="143D43"/>
-                </a:solidFill>
-                <a:latin typeface="Aptos"/>
-              </a:defRPr>
-            </a:pPr>
-            <a:r>
-              <a:t>Quellen und Vertiefung</a:t>
-            </a:r>
-          </a:p>
-        </p:txBody>
-      </p:sp>
-      <p:sp>
-        <p:nvSpPr>
-          <p:cNvPr id="5" name="TextBox 4"/>
+                <a:spcPts val="1000"/>
+              </a:spcAft>
+              <a:defRPr sz="1000" b="0">
+                <a:solidFill>
+                  <a:srgbClr val="C89C51"/>
+                </a:solidFill>
+                <a:latin typeface="Aptos"/>
+              </a:defRPr>
+            </a:pPr>
+            <a:r>
+              <a:t>13</a:t>
+            </a:r>
+          </a:p>
+        </p:txBody>
+      </p:sp>
+      <p:sp>
+        <p:nvSpPr>
+          <p:cNvPr id="7" name="TextBox 6"/>
           <p:cNvSpPr txBox="1"/>
           <p:nvPr/>
         </p:nvSpPr>
         <p:spPr>
           <a:xfrm>
-            <a:off x="914400" y="2377440"/>
-            <a:ext cx="10241280" cy="3566160"/>
+            <a:off x="731520" y="2057400"/>
+            <a:ext cx="10698480" cy="3200400"/>
           </a:xfrm>
           <a:prstGeom prst="rect">
             <a:avLst/>
@@ -5706,16 +6981,16 @@
           <a:noFill/>
         </p:spPr>
         <p:txBody>
-          <a:bodyPr wrap="square">
+          <a:bodyPr wrap="square" lIns="0" rIns="0" tIns="0" bIns="0">
             <a:spAutoFit/>
           </a:bodyPr>
           <a:lstStyle/>
           <a:p>
             <a:pPr>
               <a:spcAft>
-                <a:spcPts val="1800"/>
-              </a:spcAft>
-              <a:defRPr sz="2500" b="0">
+                <a:spcPts val="1000"/>
+              </a:spcAft>
+              <a:defRPr sz="2000" b="0">
                 <a:solidFill>
                   <a:srgbClr val="173238"/>
                 </a:solidFill>
@@ -5723,15 +6998,15 @@
               </a:defRPr>
             </a:pPr>
             <a:r>
-              <a:t>Encyclopaedia Britannica: Hinduism; caste; Buddhism</a:t>
-            </a:r>
-          </a:p>
-          <a:p>
-            <a:pPr>
-              <a:spcAft>
-                <a:spcPts val="1800"/>
-              </a:spcAft>
-              <a:defRPr sz="2500" b="0">
+              <a:t>Encyclopaedia Britannica: Hinduism, caste, Buddhism</a:t>
+            </a:r>
+          </a:p>
+          <a:p>
+            <a:pPr>
+              <a:spcAft>
+                <a:spcPts val="1000"/>
+              </a:spcAft>
+              <a:defRPr sz="2000" b="0">
                 <a:solidFill>
                   <a:srgbClr val="173238"/>
                 </a:solidFill>
@@ -5745,9 +7020,9 @@
           <a:p>
             <a:pPr>
               <a:spcAft>
-                <a:spcPts val="1800"/>
-              </a:spcAft>
-              <a:defRPr sz="2500" b="0">
+                <a:spcPts val="1000"/>
+              </a:spcAft>
+              <a:defRPr sz="2000" b="0">
                 <a:solidFill>
                   <a:srgbClr val="173238"/>
                 </a:solidFill>
@@ -5755,15 +7030,15 @@
               </a:defRPr>
             </a:pPr>
             <a:r>
-              <a:t>Bhagavadgita, besonders Kapitel 2–4 und 12</a:t>
-            </a:r>
-          </a:p>
-          <a:p>
-            <a:pPr>
-              <a:spcAft>
-                <a:spcPts val="1800"/>
-              </a:spcAft>
-              <a:defRPr sz="2500" b="0">
+              <a:t>Bhagavadgita: besonders Kapitel 2–4 und 12</a:t>
+            </a:r>
+          </a:p>
+          <a:p>
+            <a:pPr>
+              <a:spcAft>
+                <a:spcPts val="1000"/>
+              </a:spcAft>
+              <a:defRPr sz="2000" b="0">
                 <a:solidFill>
                   <a:srgbClr val="173238"/>
                 </a:solidFill>
@@ -5771,15 +7046,15 @@
               </a:defRPr>
             </a:pPr>
             <a:r>
-              <a:t>Indische Verfassung, Artikel 17</a:t>
-            </a:r>
-          </a:p>
-          <a:p>
-            <a:pPr>
-              <a:spcAft>
-                <a:spcPts val="1800"/>
-              </a:spcAft>
-              <a:defRPr sz="2500" b="0">
+              <a:t>Indische Verfassung: Artikel 17</a:t>
+            </a:r>
+          </a:p>
+          <a:p>
+            <a:pPr>
+              <a:spcAft>
+                <a:spcPts val="1000"/>
+              </a:spcAft>
+              <a:defRPr sz="2000" b="0">
                 <a:solidFill>
                   <a:srgbClr val="173238"/>
                 </a:solidFill>
@@ -5787,21 +7062,37 @@
               </a:defRPr>
             </a:pPr>
             <a:r>
-              <a:t>Bildreferenz: Raimond Klavins / Unsplash via WeRoad</a:t>
-            </a:r>
-          </a:p>
-        </p:txBody>
-      </p:sp>
-      <p:sp>
-        <p:nvSpPr>
-          <p:cNvPr id="6" name="TextBox 5"/>
+              <a:t>Titelbild: KI-Illustration, mit OpenAI erstellt</a:t>
+            </a:r>
+          </a:p>
+          <a:p>
+            <a:pPr>
+              <a:spcAft>
+                <a:spcPts val="1000"/>
+              </a:spcAft>
+              <a:defRPr sz="2000" b="0">
+                <a:solidFill>
+                  <a:srgbClr val="173238"/>
+                </a:solidFill>
+                <a:latin typeface="Aptos"/>
+              </a:defRPr>
+            </a:pPr>
+            <a:r>
+              <a:t>Schaubilder und Ritualillustration: eigens erstellt</a:t>
+            </a:r>
+          </a:p>
+        </p:txBody>
+      </p:sp>
+      <p:sp>
+        <p:nvSpPr>
+          <p:cNvPr id="8" name="TextBox 7"/>
           <p:cNvSpPr txBox="1"/>
           <p:nvPr/>
         </p:nvSpPr>
         <p:spPr>
           <a:xfrm>
-            <a:off x="914400" y="6446520"/>
-            <a:ext cx="9144000" cy="228600"/>
+            <a:off x="731520" y="5669280"/>
+            <a:ext cx="10698480" cy="457200"/>
           </a:xfrm>
           <a:prstGeom prst="rect">
             <a:avLst/>
@@ -5809,63 +7100,24 @@
           <a:noFill/>
         </p:spPr>
         <p:txBody>
-          <a:bodyPr wrap="square">
+          <a:bodyPr wrap="square" lIns="0" rIns="0" tIns="0" bIns="0">
             <a:spAutoFit/>
           </a:bodyPr>
           <a:lstStyle/>
           <a:p>
             <a:pPr>
               <a:spcAft>
-                <a:spcPts val="1800"/>
-              </a:spcAft>
-              <a:defRPr sz="1000" b="0">
-                <a:solidFill>
-                  <a:srgbClr val="C89C51"/>
-                </a:solidFill>
-                <a:latin typeface="Aptos"/>
-              </a:defRPr>
-            </a:pPr>
-            <a:r>
-              <a:t>Vielfalt verstehen · Begriffe verbinden · kritisch nachfragen</a:t>
-            </a:r>
-          </a:p>
-        </p:txBody>
-      </p:sp>
-      <p:sp>
-        <p:nvSpPr>
-          <p:cNvPr id="7" name="TextBox 6"/>
-          <p:cNvSpPr txBox="1"/>
-          <p:nvPr/>
-        </p:nvSpPr>
-        <p:spPr>
-          <a:xfrm>
-            <a:off x="10972800" y="6428232"/>
-            <a:ext cx="457200" cy="274320"/>
-          </a:xfrm>
-          <a:prstGeom prst="rect">
-            <a:avLst/>
-          </a:prstGeom>
-          <a:noFill/>
-        </p:spPr>
-        <p:txBody>
-          <a:bodyPr wrap="square">
-            <a:spAutoFit/>
-          </a:bodyPr>
-          <a:lstStyle/>
-          <a:p>
-            <a:pPr>
-              <a:spcAft>
-                <a:spcPts val="1800"/>
-              </a:spcAft>
-              <a:defRPr sz="1100" b="0">
-                <a:solidFill>
-                  <a:srgbClr val="C89C51"/>
-                </a:solidFill>
-                <a:latin typeface="Aptos"/>
-              </a:defRPr>
-            </a:pPr>
-            <a:r>
-              <a:t>13</a:t>
+                <a:spcPts val="1000"/>
+              </a:spcAft>
+              <a:defRPr sz="1400" b="0">
+                <a:solidFill>
+                  <a:srgbClr val="577477"/>
+                </a:solidFill>
+                <a:latin typeface="Aptos"/>
+              </a:defRPr>
+            </a:pPr>
+            <a:r>
+              <a:t>Vollständige Links und Einordnung in den Sprechernotizen. Quellenlinks nicht live überprüft.</a:t>
             </a:r>
           </a:p>
         </p:txBody>
@@ -5898,14 +7150,92 @@
       <p:grpSpPr/>
       <p:sp>
         <p:nvSpPr>
-          <p:cNvPr id="2" name="Rectangle 1"/>
+          <p:cNvPr id="2" name="TextBox 1"/>
+          <p:cNvSpPr txBox="1"/>
+          <p:nvPr/>
+        </p:nvSpPr>
+        <p:spPr>
+          <a:xfrm>
+            <a:off x="594360" y="365760"/>
+            <a:ext cx="10058400" cy="274320"/>
+          </a:xfrm>
+          <a:prstGeom prst="rect">
+            <a:avLst/>
+          </a:prstGeom>
+          <a:noFill/>
+        </p:spPr>
+        <p:txBody>
+          <a:bodyPr wrap="square" lIns="0" rIns="0" tIns="0" bIns="0">
+            <a:spAutoFit/>
+          </a:bodyPr>
+          <a:lstStyle/>
+          <a:p>
+            <a:pPr>
+              <a:spcAft>
+                <a:spcPts val="1000"/>
+              </a:spcAft>
+              <a:defRPr sz="1100" b="1">
+                <a:solidFill>
+                  <a:srgbClr val="C89C51"/>
+                </a:solidFill>
+                <a:latin typeface="Aptos"/>
+              </a:defRPr>
+            </a:pPr>
+            <a:r>
+              <a:t>01 / ORIENTIERUNG</a:t>
+            </a:r>
+          </a:p>
+        </p:txBody>
+      </p:sp>
+      <p:sp>
+        <p:nvSpPr>
+          <p:cNvPr id="3" name="TextBox 2"/>
+          <p:cNvSpPr txBox="1"/>
+          <p:nvPr/>
+        </p:nvSpPr>
+        <p:spPr>
+          <a:xfrm>
+            <a:off x="594360" y="868680"/>
+            <a:ext cx="10972800" cy="1005840"/>
+          </a:xfrm>
+          <a:prstGeom prst="rect">
+            <a:avLst/>
+          </a:prstGeom>
+          <a:noFill/>
+        </p:spPr>
+        <p:txBody>
+          <a:bodyPr wrap="square" lIns="0" rIns="0" tIns="0" bIns="0">
+            <a:spAutoFit/>
+          </a:bodyPr>
+          <a:lstStyle/>
+          <a:p>
+            <a:pPr>
+              <a:spcAft>
+                <a:spcPts val="1000"/>
+              </a:spcAft>
+              <a:defRPr sz="3400" b="1">
+                <a:solidFill>
+                  <a:srgbClr val="143D43"/>
+                </a:solidFill>
+                <a:latin typeface="Aptos"/>
+              </a:defRPr>
+            </a:pPr>
+            <a:r>
+              <a:t>Vielfalt statt einer einzigen Lehre</a:t>
+            </a:r>
+          </a:p>
+        </p:txBody>
+      </p:sp>
+      <p:sp>
+        <p:nvSpPr>
+          <p:cNvPr id="4" name="Rectangle 3"/>
           <p:cNvSpPr/>
           <p:nvPr/>
         </p:nvSpPr>
         <p:spPr>
           <a:xfrm>
-            <a:off x="548640" y="594360"/>
-            <a:ext cx="109728" cy="5440680"/>
+            <a:off x="594360" y="6382512"/>
+            <a:ext cx="10972800" cy="18288"/>
           </a:xfrm>
           <a:prstGeom prst="rect">
             <a:avLst/>
@@ -5941,14 +7271,14 @@
       </p:sp>
       <p:sp>
         <p:nvSpPr>
-          <p:cNvPr id="3" name="TextBox 2"/>
+          <p:cNvPr id="5" name="TextBox 4"/>
           <p:cNvSpPr txBox="1"/>
           <p:nvPr/>
         </p:nvSpPr>
         <p:spPr>
           <a:xfrm>
-            <a:off x="868680" y="457200"/>
-            <a:ext cx="10607040" cy="365760"/>
+            <a:off x="594360" y="6510528"/>
+            <a:ext cx="8229600" cy="182880"/>
           </a:xfrm>
           <a:prstGeom prst="rect">
             <a:avLst/>
@@ -5956,16 +7286,16 @@
           <a:noFill/>
         </p:spPr>
         <p:txBody>
-          <a:bodyPr wrap="square">
+          <a:bodyPr wrap="square" lIns="0" rIns="0" tIns="0" bIns="0">
             <a:spAutoFit/>
           </a:bodyPr>
           <a:lstStyle/>
           <a:p>
             <a:pPr>
               <a:spcAft>
-                <a:spcPts val="1800"/>
-              </a:spcAft>
-              <a:defRPr sz="1200" b="1">
+                <a:spcPts val="1000"/>
+              </a:spcAft>
+              <a:defRPr sz="900" b="0">
                 <a:solidFill>
                   <a:srgbClr val="C89C51"/>
                 </a:solidFill>
@@ -5973,21 +7303,21 @@
               </a:defRPr>
             </a:pPr>
             <a:r>
-              <a:t>HINDUISMUS · RELIGION 13</a:t>
-            </a:r>
-          </a:p>
-        </p:txBody>
-      </p:sp>
-      <p:sp>
-        <p:nvSpPr>
-          <p:cNvPr id="4" name="TextBox 3"/>
+              <a:t>RELIGION · KLASSE 13     /     VIELFALT VERSTEHEN</a:t>
+            </a:r>
+          </a:p>
+        </p:txBody>
+      </p:sp>
+      <p:sp>
+        <p:nvSpPr>
+          <p:cNvPr id="6" name="TextBox 5"/>
           <p:cNvSpPr txBox="1"/>
           <p:nvPr/>
         </p:nvSpPr>
         <p:spPr>
           <a:xfrm>
-            <a:off x="868680" y="1005840"/>
-            <a:ext cx="10515600" cy="1143000"/>
+            <a:off x="10972800" y="6492240"/>
+            <a:ext cx="594360" cy="228600"/>
           </a:xfrm>
           <a:prstGeom prst="rect">
             <a:avLst/>
@@ -5995,38 +7325,124 @@
           <a:noFill/>
         </p:spPr>
         <p:txBody>
-          <a:bodyPr wrap="square">
+          <a:bodyPr wrap="square" lIns="0" rIns="0" tIns="0" bIns="0">
             <a:spAutoFit/>
           </a:bodyPr>
           <a:lstStyle/>
           <a:p>
             <a:pPr>
               <a:spcAft>
-                <a:spcPts val="1800"/>
-              </a:spcAft>
-              <a:defRPr sz="3400" b="1">
-                <a:solidFill>
-                  <a:srgbClr val="143D43"/>
-                </a:solidFill>
-                <a:latin typeface="Aptos"/>
-              </a:defRPr>
-            </a:pPr>
-            <a:r>
-              <a:t>Eine Familie religiöser Traditionen</a:t>
-            </a:r>
-          </a:p>
-        </p:txBody>
-      </p:sp>
-      <p:sp>
-        <p:nvSpPr>
-          <p:cNvPr id="5" name="TextBox 4"/>
+                <a:spcPts val="1000"/>
+              </a:spcAft>
+              <a:defRPr sz="1000" b="0">
+                <a:solidFill>
+                  <a:srgbClr val="C89C51"/>
+                </a:solidFill>
+                <a:latin typeface="Aptos"/>
+              </a:defRPr>
+            </a:pPr>
+            <a:r>
+              <a:t>02</a:t>
+            </a:r>
+          </a:p>
+        </p:txBody>
+      </p:sp>
+      <p:sp>
+        <p:nvSpPr>
+          <p:cNvPr id="7" name="Rounded Rectangle 6"/>
+          <p:cNvSpPr/>
+          <p:nvPr/>
+        </p:nvSpPr>
+        <p:spPr>
+          <a:xfrm>
+            <a:off x="640080" y="2103120"/>
+            <a:ext cx="3520440" cy="3474720"/>
+          </a:xfrm>
+          <a:prstGeom prst="roundRect">
+            <a:avLst/>
+          </a:prstGeom>
+          <a:solidFill>
+            <a:srgbClr val="FFFFFF"/>
+          </a:solidFill>
+          <a:ln>
+            <a:noFill/>
+          </a:ln>
+        </p:spPr>
+        <p:style>
+          <a:lnRef idx="1">
+            <a:schemeClr val="accent1"/>
+          </a:lnRef>
+          <a:fillRef idx="3">
+            <a:schemeClr val="accent1"/>
+          </a:fillRef>
+          <a:effectRef idx="2">
+            <a:schemeClr val="accent1"/>
+          </a:effectRef>
+          <a:fontRef idx="minor">
+            <a:schemeClr val="lt1"/>
+          </a:fontRef>
+        </p:style>
+        <p:txBody>
+          <a:bodyPr rtlCol="0" anchor="ctr"/>
+          <a:lstStyle/>
+          <a:p>
+            <a:pPr algn="ctr"/>
+          </a:p>
+        </p:txBody>
+      </p:sp>
+      <p:sp>
+        <p:nvSpPr>
+          <p:cNvPr id="8" name="Rectangle 7"/>
+          <p:cNvSpPr/>
+          <p:nvPr/>
+        </p:nvSpPr>
+        <p:spPr>
+          <a:xfrm>
+            <a:off x="822959" y="2304288"/>
+            <a:ext cx="54864" cy="384048"/>
+          </a:xfrm>
+          <a:prstGeom prst="rect">
+            <a:avLst/>
+          </a:prstGeom>
+          <a:solidFill>
+            <a:srgbClr val="C89C51"/>
+          </a:solidFill>
+          <a:ln>
+            <a:noFill/>
+          </a:ln>
+        </p:spPr>
+        <p:style>
+          <a:lnRef idx="1">
+            <a:schemeClr val="accent1"/>
+          </a:lnRef>
+          <a:fillRef idx="3">
+            <a:schemeClr val="accent1"/>
+          </a:fillRef>
+          <a:effectRef idx="2">
+            <a:schemeClr val="accent1"/>
+          </a:effectRef>
+          <a:fontRef idx="minor">
+            <a:schemeClr val="lt1"/>
+          </a:fontRef>
+        </p:style>
+        <p:txBody>
+          <a:bodyPr rtlCol="0" anchor="ctr"/>
+          <a:lstStyle/>
+          <a:p>
+            <a:pPr algn="ctr"/>
+          </a:p>
+        </p:txBody>
+      </p:sp>
+      <p:sp>
+        <p:nvSpPr>
+          <p:cNvPr id="9" name="TextBox 8"/>
           <p:cNvSpPr txBox="1"/>
           <p:nvPr/>
         </p:nvSpPr>
         <p:spPr>
           <a:xfrm>
-            <a:off x="914400" y="2377440"/>
-            <a:ext cx="10241280" cy="3566160"/>
+            <a:off x="1005840" y="2286000"/>
+            <a:ext cx="2971800" cy="548640"/>
           </a:xfrm>
           <a:prstGeom prst="rect">
             <a:avLst/>
@@ -6034,70 +7450,38 @@
           <a:noFill/>
         </p:spPr>
         <p:txBody>
-          <a:bodyPr wrap="square">
+          <a:bodyPr wrap="square" lIns="0" rIns="0" tIns="0" bIns="0">
             <a:spAutoFit/>
           </a:bodyPr>
           <a:lstStyle/>
           <a:p>
             <a:pPr>
               <a:spcAft>
-                <a:spcPts val="1800"/>
-              </a:spcAft>
-              <a:defRPr sz="2500" b="0">
-                <a:solidFill>
-                  <a:srgbClr val="173238"/>
-                </a:solidFill>
-                <a:latin typeface="Aptos"/>
-              </a:defRPr>
-            </a:pPr>
-            <a:r>
-              <a:t>Kein einzelner Gründer · keine zentrale Kirchenleitung</a:t>
-            </a:r>
-          </a:p>
-          <a:p>
-            <a:pPr>
-              <a:spcAft>
-                <a:spcPts val="1800"/>
-              </a:spcAft>
-              <a:defRPr sz="2500" b="0">
-                <a:solidFill>
-                  <a:srgbClr val="173238"/>
-                </a:solidFill>
-                <a:latin typeface="Aptos"/>
-              </a:defRPr>
-            </a:pPr>
-            <a:r>
-              <a:t>Schwerpunkt: Indien und Nepal; weltweite Diaspora</a:t>
-            </a:r>
-          </a:p>
-          <a:p>
-            <a:pPr>
-              <a:spcAft>
-                <a:spcPts val="1800"/>
-              </a:spcAft>
-              <a:defRPr sz="2500" b="0">
-                <a:solidFill>
-                  <a:srgbClr val="173238"/>
-                </a:solidFill>
-                <a:latin typeface="Aptos"/>
-              </a:defRPr>
-            </a:pPr>
-            <a:r>
-              <a:t>Gemeinsame Begriffe, unterschiedliche Deutungen</a:t>
-            </a:r>
-          </a:p>
-        </p:txBody>
-      </p:sp>
-      <p:sp>
-        <p:nvSpPr>
-          <p:cNvPr id="6" name="TextBox 5"/>
+                <a:spcPts val="1000"/>
+              </a:spcAft>
+              <a:defRPr sz="2300" b="1">
+                <a:solidFill>
+                  <a:srgbClr val="143D43"/>
+                </a:solidFill>
+                <a:latin typeface="Aptos"/>
+              </a:defRPr>
+            </a:pPr>
+            <a:r>
+              <a:t>Kein einzelner Gründer</a:t>
+            </a:r>
+          </a:p>
+        </p:txBody>
+      </p:sp>
+      <p:sp>
+        <p:nvSpPr>
+          <p:cNvPr id="10" name="TextBox 9"/>
           <p:cNvSpPr txBox="1"/>
           <p:nvPr/>
         </p:nvSpPr>
         <p:spPr>
           <a:xfrm>
-            <a:off x="914400" y="6446520"/>
-            <a:ext cx="9144000" cy="228600"/>
+            <a:off x="914400" y="2971800"/>
+            <a:ext cx="2971800" cy="2514600"/>
           </a:xfrm>
           <a:prstGeom prst="rect">
             <a:avLst/>
@@ -6105,38 +7489,140 @@
           <a:noFill/>
         </p:spPr>
         <p:txBody>
-          <a:bodyPr wrap="square">
+          <a:bodyPr wrap="square" lIns="0" rIns="0" tIns="0" bIns="0">
             <a:spAutoFit/>
           </a:bodyPr>
           <a:lstStyle/>
           <a:p>
             <a:pPr>
               <a:spcAft>
-                <a:spcPts val="1800"/>
-              </a:spcAft>
-              <a:defRPr sz="1000" b="0">
-                <a:solidFill>
-                  <a:srgbClr val="C89C51"/>
-                </a:solidFill>
-                <a:latin typeface="Aptos"/>
-              </a:defRPr>
-            </a:pPr>
-            <a:r>
-              <a:t>Vielfalt verstehen · Begriffe verbinden · kritisch nachfragen</a:t>
-            </a:r>
-          </a:p>
-        </p:txBody>
-      </p:sp>
-      <p:sp>
-        <p:nvSpPr>
-          <p:cNvPr id="7" name="TextBox 6"/>
+                <a:spcPts val="1000"/>
+              </a:spcAft>
+              <a:defRPr sz="2000" b="0">
+                <a:solidFill>
+                  <a:srgbClr val="173238"/>
+                </a:solidFill>
+                <a:latin typeface="Aptos"/>
+              </a:defRPr>
+            </a:pPr>
+            <a:r>
+              <a:t>Über Jahrtausende gewachsen.</a:t>
+            </a:r>
+          </a:p>
+          <a:p>
+            <a:pPr>
+              <a:spcAft>
+                <a:spcPts val="1000"/>
+              </a:spcAft>
+              <a:defRPr sz="2000" b="0">
+                <a:solidFill>
+                  <a:srgbClr val="173238"/>
+                </a:solidFill>
+                <a:latin typeface="Aptos"/>
+              </a:defRPr>
+            </a:pPr>
+            <a:r>
+              <a:t>Keine zentrale Kirchenleitung.</a:t>
+            </a:r>
+          </a:p>
+        </p:txBody>
+      </p:sp>
+      <p:sp>
+        <p:nvSpPr>
+          <p:cNvPr id="11" name="Rounded Rectangle 10"/>
+          <p:cNvSpPr/>
+          <p:nvPr/>
+        </p:nvSpPr>
+        <p:spPr>
+          <a:xfrm>
+            <a:off x="4343400" y="2103120"/>
+            <a:ext cx="3520440" cy="3474720"/>
+          </a:xfrm>
+          <a:prstGeom prst="roundRect">
+            <a:avLst/>
+          </a:prstGeom>
+          <a:solidFill>
+            <a:srgbClr val="FFFFFF"/>
+          </a:solidFill>
+          <a:ln>
+            <a:noFill/>
+          </a:ln>
+        </p:spPr>
+        <p:style>
+          <a:lnRef idx="1">
+            <a:schemeClr val="accent1"/>
+          </a:lnRef>
+          <a:fillRef idx="3">
+            <a:schemeClr val="accent1"/>
+          </a:fillRef>
+          <a:effectRef idx="2">
+            <a:schemeClr val="accent1"/>
+          </a:effectRef>
+          <a:fontRef idx="minor">
+            <a:schemeClr val="lt1"/>
+          </a:fontRef>
+        </p:style>
+        <p:txBody>
+          <a:bodyPr rtlCol="0" anchor="ctr"/>
+          <a:lstStyle/>
+          <a:p>
+            <a:pPr algn="ctr"/>
+          </a:p>
+        </p:txBody>
+      </p:sp>
+      <p:sp>
+        <p:nvSpPr>
+          <p:cNvPr id="12" name="Rectangle 11"/>
+          <p:cNvSpPr/>
+          <p:nvPr/>
+        </p:nvSpPr>
+        <p:spPr>
+          <a:xfrm>
+            <a:off x="4526280" y="2304288"/>
+            <a:ext cx="54864" cy="384048"/>
+          </a:xfrm>
+          <a:prstGeom prst="rect">
+            <a:avLst/>
+          </a:prstGeom>
+          <a:solidFill>
+            <a:srgbClr val="C89C51"/>
+          </a:solidFill>
+          <a:ln>
+            <a:noFill/>
+          </a:ln>
+        </p:spPr>
+        <p:style>
+          <a:lnRef idx="1">
+            <a:schemeClr val="accent1"/>
+          </a:lnRef>
+          <a:fillRef idx="3">
+            <a:schemeClr val="accent1"/>
+          </a:fillRef>
+          <a:effectRef idx="2">
+            <a:schemeClr val="accent1"/>
+          </a:effectRef>
+          <a:fontRef idx="minor">
+            <a:schemeClr val="lt1"/>
+          </a:fontRef>
+        </p:style>
+        <p:txBody>
+          <a:bodyPr rtlCol="0" anchor="ctr"/>
+          <a:lstStyle/>
+          <a:p>
+            <a:pPr algn="ctr"/>
+          </a:p>
+        </p:txBody>
+      </p:sp>
+      <p:sp>
+        <p:nvSpPr>
+          <p:cNvPr id="13" name="TextBox 12"/>
           <p:cNvSpPr txBox="1"/>
           <p:nvPr/>
         </p:nvSpPr>
         <p:spPr>
           <a:xfrm>
-            <a:off x="10972800" y="6428232"/>
-            <a:ext cx="457200" cy="274320"/>
+            <a:off x="4709160" y="2286000"/>
+            <a:ext cx="2971800" cy="548640"/>
           </a:xfrm>
           <a:prstGeom prst="rect">
             <a:avLst/>
@@ -6144,24 +7630,243 @@
           <a:noFill/>
         </p:spPr>
         <p:txBody>
-          <a:bodyPr wrap="square">
+          <a:bodyPr wrap="square" lIns="0" rIns="0" tIns="0" bIns="0">
             <a:spAutoFit/>
           </a:bodyPr>
           <a:lstStyle/>
           <a:p>
             <a:pPr>
               <a:spcAft>
-                <a:spcPts val="1800"/>
-              </a:spcAft>
-              <a:defRPr sz="1100" b="0">
-                <a:solidFill>
-                  <a:srgbClr val="C89C51"/>
-                </a:solidFill>
-                <a:latin typeface="Aptos"/>
-              </a:defRPr>
-            </a:pPr>
-            <a:r>
-              <a:t>2</a:t>
+                <a:spcPts val="1000"/>
+              </a:spcAft>
+              <a:defRPr sz="2300" b="1">
+                <a:solidFill>
+                  <a:srgbClr val="143D43"/>
+                </a:solidFill>
+                <a:latin typeface="Aptos"/>
+              </a:defRPr>
+            </a:pPr>
+            <a:r>
+              <a:t>Gemeinsame Fragen</a:t>
+            </a:r>
+          </a:p>
+        </p:txBody>
+      </p:sp>
+      <p:sp>
+        <p:nvSpPr>
+          <p:cNvPr id="14" name="TextBox 13"/>
+          <p:cNvSpPr txBox="1"/>
+          <p:nvPr/>
+        </p:nvSpPr>
+        <p:spPr>
+          <a:xfrm>
+            <a:off x="4617720" y="2971800"/>
+            <a:ext cx="2971800" cy="2514600"/>
+          </a:xfrm>
+          <a:prstGeom prst="rect">
+            <a:avLst/>
+          </a:prstGeom>
+          <a:noFill/>
+        </p:spPr>
+        <p:txBody>
+          <a:bodyPr wrap="square" lIns="0" rIns="0" tIns="0" bIns="0">
+            <a:spAutoFit/>
+          </a:bodyPr>
+          <a:lstStyle/>
+          <a:p>
+            <a:pPr>
+              <a:spcAft>
+                <a:spcPts val="1000"/>
+              </a:spcAft>
+              <a:defRPr sz="2000" b="0">
+                <a:solidFill>
+                  <a:srgbClr val="173238"/>
+                </a:solidFill>
+                <a:latin typeface="Aptos"/>
+              </a:defRPr>
+            </a:pPr>
+            <a:r>
+              <a:t>Dharma, Karma und Befreiung – unterschiedlich gedeutet.</a:t>
+            </a:r>
+          </a:p>
+        </p:txBody>
+      </p:sp>
+      <p:sp>
+        <p:nvSpPr>
+          <p:cNvPr id="15" name="Rounded Rectangle 14"/>
+          <p:cNvSpPr/>
+          <p:nvPr/>
+        </p:nvSpPr>
+        <p:spPr>
+          <a:xfrm>
+            <a:off x="8046720" y="2103120"/>
+            <a:ext cx="3520440" cy="3474720"/>
+          </a:xfrm>
+          <a:prstGeom prst="roundRect">
+            <a:avLst/>
+          </a:prstGeom>
+          <a:solidFill>
+            <a:srgbClr val="FFFFFF"/>
+          </a:solidFill>
+          <a:ln>
+            <a:noFill/>
+          </a:ln>
+        </p:spPr>
+        <p:style>
+          <a:lnRef idx="1">
+            <a:schemeClr val="accent1"/>
+          </a:lnRef>
+          <a:fillRef idx="3">
+            <a:schemeClr val="accent1"/>
+          </a:fillRef>
+          <a:effectRef idx="2">
+            <a:schemeClr val="accent1"/>
+          </a:effectRef>
+          <a:fontRef idx="minor">
+            <a:schemeClr val="lt1"/>
+          </a:fontRef>
+        </p:style>
+        <p:txBody>
+          <a:bodyPr rtlCol="0" anchor="ctr"/>
+          <a:lstStyle/>
+          <a:p>
+            <a:pPr algn="ctr"/>
+          </a:p>
+        </p:txBody>
+      </p:sp>
+      <p:sp>
+        <p:nvSpPr>
+          <p:cNvPr id="16" name="Rectangle 15"/>
+          <p:cNvSpPr/>
+          <p:nvPr/>
+        </p:nvSpPr>
+        <p:spPr>
+          <a:xfrm>
+            <a:off x="8229600" y="2304288"/>
+            <a:ext cx="54864" cy="384048"/>
+          </a:xfrm>
+          <a:prstGeom prst="rect">
+            <a:avLst/>
+          </a:prstGeom>
+          <a:solidFill>
+            <a:srgbClr val="C89C51"/>
+          </a:solidFill>
+          <a:ln>
+            <a:noFill/>
+          </a:ln>
+        </p:spPr>
+        <p:style>
+          <a:lnRef idx="1">
+            <a:schemeClr val="accent1"/>
+          </a:lnRef>
+          <a:fillRef idx="3">
+            <a:schemeClr val="accent1"/>
+          </a:fillRef>
+          <a:effectRef idx="2">
+            <a:schemeClr val="accent1"/>
+          </a:effectRef>
+          <a:fontRef idx="minor">
+            <a:schemeClr val="lt1"/>
+          </a:fontRef>
+        </p:style>
+        <p:txBody>
+          <a:bodyPr rtlCol="0" anchor="ctr"/>
+          <a:lstStyle/>
+          <a:p>
+            <a:pPr algn="ctr"/>
+          </a:p>
+        </p:txBody>
+      </p:sp>
+      <p:sp>
+        <p:nvSpPr>
+          <p:cNvPr id="17" name="TextBox 16"/>
+          <p:cNvSpPr txBox="1"/>
+          <p:nvPr/>
+        </p:nvSpPr>
+        <p:spPr>
+          <a:xfrm>
+            <a:off x="8412480" y="2286000"/>
+            <a:ext cx="2971800" cy="548640"/>
+          </a:xfrm>
+          <a:prstGeom prst="rect">
+            <a:avLst/>
+          </a:prstGeom>
+          <a:noFill/>
+        </p:spPr>
+        <p:txBody>
+          <a:bodyPr wrap="square" lIns="0" rIns="0" tIns="0" bIns="0">
+            <a:spAutoFit/>
+          </a:bodyPr>
+          <a:lstStyle/>
+          <a:p>
+            <a:pPr>
+              <a:spcAft>
+                <a:spcPts val="1000"/>
+              </a:spcAft>
+              <a:defRPr sz="2300" b="1">
+                <a:solidFill>
+                  <a:srgbClr val="143D43"/>
+                </a:solidFill>
+                <a:latin typeface="Aptos"/>
+              </a:defRPr>
+            </a:pPr>
+            <a:r>
+              <a:t>Weltweite Religion</a:t>
+            </a:r>
+          </a:p>
+        </p:txBody>
+      </p:sp>
+      <p:sp>
+        <p:nvSpPr>
+          <p:cNvPr id="18" name="TextBox 17"/>
+          <p:cNvSpPr txBox="1"/>
+          <p:nvPr/>
+        </p:nvSpPr>
+        <p:spPr>
+          <a:xfrm>
+            <a:off x="8321040" y="2971800"/>
+            <a:ext cx="2971800" cy="2514600"/>
+          </a:xfrm>
+          <a:prstGeom prst="rect">
+            <a:avLst/>
+          </a:prstGeom>
+          <a:noFill/>
+        </p:spPr>
+        <p:txBody>
+          <a:bodyPr wrap="square" lIns="0" rIns="0" tIns="0" bIns="0">
+            <a:spAutoFit/>
+          </a:bodyPr>
+          <a:lstStyle/>
+          <a:p>
+            <a:pPr>
+              <a:spcAft>
+                <a:spcPts val="1000"/>
+              </a:spcAft>
+              <a:defRPr sz="2000" b="0">
+                <a:solidFill>
+                  <a:srgbClr val="173238"/>
+                </a:solidFill>
+                <a:latin typeface="Aptos"/>
+              </a:defRPr>
+            </a:pPr>
+            <a:r>
+              <a:t>Schwerpunkt Indien und Nepal.</a:t>
+            </a:r>
+          </a:p>
+          <a:p>
+            <a:pPr>
+              <a:spcAft>
+                <a:spcPts val="1000"/>
+              </a:spcAft>
+              <a:defRPr sz="2000" b="0">
+                <a:solidFill>
+                  <a:srgbClr val="173238"/>
+                </a:solidFill>
+                <a:latin typeface="Aptos"/>
+              </a:defRPr>
+            </a:pPr>
+            <a:r>
+              <a:t>Gemeinschaften in der Diaspora.</a:t>
             </a:r>
           </a:p>
         </p:txBody>
@@ -6194,14 +7899,92 @@
       <p:grpSpPr/>
       <p:sp>
         <p:nvSpPr>
-          <p:cNvPr id="2" name="Rectangle 1"/>
+          <p:cNvPr id="2" name="TextBox 1"/>
+          <p:cNvSpPr txBox="1"/>
+          <p:nvPr/>
+        </p:nvSpPr>
+        <p:spPr>
+          <a:xfrm>
+            <a:off x="594360" y="365760"/>
+            <a:ext cx="10058400" cy="274320"/>
+          </a:xfrm>
+          <a:prstGeom prst="rect">
+            <a:avLst/>
+          </a:prstGeom>
+          <a:noFill/>
+        </p:spPr>
+        <p:txBody>
+          <a:bodyPr wrap="square" lIns="0" rIns="0" tIns="0" bIns="0">
+            <a:spAutoFit/>
+          </a:bodyPr>
+          <a:lstStyle/>
+          <a:p>
+            <a:pPr>
+              <a:spcAft>
+                <a:spcPts val="1000"/>
+              </a:spcAft>
+              <a:defRPr sz="1100" b="1">
+                <a:solidFill>
+                  <a:srgbClr val="C89C51"/>
+                </a:solidFill>
+                <a:latin typeface="Aptos"/>
+              </a:defRPr>
+            </a:pPr>
+            <a:r>
+              <a:t>02 / GESCHICHTE &amp; SCHRIFTEN</a:t>
+            </a:r>
+          </a:p>
+        </p:txBody>
+      </p:sp>
+      <p:sp>
+        <p:nvSpPr>
+          <p:cNvPr id="3" name="TextBox 2"/>
+          <p:cNvSpPr txBox="1"/>
+          <p:nvPr/>
+        </p:nvSpPr>
+        <p:spPr>
+          <a:xfrm>
+            <a:off x="594360" y="868680"/>
+            <a:ext cx="10972800" cy="1005840"/>
+          </a:xfrm>
+          <a:prstGeom prst="rect">
+            <a:avLst/>
+          </a:prstGeom>
+          <a:noFill/>
+        </p:spPr>
+        <p:txBody>
+          <a:bodyPr wrap="square" lIns="0" rIns="0" tIns="0" bIns="0">
+            <a:spAutoFit/>
+          </a:bodyPr>
+          <a:lstStyle/>
+          <a:p>
+            <a:pPr>
+              <a:spcAft>
+                <a:spcPts val="1000"/>
+              </a:spcAft>
+              <a:defRPr sz="3400" b="1">
+                <a:solidFill>
+                  <a:srgbClr val="143D43"/>
+                </a:solidFill>
+                <a:latin typeface="Aptos"/>
+              </a:defRPr>
+            </a:pPr>
+            <a:r>
+              <a:t>Alte Texte – neue Fragen</a:t>
+            </a:r>
+          </a:p>
+        </p:txBody>
+      </p:sp>
+      <p:sp>
+        <p:nvSpPr>
+          <p:cNvPr id="4" name="Rectangle 3"/>
           <p:cNvSpPr/>
           <p:nvPr/>
         </p:nvSpPr>
         <p:spPr>
           <a:xfrm>
-            <a:off x="548640" y="594360"/>
-            <a:ext cx="109728" cy="5440680"/>
+            <a:off x="594360" y="6382512"/>
+            <a:ext cx="10972800" cy="18288"/>
           </a:xfrm>
           <a:prstGeom prst="rect">
             <a:avLst/>
@@ -6237,14 +8020,14 @@
       </p:sp>
       <p:sp>
         <p:nvSpPr>
-          <p:cNvPr id="3" name="TextBox 2"/>
+          <p:cNvPr id="5" name="TextBox 4"/>
           <p:cNvSpPr txBox="1"/>
           <p:nvPr/>
         </p:nvSpPr>
         <p:spPr>
           <a:xfrm>
-            <a:off x="868680" y="457200"/>
-            <a:ext cx="10607040" cy="365760"/>
+            <a:off x="594360" y="6510528"/>
+            <a:ext cx="8229600" cy="182880"/>
           </a:xfrm>
           <a:prstGeom prst="rect">
             <a:avLst/>
@@ -6252,16 +8035,16 @@
           <a:noFill/>
         </p:spPr>
         <p:txBody>
-          <a:bodyPr wrap="square">
+          <a:bodyPr wrap="square" lIns="0" rIns="0" tIns="0" bIns="0">
             <a:spAutoFit/>
           </a:bodyPr>
           <a:lstStyle/>
           <a:p>
             <a:pPr>
               <a:spcAft>
-                <a:spcPts val="1800"/>
-              </a:spcAft>
-              <a:defRPr sz="1200" b="1">
+                <a:spcPts val="1000"/>
+              </a:spcAft>
+              <a:defRPr sz="900" b="0">
                 <a:solidFill>
                   <a:srgbClr val="C89C51"/>
                 </a:solidFill>
@@ -6269,21 +8052,21 @@
               </a:defRPr>
             </a:pPr>
             <a:r>
-              <a:t>HINDUISMUS · RELIGION 13</a:t>
-            </a:r>
-          </a:p>
-        </p:txBody>
-      </p:sp>
-      <p:sp>
-        <p:nvSpPr>
-          <p:cNvPr id="4" name="TextBox 3"/>
+              <a:t>RELIGION · KLASSE 13     /     VIELFALT VERSTEHEN</a:t>
+            </a:r>
+          </a:p>
+        </p:txBody>
+      </p:sp>
+      <p:sp>
+        <p:nvSpPr>
+          <p:cNvPr id="6" name="TextBox 5"/>
           <p:cNvSpPr txBox="1"/>
           <p:nvPr/>
         </p:nvSpPr>
         <p:spPr>
           <a:xfrm>
-            <a:off x="868680" y="1005840"/>
-            <a:ext cx="10515600" cy="1143000"/>
+            <a:off x="10972800" y="6492240"/>
+            <a:ext cx="594360" cy="228600"/>
           </a:xfrm>
           <a:prstGeom prst="rect">
             <a:avLst/>
@@ -6291,38 +8074,81 @@
           <a:noFill/>
         </p:spPr>
         <p:txBody>
-          <a:bodyPr wrap="square">
+          <a:bodyPr wrap="square" lIns="0" rIns="0" tIns="0" bIns="0">
             <a:spAutoFit/>
           </a:bodyPr>
           <a:lstStyle/>
           <a:p>
             <a:pPr>
               <a:spcAft>
-                <a:spcPts val="1800"/>
-              </a:spcAft>
-              <a:defRPr sz="3400" b="1">
-                <a:solidFill>
-                  <a:srgbClr val="143D43"/>
-                </a:solidFill>
-                <a:latin typeface="Aptos"/>
-              </a:defRPr>
-            </a:pPr>
-            <a:r>
-              <a:t>Entwicklung und heilige Texte</a:t>
-            </a:r>
-          </a:p>
-        </p:txBody>
-      </p:sp>
-      <p:sp>
-        <p:nvSpPr>
-          <p:cNvPr id="5" name="TextBox 4"/>
+                <a:spcPts val="1000"/>
+              </a:spcAft>
+              <a:defRPr sz="1000" b="0">
+                <a:solidFill>
+                  <a:srgbClr val="C89C51"/>
+                </a:solidFill>
+                <a:latin typeface="Aptos"/>
+              </a:defRPr>
+            </a:pPr>
+            <a:r>
+              <a:t>03</a:t>
+            </a:r>
+          </a:p>
+        </p:txBody>
+      </p:sp>
+      <p:sp>
+        <p:nvSpPr>
+          <p:cNvPr id="7" name="Rectangle 6"/>
+          <p:cNvSpPr/>
+          <p:nvPr/>
+        </p:nvSpPr>
+        <p:spPr>
+          <a:xfrm>
+            <a:off x="640080" y="2651760"/>
+            <a:ext cx="2423160" cy="1417320"/>
+          </a:xfrm>
+          <a:prstGeom prst="rect">
+            <a:avLst/>
+          </a:prstGeom>
+          <a:solidFill>
+            <a:srgbClr val="143D43"/>
+          </a:solidFill>
+          <a:ln>
+            <a:noFill/>
+          </a:ln>
+        </p:spPr>
+        <p:style>
+          <a:lnRef idx="1">
+            <a:schemeClr val="accent1"/>
+          </a:lnRef>
+          <a:fillRef idx="3">
+            <a:schemeClr val="accent1"/>
+          </a:fillRef>
+          <a:effectRef idx="2">
+            <a:schemeClr val="accent1"/>
+          </a:effectRef>
+          <a:fontRef idx="minor">
+            <a:schemeClr val="lt1"/>
+          </a:fontRef>
+        </p:style>
+        <p:txBody>
+          <a:bodyPr rtlCol="0" anchor="ctr"/>
+          <a:lstStyle/>
+          <a:p>
+            <a:pPr algn="ctr"/>
+          </a:p>
+        </p:txBody>
+      </p:sp>
+      <p:sp>
+        <p:nvSpPr>
+          <p:cNvPr id="8" name="TextBox 7"/>
           <p:cNvSpPr txBox="1"/>
           <p:nvPr/>
         </p:nvSpPr>
         <p:spPr>
           <a:xfrm>
-            <a:off x="914400" y="2377440"/>
-            <a:ext cx="10241280" cy="3566160"/>
+            <a:off x="777240" y="2926080"/>
+            <a:ext cx="2148840" cy="548640"/>
           </a:xfrm>
           <a:prstGeom prst="rect">
             <a:avLst/>
@@ -6330,86 +8156,38 @@
           <a:noFill/>
         </p:spPr>
         <p:txBody>
-          <a:bodyPr wrap="square">
+          <a:bodyPr wrap="square" lIns="0" rIns="0" tIns="0" bIns="0">
             <a:spAutoFit/>
           </a:bodyPr>
           <a:lstStyle/>
           <a:p>
             <a:pPr>
               <a:spcAft>
-                <a:spcPts val="1800"/>
-              </a:spcAft>
-              <a:defRPr sz="2500" b="0">
-                <a:solidFill>
-                  <a:srgbClr val="173238"/>
-                </a:solidFill>
-                <a:latin typeface="Aptos"/>
-              </a:defRPr>
-            </a:pPr>
-            <a:r>
-              <a:t>Vedische Traditionen: seit dem 2. Jahrtausend v. Chr.</a:t>
-            </a:r>
-          </a:p>
-          <a:p>
-            <a:pPr>
-              <a:spcAft>
-                <a:spcPts val="1800"/>
-              </a:spcAft>
-              <a:defRPr sz="2500" b="0">
-                <a:solidFill>
-                  <a:srgbClr val="173238"/>
-                </a:solidFill>
-                <a:latin typeface="Aptos"/>
-              </a:defRPr>
-            </a:pPr>
-            <a:r>
-              <a:t>Upanishaden: Fragen nach Selbst und Wirklichkeit</a:t>
-            </a:r>
-          </a:p>
-          <a:p>
-            <a:pPr>
-              <a:spcAft>
-                <a:spcPts val="1800"/>
-              </a:spcAft>
-              <a:defRPr sz="2500" b="0">
-                <a:solidFill>
-                  <a:srgbClr val="173238"/>
-                </a:solidFill>
-                <a:latin typeface="Aptos"/>
-              </a:defRPr>
-            </a:pPr>
-            <a:r>
-              <a:t>Bhagavadgita: Handeln, Erkenntnis und Hingabe</a:t>
-            </a:r>
-          </a:p>
-          <a:p>
-            <a:pPr>
-              <a:spcAft>
-                <a:spcPts val="1800"/>
-              </a:spcAft>
-              <a:defRPr sz="2500" b="0">
-                <a:solidFill>
-                  <a:srgbClr val="173238"/>
-                </a:solidFill>
-                <a:latin typeface="Aptos"/>
-              </a:defRPr>
-            </a:pPr>
-            <a:r>
-              <a:t>Ramayana und Mahabharata: Religion in Erzählungen</a:t>
-            </a:r>
-          </a:p>
-        </p:txBody>
-      </p:sp>
-      <p:sp>
-        <p:nvSpPr>
-          <p:cNvPr id="6" name="TextBox 5"/>
+                <a:spcPts val="1000"/>
+              </a:spcAft>
+              <a:defRPr sz="2100" b="1">
+                <a:solidFill>
+                  <a:srgbClr val="F5EFE3"/>
+                </a:solidFill>
+                <a:latin typeface="Aptos"/>
+              </a:defRPr>
+            </a:pPr>
+            <a:r>
+              <a:t>Veden</a:t>
+            </a:r>
+          </a:p>
+        </p:txBody>
+      </p:sp>
+      <p:sp>
+        <p:nvSpPr>
+          <p:cNvPr id="9" name="TextBox 8"/>
           <p:cNvSpPr txBox="1"/>
           <p:nvPr/>
         </p:nvSpPr>
         <p:spPr>
           <a:xfrm>
-            <a:off x="914400" y="6446520"/>
-            <a:ext cx="9144000" cy="228600"/>
+            <a:off x="640080" y="4389120"/>
+            <a:ext cx="2468880" cy="1280160"/>
           </a:xfrm>
           <a:prstGeom prst="rect">
             <a:avLst/>
@@ -6417,38 +8195,97 @@
           <a:noFill/>
         </p:spPr>
         <p:txBody>
-          <a:bodyPr wrap="square">
+          <a:bodyPr wrap="square" lIns="0" rIns="0" tIns="0" bIns="0">
             <a:spAutoFit/>
           </a:bodyPr>
           <a:lstStyle/>
           <a:p>
             <a:pPr>
               <a:spcAft>
-                <a:spcPts val="1800"/>
-              </a:spcAft>
-              <a:defRPr sz="1000" b="0">
-                <a:solidFill>
-                  <a:srgbClr val="C89C51"/>
-                </a:solidFill>
-                <a:latin typeface="Aptos"/>
-              </a:defRPr>
-            </a:pPr>
-            <a:r>
-              <a:t>Vielfalt verstehen · Begriffe verbinden · kritisch nachfragen</a:t>
-            </a:r>
-          </a:p>
-        </p:txBody>
-      </p:sp>
-      <p:sp>
-        <p:nvSpPr>
-          <p:cNvPr id="7" name="TextBox 6"/>
+                <a:spcPts val="1000"/>
+              </a:spcAft>
+              <a:defRPr sz="1800" b="0">
+                <a:solidFill>
+                  <a:srgbClr val="173238"/>
+                </a:solidFill>
+                <a:latin typeface="Aptos"/>
+              </a:defRPr>
+            </a:pPr>
+            <a:r>
+              <a:t>Hymnen &amp; Rituale</a:t>
+            </a:r>
+          </a:p>
+          <a:p>
+            <a:pPr>
+              <a:spcAft>
+                <a:spcPts val="1000"/>
+              </a:spcAft>
+              <a:defRPr sz="1800" b="0">
+                <a:solidFill>
+                  <a:srgbClr val="173238"/>
+                </a:solidFill>
+                <a:latin typeface="Aptos"/>
+              </a:defRPr>
+            </a:pPr>
+            <a:r>
+              <a:t>seit dem 2. Jahrtausend v. Chr.</a:t>
+            </a:r>
+          </a:p>
+        </p:txBody>
+      </p:sp>
+      <p:sp>
+        <p:nvSpPr>
+          <p:cNvPr id="10" name="Rectangle 9"/>
+          <p:cNvSpPr/>
+          <p:nvPr/>
+        </p:nvSpPr>
+        <p:spPr>
+          <a:xfrm>
+            <a:off x="3474720" y="2651760"/>
+            <a:ext cx="2423160" cy="1417320"/>
+          </a:xfrm>
+          <a:prstGeom prst="rect">
+            <a:avLst/>
+          </a:prstGeom>
+          <a:solidFill>
+            <a:srgbClr val="143D43"/>
+          </a:solidFill>
+          <a:ln>
+            <a:noFill/>
+          </a:ln>
+        </p:spPr>
+        <p:style>
+          <a:lnRef idx="1">
+            <a:schemeClr val="accent1"/>
+          </a:lnRef>
+          <a:fillRef idx="3">
+            <a:schemeClr val="accent1"/>
+          </a:fillRef>
+          <a:effectRef idx="2">
+            <a:schemeClr val="accent1"/>
+          </a:effectRef>
+          <a:fontRef idx="minor">
+            <a:schemeClr val="lt1"/>
+          </a:fontRef>
+        </p:style>
+        <p:txBody>
+          <a:bodyPr rtlCol="0" anchor="ctr"/>
+          <a:lstStyle/>
+          <a:p>
+            <a:pPr algn="ctr"/>
+          </a:p>
+        </p:txBody>
+      </p:sp>
+      <p:sp>
+        <p:nvSpPr>
+          <p:cNvPr id="11" name="TextBox 10"/>
           <p:cNvSpPr txBox="1"/>
           <p:nvPr/>
         </p:nvSpPr>
         <p:spPr>
           <a:xfrm>
-            <a:off x="10972800" y="6428232"/>
-            <a:ext cx="457200" cy="274320"/>
+            <a:off x="3611879" y="2926080"/>
+            <a:ext cx="2148840" cy="548640"/>
           </a:xfrm>
           <a:prstGeom prst="rect">
             <a:avLst/>
@@ -6456,24 +8293,344 @@
           <a:noFill/>
         </p:spPr>
         <p:txBody>
-          <a:bodyPr wrap="square">
+          <a:bodyPr wrap="square" lIns="0" rIns="0" tIns="0" bIns="0">
             <a:spAutoFit/>
           </a:bodyPr>
           <a:lstStyle/>
           <a:p>
             <a:pPr>
               <a:spcAft>
-                <a:spcPts val="1800"/>
-              </a:spcAft>
-              <a:defRPr sz="1100" b="0">
-                <a:solidFill>
-                  <a:srgbClr val="C89C51"/>
-                </a:solidFill>
-                <a:latin typeface="Aptos"/>
-              </a:defRPr>
-            </a:pPr>
-            <a:r>
-              <a:t>3</a:t>
+                <a:spcPts val="1000"/>
+              </a:spcAft>
+              <a:defRPr sz="2100" b="1">
+                <a:solidFill>
+                  <a:srgbClr val="F5EFE3"/>
+                </a:solidFill>
+                <a:latin typeface="Aptos"/>
+              </a:defRPr>
+            </a:pPr>
+            <a:r>
+              <a:t>Upanishaden</a:t>
+            </a:r>
+          </a:p>
+        </p:txBody>
+      </p:sp>
+      <p:sp>
+        <p:nvSpPr>
+          <p:cNvPr id="12" name="TextBox 11"/>
+          <p:cNvSpPr txBox="1"/>
+          <p:nvPr/>
+        </p:nvSpPr>
+        <p:spPr>
+          <a:xfrm>
+            <a:off x="3474720" y="4389120"/>
+            <a:ext cx="2468880" cy="1280160"/>
+          </a:xfrm>
+          <a:prstGeom prst="rect">
+            <a:avLst/>
+          </a:prstGeom>
+          <a:noFill/>
+        </p:spPr>
+        <p:txBody>
+          <a:bodyPr wrap="square" lIns="0" rIns="0" tIns="0" bIns="0">
+            <a:spAutoFit/>
+          </a:bodyPr>
+          <a:lstStyle/>
+          <a:p>
+            <a:pPr>
+              <a:spcAft>
+                <a:spcPts val="1000"/>
+              </a:spcAft>
+              <a:defRPr sz="1800" b="0">
+                <a:solidFill>
+                  <a:srgbClr val="173238"/>
+                </a:solidFill>
+                <a:latin typeface="Aptos"/>
+              </a:defRPr>
+            </a:pPr>
+            <a:r>
+              <a:t>Selbst &amp; Wirklichkeit</a:t>
+            </a:r>
+          </a:p>
+        </p:txBody>
+      </p:sp>
+      <p:sp>
+        <p:nvSpPr>
+          <p:cNvPr id="13" name="Rectangle 12"/>
+          <p:cNvSpPr/>
+          <p:nvPr/>
+        </p:nvSpPr>
+        <p:spPr>
+          <a:xfrm>
+            <a:off x="6309360" y="2651760"/>
+            <a:ext cx="2423160" cy="1417320"/>
+          </a:xfrm>
+          <a:prstGeom prst="rect">
+            <a:avLst/>
+          </a:prstGeom>
+          <a:solidFill>
+            <a:srgbClr val="143D43"/>
+          </a:solidFill>
+          <a:ln>
+            <a:noFill/>
+          </a:ln>
+        </p:spPr>
+        <p:style>
+          <a:lnRef idx="1">
+            <a:schemeClr val="accent1"/>
+          </a:lnRef>
+          <a:fillRef idx="3">
+            <a:schemeClr val="accent1"/>
+          </a:fillRef>
+          <a:effectRef idx="2">
+            <a:schemeClr val="accent1"/>
+          </a:effectRef>
+          <a:fontRef idx="minor">
+            <a:schemeClr val="lt1"/>
+          </a:fontRef>
+        </p:style>
+        <p:txBody>
+          <a:bodyPr rtlCol="0" anchor="ctr"/>
+          <a:lstStyle/>
+          <a:p>
+            <a:pPr algn="ctr"/>
+          </a:p>
+        </p:txBody>
+      </p:sp>
+      <p:sp>
+        <p:nvSpPr>
+          <p:cNvPr id="14" name="TextBox 13"/>
+          <p:cNvSpPr txBox="1"/>
+          <p:nvPr/>
+        </p:nvSpPr>
+        <p:spPr>
+          <a:xfrm>
+            <a:off x="6446520" y="2926080"/>
+            <a:ext cx="2148840" cy="548640"/>
+          </a:xfrm>
+          <a:prstGeom prst="rect">
+            <a:avLst/>
+          </a:prstGeom>
+          <a:noFill/>
+        </p:spPr>
+        <p:txBody>
+          <a:bodyPr wrap="square" lIns="0" rIns="0" tIns="0" bIns="0">
+            <a:spAutoFit/>
+          </a:bodyPr>
+          <a:lstStyle/>
+          <a:p>
+            <a:pPr>
+              <a:spcAft>
+                <a:spcPts val="1000"/>
+              </a:spcAft>
+              <a:defRPr sz="2100" b="1">
+                <a:solidFill>
+                  <a:srgbClr val="F5EFE3"/>
+                </a:solidFill>
+                <a:latin typeface="Aptos"/>
+              </a:defRPr>
+            </a:pPr>
+            <a:r>
+              <a:t>Epen</a:t>
+            </a:r>
+          </a:p>
+        </p:txBody>
+      </p:sp>
+      <p:sp>
+        <p:nvSpPr>
+          <p:cNvPr id="15" name="TextBox 14"/>
+          <p:cNvSpPr txBox="1"/>
+          <p:nvPr/>
+        </p:nvSpPr>
+        <p:spPr>
+          <a:xfrm>
+            <a:off x="6309360" y="4389120"/>
+            <a:ext cx="2468880" cy="1280160"/>
+          </a:xfrm>
+          <a:prstGeom prst="rect">
+            <a:avLst/>
+          </a:prstGeom>
+          <a:noFill/>
+        </p:spPr>
+        <p:txBody>
+          <a:bodyPr wrap="square" lIns="0" rIns="0" tIns="0" bIns="0">
+            <a:spAutoFit/>
+          </a:bodyPr>
+          <a:lstStyle/>
+          <a:p>
+            <a:pPr>
+              <a:spcAft>
+                <a:spcPts val="1000"/>
+              </a:spcAft>
+              <a:defRPr sz="1800" b="0">
+                <a:solidFill>
+                  <a:srgbClr val="173238"/>
+                </a:solidFill>
+                <a:latin typeface="Aptos"/>
+              </a:defRPr>
+            </a:pPr>
+            <a:r>
+              <a:t>Ramayana &amp; Mahabharata</a:t>
+            </a:r>
+          </a:p>
+        </p:txBody>
+      </p:sp>
+      <p:sp>
+        <p:nvSpPr>
+          <p:cNvPr id="16" name="Rectangle 15"/>
+          <p:cNvSpPr/>
+          <p:nvPr/>
+        </p:nvSpPr>
+        <p:spPr>
+          <a:xfrm>
+            <a:off x="9144000" y="2651760"/>
+            <a:ext cx="2423160" cy="1417320"/>
+          </a:xfrm>
+          <a:prstGeom prst="rect">
+            <a:avLst/>
+          </a:prstGeom>
+          <a:solidFill>
+            <a:srgbClr val="143D43"/>
+          </a:solidFill>
+          <a:ln>
+            <a:noFill/>
+          </a:ln>
+        </p:spPr>
+        <p:style>
+          <a:lnRef idx="1">
+            <a:schemeClr val="accent1"/>
+          </a:lnRef>
+          <a:fillRef idx="3">
+            <a:schemeClr val="accent1"/>
+          </a:fillRef>
+          <a:effectRef idx="2">
+            <a:schemeClr val="accent1"/>
+          </a:effectRef>
+          <a:fontRef idx="minor">
+            <a:schemeClr val="lt1"/>
+          </a:fontRef>
+        </p:style>
+        <p:txBody>
+          <a:bodyPr rtlCol="0" anchor="ctr"/>
+          <a:lstStyle/>
+          <a:p>
+            <a:pPr algn="ctr"/>
+          </a:p>
+        </p:txBody>
+      </p:sp>
+      <p:sp>
+        <p:nvSpPr>
+          <p:cNvPr id="17" name="TextBox 16"/>
+          <p:cNvSpPr txBox="1"/>
+          <p:nvPr/>
+        </p:nvSpPr>
+        <p:spPr>
+          <a:xfrm>
+            <a:off x="9281160" y="2926080"/>
+            <a:ext cx="2148840" cy="548640"/>
+          </a:xfrm>
+          <a:prstGeom prst="rect">
+            <a:avLst/>
+          </a:prstGeom>
+          <a:noFill/>
+        </p:spPr>
+        <p:txBody>
+          <a:bodyPr wrap="square" lIns="0" rIns="0" tIns="0" bIns="0">
+            <a:spAutoFit/>
+          </a:bodyPr>
+          <a:lstStyle/>
+          <a:p>
+            <a:pPr>
+              <a:spcAft>
+                <a:spcPts val="1000"/>
+              </a:spcAft>
+              <a:defRPr sz="2100" b="1">
+                <a:solidFill>
+                  <a:srgbClr val="F5EFE3"/>
+                </a:solidFill>
+                <a:latin typeface="Aptos"/>
+              </a:defRPr>
+            </a:pPr>
+            <a:r>
+              <a:t>Bhagavadgita</a:t>
+            </a:r>
+          </a:p>
+        </p:txBody>
+      </p:sp>
+      <p:sp>
+        <p:nvSpPr>
+          <p:cNvPr id="18" name="TextBox 17"/>
+          <p:cNvSpPr txBox="1"/>
+          <p:nvPr/>
+        </p:nvSpPr>
+        <p:spPr>
+          <a:xfrm>
+            <a:off x="9144000" y="4389120"/>
+            <a:ext cx="2468880" cy="1280160"/>
+          </a:xfrm>
+          <a:prstGeom prst="rect">
+            <a:avLst/>
+          </a:prstGeom>
+          <a:noFill/>
+        </p:spPr>
+        <p:txBody>
+          <a:bodyPr wrap="square" lIns="0" rIns="0" tIns="0" bIns="0">
+            <a:spAutoFit/>
+          </a:bodyPr>
+          <a:lstStyle/>
+          <a:p>
+            <a:pPr>
+              <a:spcAft>
+                <a:spcPts val="1000"/>
+              </a:spcAft>
+              <a:defRPr sz="1800" b="0">
+                <a:solidFill>
+                  <a:srgbClr val="173238"/>
+                </a:solidFill>
+                <a:latin typeface="Aptos"/>
+              </a:defRPr>
+            </a:pPr>
+            <a:r>
+              <a:t>Handeln &amp; Hingabe</a:t>
+            </a:r>
+          </a:p>
+        </p:txBody>
+      </p:sp>
+      <p:sp>
+        <p:nvSpPr>
+          <p:cNvPr id="19" name="TextBox 18"/>
+          <p:cNvSpPr txBox="1"/>
+          <p:nvPr/>
+        </p:nvSpPr>
+        <p:spPr>
+          <a:xfrm>
+            <a:off x="685800" y="5715000"/>
+            <a:ext cx="10789920" cy="365760"/>
+          </a:xfrm>
+          <a:prstGeom prst="rect">
+            <a:avLst/>
+          </a:prstGeom>
+          <a:noFill/>
+        </p:spPr>
+        <p:txBody>
+          <a:bodyPr wrap="square" lIns="0" rIns="0" tIns="0" bIns="0">
+            <a:spAutoFit/>
+          </a:bodyPr>
+          <a:lstStyle/>
+          <a:p>
+            <a:pPr>
+              <a:spcAft>
+                <a:spcPts val="1000"/>
+              </a:spcAft>
+              <a:defRPr sz="1700" b="0">
+                <a:solidFill>
+                  <a:srgbClr val="577477"/>
+                </a:solidFill>
+                <a:latin typeface="Aptos"/>
+              </a:defRPr>
+            </a:pPr>
+            <a:r>
+              <a:t>Mündliche Überlieferung, Erzählungen und Rituale prägen Religion ebenso wie Texte.</a:t>
             </a:r>
           </a:p>
         </p:txBody>
@@ -6506,14 +8663,92 @@
       <p:grpSpPr/>
       <p:sp>
         <p:nvSpPr>
-          <p:cNvPr id="2" name="Rectangle 1"/>
+          <p:cNvPr id="2" name="TextBox 1"/>
+          <p:cNvSpPr txBox="1"/>
+          <p:nvPr/>
+        </p:nvSpPr>
+        <p:spPr>
+          <a:xfrm>
+            <a:off x="594360" y="365760"/>
+            <a:ext cx="10058400" cy="274320"/>
+          </a:xfrm>
+          <a:prstGeom prst="rect">
+            <a:avLst/>
+          </a:prstGeom>
+          <a:noFill/>
+        </p:spPr>
+        <p:txBody>
+          <a:bodyPr wrap="square" lIns="0" rIns="0" tIns="0" bIns="0">
+            <a:spAutoFit/>
+          </a:bodyPr>
+          <a:lstStyle/>
+          <a:p>
+            <a:pPr>
+              <a:spcAft>
+                <a:spcPts val="1000"/>
+              </a:spcAft>
+              <a:defRPr sz="1100" b="1">
+                <a:solidFill>
+                  <a:srgbClr val="C89C51"/>
+                </a:solidFill>
+                <a:latin typeface="Aptos"/>
+              </a:defRPr>
+            </a:pPr>
+            <a:r>
+              <a:t>03 / GOTTESVORSTELLUNGEN</a:t>
+            </a:r>
+          </a:p>
+        </p:txBody>
+      </p:sp>
+      <p:sp>
+        <p:nvSpPr>
+          <p:cNvPr id="3" name="TextBox 2"/>
+          <p:cNvSpPr txBox="1"/>
+          <p:nvPr/>
+        </p:nvSpPr>
+        <p:spPr>
+          <a:xfrm>
+            <a:off x="594360" y="868680"/>
+            <a:ext cx="10972800" cy="1005840"/>
+          </a:xfrm>
+          <a:prstGeom prst="rect">
+            <a:avLst/>
+          </a:prstGeom>
+          <a:noFill/>
+        </p:spPr>
+        <p:txBody>
+          <a:bodyPr wrap="square" lIns="0" rIns="0" tIns="0" bIns="0">
+            <a:spAutoFit/>
+          </a:bodyPr>
+          <a:lstStyle/>
+          <a:p>
+            <a:pPr>
+              <a:spcAft>
+                <a:spcPts val="1000"/>
+              </a:spcAft>
+              <a:defRPr sz="3400" b="1">
+                <a:solidFill>
+                  <a:srgbClr val="143D43"/>
+                </a:solidFill>
+                <a:latin typeface="Aptos"/>
+              </a:defRPr>
+            </a:pPr>
+            <a:r>
+              <a:t>Viele Gottheiten – eine Wirklichkeit?</a:t>
+            </a:r>
+          </a:p>
+        </p:txBody>
+      </p:sp>
+      <p:sp>
+        <p:nvSpPr>
+          <p:cNvPr id="4" name="Rectangle 3"/>
           <p:cNvSpPr/>
           <p:nvPr/>
         </p:nvSpPr>
         <p:spPr>
           <a:xfrm>
-            <a:off x="548640" y="594360"/>
-            <a:ext cx="109728" cy="5440680"/>
+            <a:off x="594360" y="6382512"/>
+            <a:ext cx="10972800" cy="18288"/>
           </a:xfrm>
           <a:prstGeom prst="rect">
             <a:avLst/>
@@ -6549,14 +8784,14 @@
       </p:sp>
       <p:sp>
         <p:nvSpPr>
-          <p:cNvPr id="3" name="TextBox 2"/>
+          <p:cNvPr id="5" name="TextBox 4"/>
           <p:cNvSpPr txBox="1"/>
           <p:nvPr/>
         </p:nvSpPr>
         <p:spPr>
           <a:xfrm>
-            <a:off x="868680" y="457200"/>
-            <a:ext cx="10607040" cy="365760"/>
+            <a:off x="594360" y="6510528"/>
+            <a:ext cx="8229600" cy="182880"/>
           </a:xfrm>
           <a:prstGeom prst="rect">
             <a:avLst/>
@@ -6564,16 +8799,16 @@
           <a:noFill/>
         </p:spPr>
         <p:txBody>
-          <a:bodyPr wrap="square">
+          <a:bodyPr wrap="square" lIns="0" rIns="0" tIns="0" bIns="0">
             <a:spAutoFit/>
           </a:bodyPr>
           <a:lstStyle/>
           <a:p>
             <a:pPr>
               <a:spcAft>
-                <a:spcPts val="1800"/>
-              </a:spcAft>
-              <a:defRPr sz="1200" b="1">
+                <a:spcPts val="1000"/>
+              </a:spcAft>
+              <a:defRPr sz="900" b="0">
                 <a:solidFill>
                   <a:srgbClr val="C89C51"/>
                 </a:solidFill>
@@ -6581,21 +8816,21 @@
               </a:defRPr>
             </a:pPr>
             <a:r>
-              <a:t>HINDUISMUS · RELIGION 13</a:t>
-            </a:r>
-          </a:p>
-        </p:txBody>
-      </p:sp>
-      <p:sp>
-        <p:nvSpPr>
-          <p:cNvPr id="4" name="TextBox 3"/>
+              <a:t>RELIGION · KLASSE 13     /     VIELFALT VERSTEHEN</a:t>
+            </a:r>
+          </a:p>
+        </p:txBody>
+      </p:sp>
+      <p:sp>
+        <p:nvSpPr>
+          <p:cNvPr id="6" name="TextBox 5"/>
           <p:cNvSpPr txBox="1"/>
           <p:nvPr/>
         </p:nvSpPr>
         <p:spPr>
           <a:xfrm>
-            <a:off x="868680" y="1005840"/>
-            <a:ext cx="10515600" cy="1143000"/>
+            <a:off x="10972800" y="6492240"/>
+            <a:ext cx="594360" cy="228600"/>
           </a:xfrm>
           <a:prstGeom prst="rect">
             <a:avLst/>
@@ -6603,38 +8838,124 @@
           <a:noFill/>
         </p:spPr>
         <p:txBody>
-          <a:bodyPr wrap="square">
+          <a:bodyPr wrap="square" lIns="0" rIns="0" tIns="0" bIns="0">
             <a:spAutoFit/>
           </a:bodyPr>
           <a:lstStyle/>
           <a:p>
             <a:pPr>
               <a:spcAft>
-                <a:spcPts val="1800"/>
-              </a:spcAft>
-              <a:defRPr sz="3400" b="1">
-                <a:solidFill>
-                  <a:srgbClr val="143D43"/>
-                </a:solidFill>
-                <a:latin typeface="Aptos"/>
-              </a:defRPr>
-            </a:pPr>
-            <a:r>
-              <a:t>Viele Gottheiten – eine Wirklichkeit?</a:t>
-            </a:r>
-          </a:p>
-        </p:txBody>
-      </p:sp>
-      <p:sp>
-        <p:nvSpPr>
-          <p:cNvPr id="5" name="TextBox 4"/>
+                <a:spcPts val="1000"/>
+              </a:spcAft>
+              <a:defRPr sz="1000" b="0">
+                <a:solidFill>
+                  <a:srgbClr val="C89C51"/>
+                </a:solidFill>
+                <a:latin typeface="Aptos"/>
+              </a:defRPr>
+            </a:pPr>
+            <a:r>
+              <a:t>04</a:t>
+            </a:r>
+          </a:p>
+        </p:txBody>
+      </p:sp>
+      <p:sp>
+        <p:nvSpPr>
+          <p:cNvPr id="7" name="Rounded Rectangle 6"/>
+          <p:cNvSpPr/>
+          <p:nvPr/>
+        </p:nvSpPr>
+        <p:spPr>
+          <a:xfrm>
+            <a:off x="640080" y="2103120"/>
+            <a:ext cx="3383280" cy="2286000"/>
+          </a:xfrm>
+          <a:prstGeom prst="roundRect">
+            <a:avLst/>
+          </a:prstGeom>
+          <a:solidFill>
+            <a:srgbClr val="FFFFFF"/>
+          </a:solidFill>
+          <a:ln>
+            <a:noFill/>
+          </a:ln>
+        </p:spPr>
+        <p:style>
+          <a:lnRef idx="1">
+            <a:schemeClr val="accent1"/>
+          </a:lnRef>
+          <a:fillRef idx="3">
+            <a:schemeClr val="accent1"/>
+          </a:fillRef>
+          <a:effectRef idx="2">
+            <a:schemeClr val="accent1"/>
+          </a:effectRef>
+          <a:fontRef idx="minor">
+            <a:schemeClr val="lt1"/>
+          </a:fontRef>
+        </p:style>
+        <p:txBody>
+          <a:bodyPr rtlCol="0" anchor="ctr"/>
+          <a:lstStyle/>
+          <a:p>
+            <a:pPr algn="ctr"/>
+          </a:p>
+        </p:txBody>
+      </p:sp>
+      <p:sp>
+        <p:nvSpPr>
+          <p:cNvPr id="8" name="Rectangle 7"/>
+          <p:cNvSpPr/>
+          <p:nvPr/>
+        </p:nvSpPr>
+        <p:spPr>
+          <a:xfrm>
+            <a:off x="822959" y="2304288"/>
+            <a:ext cx="54864" cy="384048"/>
+          </a:xfrm>
+          <a:prstGeom prst="rect">
+            <a:avLst/>
+          </a:prstGeom>
+          <a:solidFill>
+            <a:srgbClr val="C89C51"/>
+          </a:solidFill>
+          <a:ln>
+            <a:noFill/>
+          </a:ln>
+        </p:spPr>
+        <p:style>
+          <a:lnRef idx="1">
+            <a:schemeClr val="accent1"/>
+          </a:lnRef>
+          <a:fillRef idx="3">
+            <a:schemeClr val="accent1"/>
+          </a:fillRef>
+          <a:effectRef idx="2">
+            <a:schemeClr val="accent1"/>
+          </a:effectRef>
+          <a:fontRef idx="minor">
+            <a:schemeClr val="lt1"/>
+          </a:fontRef>
+        </p:style>
+        <p:txBody>
+          <a:bodyPr rtlCol="0" anchor="ctr"/>
+          <a:lstStyle/>
+          <a:p>
+            <a:pPr algn="ctr"/>
+          </a:p>
+        </p:txBody>
+      </p:sp>
+      <p:sp>
+        <p:nvSpPr>
+          <p:cNvPr id="9" name="TextBox 8"/>
           <p:cNvSpPr txBox="1"/>
           <p:nvPr/>
         </p:nvSpPr>
         <p:spPr>
           <a:xfrm>
-            <a:off x="914400" y="2377440"/>
-            <a:ext cx="10241280" cy="3566160"/>
+            <a:off x="1005840" y="2286000"/>
+            <a:ext cx="2834640" cy="548640"/>
           </a:xfrm>
           <a:prstGeom prst="rect">
             <a:avLst/>
@@ -6642,86 +8963,38 @@
           <a:noFill/>
         </p:spPr>
         <p:txBody>
-          <a:bodyPr wrap="square">
+          <a:bodyPr wrap="square" lIns="0" rIns="0" tIns="0" bIns="0">
             <a:spAutoFit/>
           </a:bodyPr>
           <a:lstStyle/>
           <a:p>
             <a:pPr>
               <a:spcAft>
-                <a:spcPts val="1800"/>
-              </a:spcAft>
-              <a:defRPr sz="2500" b="0">
-                <a:solidFill>
-                  <a:srgbClr val="173238"/>
-                </a:solidFill>
-                <a:latin typeface="Aptos"/>
-              </a:defRPr>
-            </a:pPr>
-            <a:r>
-              <a:t>Brahman: letzte Wirklichkeit in vielen Philosophien</a:t>
-            </a:r>
-          </a:p>
-          <a:p>
-            <a:pPr>
-              <a:spcAft>
-                <a:spcPts val="1800"/>
-              </a:spcAft>
-              <a:defRPr sz="2500" b="0">
-                <a:solidFill>
-                  <a:srgbClr val="173238"/>
-                </a:solidFill>
-                <a:latin typeface="Aptos"/>
-              </a:defRPr>
-            </a:pPr>
-            <a:r>
-              <a:t>Vishnu, Shiva und Devi: zentrale Bezugspunkte</a:t>
-            </a:r>
-          </a:p>
-          <a:p>
-            <a:pPr>
-              <a:spcAft>
-                <a:spcPts val="1800"/>
-              </a:spcAft>
-              <a:defRPr sz="2500" b="0">
-                <a:solidFill>
-                  <a:srgbClr val="173238"/>
-                </a:solidFill>
-                <a:latin typeface="Aptos"/>
-              </a:defRPr>
-            </a:pPr>
-            <a:r>
-              <a:t>Persönliche Gottesverehrung und philosophische Vielfalt</a:t>
-            </a:r>
-          </a:p>
-          <a:p>
-            <a:pPr>
-              <a:spcAft>
-                <a:spcPts val="1800"/>
-              </a:spcAft>
-              <a:defRPr sz="2500" b="0">
-                <a:solidFill>
-                  <a:srgbClr val="173238"/>
-                </a:solidFill>
-                <a:latin typeface="Aptos"/>
-              </a:defRPr>
-            </a:pPr>
-            <a:r>
-              <a:t>Brahman ≠ Brahma, die Schöpfergottheit</a:t>
-            </a:r>
-          </a:p>
-        </p:txBody>
-      </p:sp>
-      <p:sp>
-        <p:nvSpPr>
-          <p:cNvPr id="6" name="TextBox 5"/>
+                <a:spcPts val="1000"/>
+              </a:spcAft>
+              <a:defRPr sz="2300" b="1">
+                <a:solidFill>
+                  <a:srgbClr val="143D43"/>
+                </a:solidFill>
+                <a:latin typeface="Aptos"/>
+              </a:defRPr>
+            </a:pPr>
+            <a:r>
+              <a:t>Vishnu</a:t>
+            </a:r>
+          </a:p>
+        </p:txBody>
+      </p:sp>
+      <p:sp>
+        <p:nvSpPr>
+          <p:cNvPr id="10" name="TextBox 9"/>
           <p:cNvSpPr txBox="1"/>
           <p:nvPr/>
         </p:nvSpPr>
         <p:spPr>
           <a:xfrm>
-            <a:off x="914400" y="6446520"/>
-            <a:ext cx="9144000" cy="228600"/>
+            <a:off x="914400" y="2971800"/>
+            <a:ext cx="2834640" cy="1325880"/>
           </a:xfrm>
           <a:prstGeom prst="rect">
             <a:avLst/>
@@ -6729,38 +9002,140 @@
           <a:noFill/>
         </p:spPr>
         <p:txBody>
-          <a:bodyPr wrap="square">
+          <a:bodyPr wrap="square" lIns="0" rIns="0" tIns="0" bIns="0">
             <a:spAutoFit/>
           </a:bodyPr>
           <a:lstStyle/>
           <a:p>
             <a:pPr>
               <a:spcAft>
-                <a:spcPts val="1800"/>
-              </a:spcAft>
-              <a:defRPr sz="1000" b="0">
-                <a:solidFill>
-                  <a:srgbClr val="C89C51"/>
-                </a:solidFill>
-                <a:latin typeface="Aptos"/>
-              </a:defRPr>
-            </a:pPr>
-            <a:r>
-              <a:t>Vielfalt verstehen · Begriffe verbinden · kritisch nachfragen</a:t>
-            </a:r>
-          </a:p>
-        </p:txBody>
-      </p:sp>
-      <p:sp>
-        <p:nvSpPr>
-          <p:cNvPr id="7" name="TextBox 6"/>
+                <a:spcPts val="1000"/>
+              </a:spcAft>
+              <a:defRPr sz="2000" b="0">
+                <a:solidFill>
+                  <a:srgbClr val="173238"/>
+                </a:solidFill>
+                <a:latin typeface="Aptos"/>
+              </a:defRPr>
+            </a:pPr>
+            <a:r>
+              <a:t>Krishna und Rama</a:t>
+            </a:r>
+          </a:p>
+          <a:p>
+            <a:pPr>
+              <a:spcAft>
+                <a:spcPts val="1000"/>
+              </a:spcAft>
+              <a:defRPr sz="2000" b="0">
+                <a:solidFill>
+                  <a:srgbClr val="173238"/>
+                </a:solidFill>
+                <a:latin typeface="Aptos"/>
+              </a:defRPr>
+            </a:pPr>
+            <a:r>
+              <a:t>als Erscheinungsformen</a:t>
+            </a:r>
+          </a:p>
+        </p:txBody>
+      </p:sp>
+      <p:sp>
+        <p:nvSpPr>
+          <p:cNvPr id="11" name="Rounded Rectangle 10"/>
+          <p:cNvSpPr/>
+          <p:nvPr/>
+        </p:nvSpPr>
+        <p:spPr>
+          <a:xfrm>
+            <a:off x="4389120" y="2103120"/>
+            <a:ext cx="3383280" cy="2286000"/>
+          </a:xfrm>
+          <a:prstGeom prst="roundRect">
+            <a:avLst/>
+          </a:prstGeom>
+          <a:solidFill>
+            <a:srgbClr val="FFFFFF"/>
+          </a:solidFill>
+          <a:ln>
+            <a:noFill/>
+          </a:ln>
+        </p:spPr>
+        <p:style>
+          <a:lnRef idx="1">
+            <a:schemeClr val="accent1"/>
+          </a:lnRef>
+          <a:fillRef idx="3">
+            <a:schemeClr val="accent1"/>
+          </a:fillRef>
+          <a:effectRef idx="2">
+            <a:schemeClr val="accent1"/>
+          </a:effectRef>
+          <a:fontRef idx="minor">
+            <a:schemeClr val="lt1"/>
+          </a:fontRef>
+        </p:style>
+        <p:txBody>
+          <a:bodyPr rtlCol="0" anchor="ctr"/>
+          <a:lstStyle/>
+          <a:p>
+            <a:pPr algn="ctr"/>
+          </a:p>
+        </p:txBody>
+      </p:sp>
+      <p:sp>
+        <p:nvSpPr>
+          <p:cNvPr id="12" name="Rectangle 11"/>
+          <p:cNvSpPr/>
+          <p:nvPr/>
+        </p:nvSpPr>
+        <p:spPr>
+          <a:xfrm>
+            <a:off x="4572000" y="2304288"/>
+            <a:ext cx="54864" cy="384048"/>
+          </a:xfrm>
+          <a:prstGeom prst="rect">
+            <a:avLst/>
+          </a:prstGeom>
+          <a:solidFill>
+            <a:srgbClr val="C89C51"/>
+          </a:solidFill>
+          <a:ln>
+            <a:noFill/>
+          </a:ln>
+        </p:spPr>
+        <p:style>
+          <a:lnRef idx="1">
+            <a:schemeClr val="accent1"/>
+          </a:lnRef>
+          <a:fillRef idx="3">
+            <a:schemeClr val="accent1"/>
+          </a:fillRef>
+          <a:effectRef idx="2">
+            <a:schemeClr val="accent1"/>
+          </a:effectRef>
+          <a:fontRef idx="minor">
+            <a:schemeClr val="lt1"/>
+          </a:fontRef>
+        </p:style>
+        <p:txBody>
+          <a:bodyPr rtlCol="0" anchor="ctr"/>
+          <a:lstStyle/>
+          <a:p>
+            <a:pPr algn="ctr"/>
+          </a:p>
+        </p:txBody>
+      </p:sp>
+      <p:sp>
+        <p:nvSpPr>
+          <p:cNvPr id="13" name="TextBox 12"/>
           <p:cNvSpPr txBox="1"/>
           <p:nvPr/>
         </p:nvSpPr>
         <p:spPr>
           <a:xfrm>
-            <a:off x="10972800" y="6428232"/>
-            <a:ext cx="457200" cy="274320"/>
+            <a:off x="4754880" y="2286000"/>
+            <a:ext cx="2834640" cy="548640"/>
           </a:xfrm>
           <a:prstGeom prst="rect">
             <a:avLst/>
@@ -6768,24 +9143,357 @@
           <a:noFill/>
         </p:spPr>
         <p:txBody>
-          <a:bodyPr wrap="square">
+          <a:bodyPr wrap="square" lIns="0" rIns="0" tIns="0" bIns="0">
             <a:spAutoFit/>
           </a:bodyPr>
           <a:lstStyle/>
           <a:p>
             <a:pPr>
               <a:spcAft>
-                <a:spcPts val="1800"/>
-              </a:spcAft>
-              <a:defRPr sz="1100" b="0">
-                <a:solidFill>
-                  <a:srgbClr val="C89C51"/>
-                </a:solidFill>
-                <a:latin typeface="Aptos"/>
-              </a:defRPr>
-            </a:pPr>
-            <a:r>
-              <a:t>4</a:t>
+                <a:spcPts val="1000"/>
+              </a:spcAft>
+              <a:defRPr sz="2300" b="1">
+                <a:solidFill>
+                  <a:srgbClr val="143D43"/>
+                </a:solidFill>
+                <a:latin typeface="Aptos"/>
+              </a:defRPr>
+            </a:pPr>
+            <a:r>
+              <a:t>Shiva</a:t>
+            </a:r>
+          </a:p>
+        </p:txBody>
+      </p:sp>
+      <p:sp>
+        <p:nvSpPr>
+          <p:cNvPr id="14" name="TextBox 13"/>
+          <p:cNvSpPr txBox="1"/>
+          <p:nvPr/>
+        </p:nvSpPr>
+        <p:spPr>
+          <a:xfrm>
+            <a:off x="4663440" y="2971800"/>
+            <a:ext cx="2834640" cy="1325880"/>
+          </a:xfrm>
+          <a:prstGeom prst="rect">
+            <a:avLst/>
+          </a:prstGeom>
+          <a:noFill/>
+        </p:spPr>
+        <p:txBody>
+          <a:bodyPr wrap="square" lIns="0" rIns="0" tIns="0" bIns="0">
+            <a:spAutoFit/>
+          </a:bodyPr>
+          <a:lstStyle/>
+          <a:p>
+            <a:pPr>
+              <a:spcAft>
+                <a:spcPts val="1000"/>
+              </a:spcAft>
+              <a:defRPr sz="2000" b="0">
+                <a:solidFill>
+                  <a:srgbClr val="173238"/>
+                </a:solidFill>
+                <a:latin typeface="Aptos"/>
+              </a:defRPr>
+            </a:pPr>
+            <a:r>
+              <a:t>Wandlung, Askese</a:t>
+            </a:r>
+          </a:p>
+          <a:p>
+            <a:pPr>
+              <a:spcAft>
+                <a:spcPts val="1000"/>
+              </a:spcAft>
+              <a:defRPr sz="2000" b="0">
+                <a:solidFill>
+                  <a:srgbClr val="173238"/>
+                </a:solidFill>
+                <a:latin typeface="Aptos"/>
+              </a:defRPr>
+            </a:pPr>
+            <a:r>
+              <a:t>und Erneuerung</a:t>
+            </a:r>
+          </a:p>
+        </p:txBody>
+      </p:sp>
+      <p:sp>
+        <p:nvSpPr>
+          <p:cNvPr id="15" name="Rounded Rectangle 14"/>
+          <p:cNvSpPr/>
+          <p:nvPr/>
+        </p:nvSpPr>
+        <p:spPr>
+          <a:xfrm>
+            <a:off x="8138160" y="2103120"/>
+            <a:ext cx="3383280" cy="2286000"/>
+          </a:xfrm>
+          <a:prstGeom prst="roundRect">
+            <a:avLst/>
+          </a:prstGeom>
+          <a:solidFill>
+            <a:srgbClr val="FFFFFF"/>
+          </a:solidFill>
+          <a:ln>
+            <a:noFill/>
+          </a:ln>
+        </p:spPr>
+        <p:style>
+          <a:lnRef idx="1">
+            <a:schemeClr val="accent1"/>
+          </a:lnRef>
+          <a:fillRef idx="3">
+            <a:schemeClr val="accent1"/>
+          </a:fillRef>
+          <a:effectRef idx="2">
+            <a:schemeClr val="accent1"/>
+          </a:effectRef>
+          <a:fontRef idx="minor">
+            <a:schemeClr val="lt1"/>
+          </a:fontRef>
+        </p:style>
+        <p:txBody>
+          <a:bodyPr rtlCol="0" anchor="ctr"/>
+          <a:lstStyle/>
+          <a:p>
+            <a:pPr algn="ctr"/>
+          </a:p>
+        </p:txBody>
+      </p:sp>
+      <p:sp>
+        <p:nvSpPr>
+          <p:cNvPr id="16" name="Rectangle 15"/>
+          <p:cNvSpPr/>
+          <p:nvPr/>
+        </p:nvSpPr>
+        <p:spPr>
+          <a:xfrm>
+            <a:off x="8321040" y="2304288"/>
+            <a:ext cx="54864" cy="384048"/>
+          </a:xfrm>
+          <a:prstGeom prst="rect">
+            <a:avLst/>
+          </a:prstGeom>
+          <a:solidFill>
+            <a:srgbClr val="C89C51"/>
+          </a:solidFill>
+          <a:ln>
+            <a:noFill/>
+          </a:ln>
+        </p:spPr>
+        <p:style>
+          <a:lnRef idx="1">
+            <a:schemeClr val="accent1"/>
+          </a:lnRef>
+          <a:fillRef idx="3">
+            <a:schemeClr val="accent1"/>
+          </a:fillRef>
+          <a:effectRef idx="2">
+            <a:schemeClr val="accent1"/>
+          </a:effectRef>
+          <a:fontRef idx="minor">
+            <a:schemeClr val="lt1"/>
+          </a:fontRef>
+        </p:style>
+        <p:txBody>
+          <a:bodyPr rtlCol="0" anchor="ctr"/>
+          <a:lstStyle/>
+          <a:p>
+            <a:pPr algn="ctr"/>
+          </a:p>
+        </p:txBody>
+      </p:sp>
+      <p:sp>
+        <p:nvSpPr>
+          <p:cNvPr id="17" name="TextBox 16"/>
+          <p:cNvSpPr txBox="1"/>
+          <p:nvPr/>
+        </p:nvSpPr>
+        <p:spPr>
+          <a:xfrm>
+            <a:off x="8503920" y="2286000"/>
+            <a:ext cx="2834640" cy="548640"/>
+          </a:xfrm>
+          <a:prstGeom prst="rect">
+            <a:avLst/>
+          </a:prstGeom>
+          <a:noFill/>
+        </p:spPr>
+        <p:txBody>
+          <a:bodyPr wrap="square" lIns="0" rIns="0" tIns="0" bIns="0">
+            <a:spAutoFit/>
+          </a:bodyPr>
+          <a:lstStyle/>
+          <a:p>
+            <a:pPr>
+              <a:spcAft>
+                <a:spcPts val="1000"/>
+              </a:spcAft>
+              <a:defRPr sz="2300" b="1">
+                <a:solidFill>
+                  <a:srgbClr val="143D43"/>
+                </a:solidFill>
+                <a:latin typeface="Aptos"/>
+              </a:defRPr>
+            </a:pPr>
+            <a:r>
+              <a:t>Devi</a:t>
+            </a:r>
+          </a:p>
+        </p:txBody>
+      </p:sp>
+      <p:sp>
+        <p:nvSpPr>
+          <p:cNvPr id="18" name="TextBox 17"/>
+          <p:cNvSpPr txBox="1"/>
+          <p:nvPr/>
+        </p:nvSpPr>
+        <p:spPr>
+          <a:xfrm>
+            <a:off x="8412480" y="2971800"/>
+            <a:ext cx="2834640" cy="1325880"/>
+          </a:xfrm>
+          <a:prstGeom prst="rect">
+            <a:avLst/>
+          </a:prstGeom>
+          <a:noFill/>
+        </p:spPr>
+        <p:txBody>
+          <a:bodyPr wrap="square" lIns="0" rIns="0" tIns="0" bIns="0">
+            <a:spAutoFit/>
+          </a:bodyPr>
+          <a:lstStyle/>
+          <a:p>
+            <a:pPr>
+              <a:spcAft>
+                <a:spcPts val="1000"/>
+              </a:spcAft>
+              <a:defRPr sz="2000" b="0">
+                <a:solidFill>
+                  <a:srgbClr val="173238"/>
+                </a:solidFill>
+                <a:latin typeface="Aptos"/>
+              </a:defRPr>
+            </a:pPr>
+            <a:r>
+              <a:t>Die Göttin</a:t>
+            </a:r>
+          </a:p>
+          <a:p>
+            <a:pPr>
+              <a:spcAft>
+                <a:spcPts val="1000"/>
+              </a:spcAft>
+              <a:defRPr sz="2000" b="0">
+                <a:solidFill>
+                  <a:srgbClr val="173238"/>
+                </a:solidFill>
+                <a:latin typeface="Aptos"/>
+              </a:defRPr>
+            </a:pPr>
+            <a:r>
+              <a:t>in vielen Gestalten</a:t>
+            </a:r>
+          </a:p>
+        </p:txBody>
+      </p:sp>
+      <p:sp>
+        <p:nvSpPr>
+          <p:cNvPr id="19" name="Rounded Rectangle 18"/>
+          <p:cNvSpPr/>
+          <p:nvPr/>
+        </p:nvSpPr>
+        <p:spPr>
+          <a:xfrm>
+            <a:off x="640080" y="4709160"/>
+            <a:ext cx="10881360" cy="1188720"/>
+          </a:xfrm>
+          <a:prstGeom prst="roundRect">
+            <a:avLst/>
+          </a:prstGeom>
+          <a:solidFill>
+            <a:srgbClr val="143D43"/>
+          </a:solidFill>
+          <a:ln>
+            <a:noFill/>
+          </a:ln>
+        </p:spPr>
+        <p:style>
+          <a:lnRef idx="1">
+            <a:schemeClr val="accent1"/>
+          </a:lnRef>
+          <a:fillRef idx="3">
+            <a:schemeClr val="accent1"/>
+          </a:fillRef>
+          <a:effectRef idx="2">
+            <a:schemeClr val="accent1"/>
+          </a:effectRef>
+          <a:fontRef idx="minor">
+            <a:schemeClr val="lt1"/>
+          </a:fontRef>
+        </p:style>
+        <p:txBody>
+          <a:bodyPr rtlCol="0" anchor="ctr"/>
+          <a:lstStyle/>
+          <a:p>
+            <a:pPr algn="ctr"/>
+          </a:p>
+        </p:txBody>
+      </p:sp>
+      <p:sp>
+        <p:nvSpPr>
+          <p:cNvPr id="20" name="TextBox 19"/>
+          <p:cNvSpPr txBox="1"/>
+          <p:nvPr/>
+        </p:nvSpPr>
+        <p:spPr>
+          <a:xfrm>
+            <a:off x="914400" y="4937760"/>
+            <a:ext cx="10332720" cy="777240"/>
+          </a:xfrm>
+          <a:prstGeom prst="rect">
+            <a:avLst/>
+          </a:prstGeom>
+          <a:noFill/>
+        </p:spPr>
+        <p:txBody>
+          <a:bodyPr wrap="square" lIns="0" rIns="0" tIns="0" bIns="0">
+            <a:spAutoFit/>
+          </a:bodyPr>
+          <a:lstStyle/>
+          <a:p>
+            <a:pPr>
+              <a:spcAft>
+                <a:spcPts val="1000"/>
+              </a:spcAft>
+              <a:defRPr sz="2000" b="0">
+                <a:solidFill>
+                  <a:srgbClr val="F5EFE3"/>
+                </a:solidFill>
+                <a:latin typeface="Aptos"/>
+              </a:defRPr>
+            </a:pPr>
+            <a:r>
+              <a:t>Brahman: letzte Wirklichkeit in vielen Philosophien</a:t>
+            </a:r>
+          </a:p>
+          <a:p>
+            <a:pPr>
+              <a:spcAft>
+                <a:spcPts val="1000"/>
+              </a:spcAft>
+              <a:defRPr sz="2000" b="0">
+                <a:solidFill>
+                  <a:srgbClr val="F5EFE3"/>
+                </a:solidFill>
+                <a:latin typeface="Aptos"/>
+              </a:defRPr>
+            </a:pPr>
+            <a:r>
+              <a:t>Nicht zu verwechseln mit Brahma, der Schöpfergottheit.</a:t>
             </a:r>
           </a:p>
         </p:txBody>
@@ -6818,14 +9526,92 @@
       <p:grpSpPr/>
       <p:sp>
         <p:nvSpPr>
-          <p:cNvPr id="2" name="Rectangle 1"/>
+          <p:cNvPr id="2" name="TextBox 1"/>
+          <p:cNvSpPr txBox="1"/>
+          <p:nvPr/>
+        </p:nvSpPr>
+        <p:spPr>
+          <a:xfrm>
+            <a:off x="594360" y="365760"/>
+            <a:ext cx="10058400" cy="274320"/>
+          </a:xfrm>
+          <a:prstGeom prst="rect">
+            <a:avLst/>
+          </a:prstGeom>
+          <a:noFill/>
+        </p:spPr>
+        <p:txBody>
+          <a:bodyPr wrap="square" lIns="0" rIns="0" tIns="0" bIns="0">
+            <a:spAutoFit/>
+          </a:bodyPr>
+          <a:lstStyle/>
+          <a:p>
+            <a:pPr>
+              <a:spcAft>
+                <a:spcPts val="1000"/>
+              </a:spcAft>
+              <a:defRPr sz="1100" b="1">
+                <a:solidFill>
+                  <a:srgbClr val="C89C51"/>
+                </a:solidFill>
+                <a:latin typeface="Aptos"/>
+              </a:defRPr>
+            </a:pPr>
+            <a:r>
+              <a:t>04 / KARMA · SAMSARA · MOKSHA</a:t>
+            </a:r>
+          </a:p>
+        </p:txBody>
+      </p:sp>
+      <p:sp>
+        <p:nvSpPr>
+          <p:cNvPr id="3" name="TextBox 2"/>
+          <p:cNvSpPr txBox="1"/>
+          <p:nvPr/>
+        </p:nvSpPr>
+        <p:spPr>
+          <a:xfrm>
+            <a:off x="594360" y="868680"/>
+            <a:ext cx="10972800" cy="1005840"/>
+          </a:xfrm>
+          <a:prstGeom prst="rect">
+            <a:avLst/>
+          </a:prstGeom>
+          <a:noFill/>
+        </p:spPr>
+        <p:txBody>
+          <a:bodyPr wrap="square" lIns="0" rIns="0" tIns="0" bIns="0">
+            <a:spAutoFit/>
+          </a:bodyPr>
+          <a:lstStyle/>
+          <a:p>
+            <a:pPr>
+              <a:spcAft>
+                <a:spcPts val="1000"/>
+              </a:spcAft>
+              <a:defRPr sz="3400" b="1">
+                <a:solidFill>
+                  <a:srgbClr val="F5EFE3"/>
+                </a:solidFill>
+                <a:latin typeface="Aptos"/>
+              </a:defRPr>
+            </a:pPr>
+            <a:r>
+              <a:t>Handeln. Wiedergeburt. Befreiung.</a:t>
+            </a:r>
+          </a:p>
+        </p:txBody>
+      </p:sp>
+      <p:sp>
+        <p:nvSpPr>
+          <p:cNvPr id="4" name="Rectangle 3"/>
           <p:cNvSpPr/>
           <p:nvPr/>
         </p:nvSpPr>
         <p:spPr>
           <a:xfrm>
-            <a:off x="548640" y="594360"/>
-            <a:ext cx="109728" cy="5440680"/>
+            <a:off x="594360" y="6382512"/>
+            <a:ext cx="10972800" cy="18288"/>
           </a:xfrm>
           <a:prstGeom prst="rect">
             <a:avLst/>
@@ -6861,14 +9647,14 @@
       </p:sp>
       <p:sp>
         <p:nvSpPr>
-          <p:cNvPr id="3" name="TextBox 2"/>
+          <p:cNvPr id="5" name="TextBox 4"/>
           <p:cNvSpPr txBox="1"/>
           <p:nvPr/>
         </p:nvSpPr>
         <p:spPr>
           <a:xfrm>
-            <a:off x="868680" y="457200"/>
-            <a:ext cx="10607040" cy="365760"/>
+            <a:off x="594360" y="6510528"/>
+            <a:ext cx="8229600" cy="182880"/>
           </a:xfrm>
           <a:prstGeom prst="rect">
             <a:avLst/>
@@ -6876,16 +9662,16 @@
           <a:noFill/>
         </p:spPr>
         <p:txBody>
-          <a:bodyPr wrap="square">
+          <a:bodyPr wrap="square" lIns="0" rIns="0" tIns="0" bIns="0">
             <a:spAutoFit/>
           </a:bodyPr>
           <a:lstStyle/>
           <a:p>
             <a:pPr>
               <a:spcAft>
-                <a:spcPts val="1800"/>
-              </a:spcAft>
-              <a:defRPr sz="1200" b="1">
+                <a:spcPts val="1000"/>
+              </a:spcAft>
+              <a:defRPr sz="900" b="0">
                 <a:solidFill>
                   <a:srgbClr val="C89C51"/>
                 </a:solidFill>
@@ -6893,21 +9679,21 @@
               </a:defRPr>
             </a:pPr>
             <a:r>
-              <a:t>HINDUISMUS · RELIGION 13</a:t>
-            </a:r>
-          </a:p>
-        </p:txBody>
-      </p:sp>
-      <p:sp>
-        <p:nvSpPr>
-          <p:cNvPr id="4" name="TextBox 3"/>
+              <a:t>RELIGION · KLASSE 13     /     VIELFALT VERSTEHEN</a:t>
+            </a:r>
+          </a:p>
+        </p:txBody>
+      </p:sp>
+      <p:sp>
+        <p:nvSpPr>
+          <p:cNvPr id="6" name="TextBox 5"/>
           <p:cNvSpPr txBox="1"/>
           <p:nvPr/>
         </p:nvSpPr>
         <p:spPr>
           <a:xfrm>
-            <a:off x="868680" y="1005840"/>
-            <a:ext cx="10515600" cy="1143000"/>
+            <a:off x="10972800" y="6492240"/>
+            <a:ext cx="594360" cy="228600"/>
           </a:xfrm>
           <a:prstGeom prst="rect">
             <a:avLst/>
@@ -6915,38 +9701,81 @@
           <a:noFill/>
         </p:spPr>
         <p:txBody>
-          <a:bodyPr wrap="square">
+          <a:bodyPr wrap="square" lIns="0" rIns="0" tIns="0" bIns="0">
             <a:spAutoFit/>
           </a:bodyPr>
           <a:lstStyle/>
           <a:p>
             <a:pPr>
               <a:spcAft>
-                <a:spcPts val="1800"/>
-              </a:spcAft>
-              <a:defRPr sz="3400" b="1">
-                <a:solidFill>
-                  <a:srgbClr val="F5EFE3"/>
-                </a:solidFill>
-                <a:latin typeface="Aptos"/>
-              </a:defRPr>
-            </a:pPr>
-            <a:r>
-              <a:t>Karma, Samsara, Moksha</a:t>
-            </a:r>
-          </a:p>
-        </p:txBody>
-      </p:sp>
-      <p:sp>
-        <p:nvSpPr>
-          <p:cNvPr id="5" name="TextBox 4"/>
+                <a:spcPts val="1000"/>
+              </a:spcAft>
+              <a:defRPr sz="1000" b="0">
+                <a:solidFill>
+                  <a:srgbClr val="C89C51"/>
+                </a:solidFill>
+                <a:latin typeface="Aptos"/>
+              </a:defRPr>
+            </a:pPr>
+            <a:r>
+              <a:t>05</a:t>
+            </a:r>
+          </a:p>
+        </p:txBody>
+      </p:sp>
+      <p:sp>
+        <p:nvSpPr>
+          <p:cNvPr id="7" name="Oval 6"/>
+          <p:cNvSpPr/>
+          <p:nvPr/>
+        </p:nvSpPr>
+        <p:spPr>
+          <a:xfrm>
+            <a:off x="731520" y="2286000"/>
+            <a:ext cx="2743200" cy="2743200"/>
+          </a:xfrm>
+          <a:prstGeom prst="ellipse">
+            <a:avLst/>
+          </a:prstGeom>
+          <a:solidFill>
+            <a:srgbClr val="E8DFC9"/>
+          </a:solidFill>
+          <a:ln>
+            <a:noFill/>
+          </a:ln>
+        </p:spPr>
+        <p:style>
+          <a:lnRef idx="1">
+            <a:schemeClr val="accent1"/>
+          </a:lnRef>
+          <a:fillRef idx="3">
+            <a:schemeClr val="accent1"/>
+          </a:fillRef>
+          <a:effectRef idx="2">
+            <a:schemeClr val="accent1"/>
+          </a:effectRef>
+          <a:fontRef idx="minor">
+            <a:schemeClr val="lt1"/>
+          </a:fontRef>
+        </p:style>
+        <p:txBody>
+          <a:bodyPr rtlCol="0" anchor="ctr"/>
+          <a:lstStyle/>
+          <a:p>
+            <a:pPr algn="ctr"/>
+          </a:p>
+        </p:txBody>
+      </p:sp>
+      <p:sp>
+        <p:nvSpPr>
+          <p:cNvPr id="8" name="TextBox 7"/>
           <p:cNvSpPr txBox="1"/>
           <p:nvPr/>
         </p:nvSpPr>
         <p:spPr>
           <a:xfrm>
-            <a:off x="914400" y="2377440"/>
-            <a:ext cx="10241280" cy="3566160"/>
+            <a:off x="868680" y="3246120"/>
+            <a:ext cx="2468880" cy="548640"/>
           </a:xfrm>
           <a:prstGeom prst="rect">
             <a:avLst/>
@@ -6954,86 +9783,38 @@
           <a:noFill/>
         </p:spPr>
         <p:txBody>
-          <a:bodyPr wrap="square">
+          <a:bodyPr wrap="square" lIns="0" rIns="0" tIns="0" bIns="0">
             <a:spAutoFit/>
           </a:bodyPr>
           <a:lstStyle/>
           <a:p>
             <a:pPr>
               <a:spcAft>
-                <a:spcPts val="1800"/>
-              </a:spcAft>
-              <a:defRPr sz="2500" b="0">
-                <a:solidFill>
-                  <a:srgbClr val="F5EFE3"/>
-                </a:solidFill>
-                <a:latin typeface="Aptos"/>
-              </a:defRPr>
-            </a:pPr>
-            <a:r>
-              <a:t>KARMA → Handlungen und ihre Folgen</a:t>
-            </a:r>
-          </a:p>
-          <a:p>
-            <a:pPr>
-              <a:spcAft>
-                <a:spcPts val="1800"/>
-              </a:spcAft>
-              <a:defRPr sz="2500" b="0">
-                <a:solidFill>
-                  <a:srgbClr val="F5EFE3"/>
-                </a:solidFill>
-                <a:latin typeface="Aptos"/>
-              </a:defRPr>
-            </a:pPr>
-            <a:r>
-              <a:t>SAMSARA → Kreislauf von Geburt und Wiedergeburt</a:t>
-            </a:r>
-          </a:p>
-          <a:p>
-            <a:pPr>
-              <a:spcAft>
-                <a:spcPts val="1800"/>
-              </a:spcAft>
-              <a:defRPr sz="2500" b="0">
-                <a:solidFill>
-                  <a:srgbClr val="F5EFE3"/>
-                </a:solidFill>
-                <a:latin typeface="Aptos"/>
-              </a:defRPr>
-            </a:pPr>
-            <a:r>
-              <a:t>MOKSHA → Befreiung aus diesem Kreislauf</a:t>
-            </a:r>
-          </a:p>
-          <a:p>
-            <a:pPr>
-              <a:spcAft>
-                <a:spcPts val="1800"/>
-              </a:spcAft>
-              <a:defRPr sz="2500" b="0">
-                <a:solidFill>
-                  <a:srgbClr val="F5EFE3"/>
-                </a:solidFill>
-                <a:latin typeface="Aptos"/>
-              </a:defRPr>
-            </a:pPr>
-            <a:r>
-              <a:t>Atman: Selbst; Verhältnis zu Brahman ist umstritten</a:t>
-            </a:r>
-          </a:p>
-        </p:txBody>
-      </p:sp>
-      <p:sp>
-        <p:nvSpPr>
-          <p:cNvPr id="6" name="TextBox 5"/>
+                <a:spcPts val="1000"/>
+              </a:spcAft>
+              <a:defRPr sz="2200" b="1">
+                <a:solidFill>
+                  <a:srgbClr val="143D43"/>
+                </a:solidFill>
+                <a:latin typeface="Aptos"/>
+              </a:defRPr>
+            </a:pPr>
+            <a:r>
+              <a:t>Karma</a:t>
+            </a:r>
+          </a:p>
+        </p:txBody>
+      </p:sp>
+      <p:sp>
+        <p:nvSpPr>
+          <p:cNvPr id="9" name="TextBox 8"/>
           <p:cNvSpPr txBox="1"/>
           <p:nvPr/>
         </p:nvSpPr>
         <p:spPr>
           <a:xfrm>
-            <a:off x="914400" y="6446520"/>
-            <a:ext cx="9144000" cy="228600"/>
+            <a:off x="868680" y="3986783"/>
+            <a:ext cx="2468880" cy="548640"/>
           </a:xfrm>
           <a:prstGeom prst="rect">
             <a:avLst/>
@@ -7041,38 +9822,97 @@
           <a:noFill/>
         </p:spPr>
         <p:txBody>
-          <a:bodyPr wrap="square">
+          <a:bodyPr wrap="square" lIns="0" rIns="0" tIns="0" bIns="0">
             <a:spAutoFit/>
           </a:bodyPr>
           <a:lstStyle/>
           <a:p>
             <a:pPr>
               <a:spcAft>
-                <a:spcPts val="1800"/>
-              </a:spcAft>
-              <a:defRPr sz="1000" b="0">
-                <a:solidFill>
-                  <a:srgbClr val="C89C51"/>
-                </a:solidFill>
-                <a:latin typeface="Aptos"/>
-              </a:defRPr>
-            </a:pPr>
-            <a:r>
-              <a:t>Vielfalt verstehen · Begriffe verbinden · kritisch nachfragen</a:t>
-            </a:r>
-          </a:p>
-        </p:txBody>
-      </p:sp>
-      <p:sp>
-        <p:nvSpPr>
-          <p:cNvPr id="7" name="TextBox 6"/>
+                <a:spcPts val="1000"/>
+              </a:spcAft>
+              <a:defRPr sz="1300" b="0">
+                <a:solidFill>
+                  <a:srgbClr val="143D43"/>
+                </a:solidFill>
+                <a:latin typeface="Aptos"/>
+              </a:defRPr>
+            </a:pPr>
+            <a:r>
+              <a:t>Handlungen</a:t>
+            </a:r>
+          </a:p>
+          <a:p>
+            <a:pPr>
+              <a:spcAft>
+                <a:spcPts val="1000"/>
+              </a:spcAft>
+              <a:defRPr sz="1300" b="0">
+                <a:solidFill>
+                  <a:srgbClr val="143D43"/>
+                </a:solidFill>
+                <a:latin typeface="Aptos"/>
+              </a:defRPr>
+            </a:pPr>
+            <a:r>
+              <a:t>und ihre Folgen</a:t>
+            </a:r>
+          </a:p>
+        </p:txBody>
+      </p:sp>
+      <p:sp>
+        <p:nvSpPr>
+          <p:cNvPr id="10" name="Oval 9"/>
+          <p:cNvSpPr/>
+          <p:nvPr/>
+        </p:nvSpPr>
+        <p:spPr>
+          <a:xfrm>
+            <a:off x="4389120" y="2286000"/>
+            <a:ext cx="2743200" cy="2743200"/>
+          </a:xfrm>
+          <a:prstGeom prst="ellipse">
+            <a:avLst/>
+          </a:prstGeom>
+          <a:solidFill>
+            <a:srgbClr val="E8DFC9"/>
+          </a:solidFill>
+          <a:ln>
+            <a:noFill/>
+          </a:ln>
+        </p:spPr>
+        <p:style>
+          <a:lnRef idx="1">
+            <a:schemeClr val="accent1"/>
+          </a:lnRef>
+          <a:fillRef idx="3">
+            <a:schemeClr val="accent1"/>
+          </a:fillRef>
+          <a:effectRef idx="2">
+            <a:schemeClr val="accent1"/>
+          </a:effectRef>
+          <a:fontRef idx="minor">
+            <a:schemeClr val="lt1"/>
+          </a:fontRef>
+        </p:style>
+        <p:txBody>
+          <a:bodyPr rtlCol="0" anchor="ctr"/>
+          <a:lstStyle/>
+          <a:p>
+            <a:pPr algn="ctr"/>
+          </a:p>
+        </p:txBody>
+      </p:sp>
+      <p:sp>
+        <p:nvSpPr>
+          <p:cNvPr id="11" name="TextBox 10"/>
           <p:cNvSpPr txBox="1"/>
           <p:nvPr/>
         </p:nvSpPr>
         <p:spPr>
           <a:xfrm>
-            <a:off x="10972800" y="6428232"/>
-            <a:ext cx="457200" cy="274320"/>
+            <a:off x="4526280" y="3246120"/>
+            <a:ext cx="2468880" cy="548640"/>
           </a:xfrm>
           <a:prstGeom prst="rect">
             <a:avLst/>
@@ -7080,24 +9920,341 @@
           <a:noFill/>
         </p:spPr>
         <p:txBody>
-          <a:bodyPr wrap="square">
+          <a:bodyPr wrap="square" lIns="0" rIns="0" tIns="0" bIns="0">
             <a:spAutoFit/>
           </a:bodyPr>
           <a:lstStyle/>
           <a:p>
             <a:pPr>
               <a:spcAft>
-                <a:spcPts val="1800"/>
-              </a:spcAft>
-              <a:defRPr sz="1100" b="0">
-                <a:solidFill>
-                  <a:srgbClr val="C89C51"/>
-                </a:solidFill>
-                <a:latin typeface="Aptos"/>
-              </a:defRPr>
-            </a:pPr>
-            <a:r>
-              <a:t>5</a:t>
+                <a:spcPts val="1000"/>
+              </a:spcAft>
+              <a:defRPr sz="2200" b="1">
+                <a:solidFill>
+                  <a:srgbClr val="143D43"/>
+                </a:solidFill>
+                <a:latin typeface="Aptos"/>
+              </a:defRPr>
+            </a:pPr>
+            <a:r>
+              <a:t>Samsara</a:t>
+            </a:r>
+          </a:p>
+        </p:txBody>
+      </p:sp>
+      <p:sp>
+        <p:nvSpPr>
+          <p:cNvPr id="12" name="TextBox 11"/>
+          <p:cNvSpPr txBox="1"/>
+          <p:nvPr/>
+        </p:nvSpPr>
+        <p:spPr>
+          <a:xfrm>
+            <a:off x="4526280" y="3986783"/>
+            <a:ext cx="2468880" cy="548640"/>
+          </a:xfrm>
+          <a:prstGeom prst="rect">
+            <a:avLst/>
+          </a:prstGeom>
+          <a:noFill/>
+        </p:spPr>
+        <p:txBody>
+          <a:bodyPr wrap="square" lIns="0" rIns="0" tIns="0" bIns="0">
+            <a:spAutoFit/>
+          </a:bodyPr>
+          <a:lstStyle/>
+          <a:p>
+            <a:pPr>
+              <a:spcAft>
+                <a:spcPts val="1000"/>
+              </a:spcAft>
+              <a:defRPr sz="1300" b="0">
+                <a:solidFill>
+                  <a:srgbClr val="143D43"/>
+                </a:solidFill>
+                <a:latin typeface="Aptos"/>
+              </a:defRPr>
+            </a:pPr>
+            <a:r>
+              <a:t>Kreislauf von Geburt</a:t>
+            </a:r>
+          </a:p>
+          <a:p>
+            <a:pPr>
+              <a:spcAft>
+                <a:spcPts val="1000"/>
+              </a:spcAft>
+              <a:defRPr sz="1300" b="0">
+                <a:solidFill>
+                  <a:srgbClr val="143D43"/>
+                </a:solidFill>
+                <a:latin typeface="Aptos"/>
+              </a:defRPr>
+            </a:pPr>
+            <a:r>
+              <a:t>und Wiedergeburt</a:t>
+            </a:r>
+          </a:p>
+        </p:txBody>
+      </p:sp>
+      <p:sp>
+        <p:nvSpPr>
+          <p:cNvPr id="13" name="Oval 12"/>
+          <p:cNvSpPr/>
+          <p:nvPr/>
+        </p:nvSpPr>
+        <p:spPr>
+          <a:xfrm>
+            <a:off x="8046720" y="2286000"/>
+            <a:ext cx="2743200" cy="2743200"/>
+          </a:xfrm>
+          <a:prstGeom prst="ellipse">
+            <a:avLst/>
+          </a:prstGeom>
+          <a:solidFill>
+            <a:srgbClr val="E8DFC9"/>
+          </a:solidFill>
+          <a:ln>
+            <a:noFill/>
+          </a:ln>
+        </p:spPr>
+        <p:style>
+          <a:lnRef idx="1">
+            <a:schemeClr val="accent1"/>
+          </a:lnRef>
+          <a:fillRef idx="3">
+            <a:schemeClr val="accent1"/>
+          </a:fillRef>
+          <a:effectRef idx="2">
+            <a:schemeClr val="accent1"/>
+          </a:effectRef>
+          <a:fontRef idx="minor">
+            <a:schemeClr val="lt1"/>
+          </a:fontRef>
+        </p:style>
+        <p:txBody>
+          <a:bodyPr rtlCol="0" anchor="ctr"/>
+          <a:lstStyle/>
+          <a:p>
+            <a:pPr algn="ctr"/>
+          </a:p>
+        </p:txBody>
+      </p:sp>
+      <p:sp>
+        <p:nvSpPr>
+          <p:cNvPr id="14" name="TextBox 13"/>
+          <p:cNvSpPr txBox="1"/>
+          <p:nvPr/>
+        </p:nvSpPr>
+        <p:spPr>
+          <a:xfrm>
+            <a:off x="8183880" y="3246120"/>
+            <a:ext cx="2468880" cy="548640"/>
+          </a:xfrm>
+          <a:prstGeom prst="rect">
+            <a:avLst/>
+          </a:prstGeom>
+          <a:noFill/>
+        </p:spPr>
+        <p:txBody>
+          <a:bodyPr wrap="square" lIns="0" rIns="0" tIns="0" bIns="0">
+            <a:spAutoFit/>
+          </a:bodyPr>
+          <a:lstStyle/>
+          <a:p>
+            <a:pPr>
+              <a:spcAft>
+                <a:spcPts val="1000"/>
+              </a:spcAft>
+              <a:defRPr sz="2200" b="1">
+                <a:solidFill>
+                  <a:srgbClr val="143D43"/>
+                </a:solidFill>
+                <a:latin typeface="Aptos"/>
+              </a:defRPr>
+            </a:pPr>
+            <a:r>
+              <a:t>Moksha</a:t>
+            </a:r>
+          </a:p>
+        </p:txBody>
+      </p:sp>
+      <p:sp>
+        <p:nvSpPr>
+          <p:cNvPr id="15" name="TextBox 14"/>
+          <p:cNvSpPr txBox="1"/>
+          <p:nvPr/>
+        </p:nvSpPr>
+        <p:spPr>
+          <a:xfrm>
+            <a:off x="8183880" y="3986783"/>
+            <a:ext cx="2468880" cy="548640"/>
+          </a:xfrm>
+          <a:prstGeom prst="rect">
+            <a:avLst/>
+          </a:prstGeom>
+          <a:noFill/>
+        </p:spPr>
+        <p:txBody>
+          <a:bodyPr wrap="square" lIns="0" rIns="0" tIns="0" bIns="0">
+            <a:spAutoFit/>
+          </a:bodyPr>
+          <a:lstStyle/>
+          <a:p>
+            <a:pPr>
+              <a:spcAft>
+                <a:spcPts val="1000"/>
+              </a:spcAft>
+              <a:defRPr sz="1300" b="0">
+                <a:solidFill>
+                  <a:srgbClr val="143D43"/>
+                </a:solidFill>
+                <a:latin typeface="Aptos"/>
+              </a:defRPr>
+            </a:pPr>
+            <a:r>
+              <a:t>Befreiung</a:t>
+            </a:r>
+          </a:p>
+          <a:p>
+            <a:pPr>
+              <a:spcAft>
+                <a:spcPts val="1000"/>
+              </a:spcAft>
+              <a:defRPr sz="1300" b="0">
+                <a:solidFill>
+                  <a:srgbClr val="143D43"/>
+                </a:solidFill>
+                <a:latin typeface="Aptos"/>
+              </a:defRPr>
+            </a:pPr>
+            <a:r>
+              <a:t>aus dem Kreislauf</a:t>
+            </a:r>
+          </a:p>
+        </p:txBody>
+      </p:sp>
+      <p:sp>
+        <p:nvSpPr>
+          <p:cNvPr id="16" name="Right Arrow 15"/>
+          <p:cNvSpPr/>
+          <p:nvPr/>
+        </p:nvSpPr>
+        <p:spPr>
+          <a:xfrm>
+            <a:off x="3657600" y="3200400"/>
+            <a:ext cx="594360" cy="411480"/>
+          </a:xfrm>
+          <a:prstGeom prst="rightArrow">
+            <a:avLst/>
+          </a:prstGeom>
+          <a:solidFill>
+            <a:srgbClr val="C89C51"/>
+          </a:solidFill>
+          <a:ln>
+            <a:noFill/>
+          </a:ln>
+        </p:spPr>
+        <p:style>
+          <a:lnRef idx="1">
+            <a:schemeClr val="accent1"/>
+          </a:lnRef>
+          <a:fillRef idx="3">
+            <a:schemeClr val="accent1"/>
+          </a:fillRef>
+          <a:effectRef idx="2">
+            <a:schemeClr val="accent1"/>
+          </a:effectRef>
+          <a:fontRef idx="minor">
+            <a:schemeClr val="lt1"/>
+          </a:fontRef>
+        </p:style>
+        <p:txBody>
+          <a:bodyPr rtlCol="0" anchor="ctr"/>
+          <a:lstStyle/>
+          <a:p>
+            <a:pPr algn="ctr"/>
+          </a:p>
+        </p:txBody>
+      </p:sp>
+      <p:sp>
+        <p:nvSpPr>
+          <p:cNvPr id="17" name="Right Arrow 16"/>
+          <p:cNvSpPr/>
+          <p:nvPr/>
+        </p:nvSpPr>
+        <p:spPr>
+          <a:xfrm>
+            <a:off x="7315200" y="3200400"/>
+            <a:ext cx="594360" cy="411480"/>
+          </a:xfrm>
+          <a:prstGeom prst="rightArrow">
+            <a:avLst/>
+          </a:prstGeom>
+          <a:solidFill>
+            <a:srgbClr val="C89C51"/>
+          </a:solidFill>
+          <a:ln>
+            <a:noFill/>
+          </a:ln>
+        </p:spPr>
+        <p:style>
+          <a:lnRef idx="1">
+            <a:schemeClr val="accent1"/>
+          </a:lnRef>
+          <a:fillRef idx="3">
+            <a:schemeClr val="accent1"/>
+          </a:fillRef>
+          <a:effectRef idx="2">
+            <a:schemeClr val="accent1"/>
+          </a:effectRef>
+          <a:fontRef idx="minor">
+            <a:schemeClr val="lt1"/>
+          </a:fontRef>
+        </p:style>
+        <p:txBody>
+          <a:bodyPr rtlCol="0" anchor="ctr"/>
+          <a:lstStyle/>
+          <a:p>
+            <a:pPr algn="ctr"/>
+          </a:p>
+        </p:txBody>
+      </p:sp>
+      <p:sp>
+        <p:nvSpPr>
+          <p:cNvPr id="18" name="TextBox 17"/>
+          <p:cNvSpPr txBox="1"/>
+          <p:nvPr/>
+        </p:nvSpPr>
+        <p:spPr>
+          <a:xfrm>
+            <a:off x="777240" y="5532120"/>
+            <a:ext cx="10789920" cy="594360"/>
+          </a:xfrm>
+          <a:prstGeom prst="rect">
+            <a:avLst/>
+          </a:prstGeom>
+          <a:noFill/>
+        </p:spPr>
+        <p:txBody>
+          <a:bodyPr wrap="square" lIns="0" rIns="0" tIns="0" bIns="0">
+            <a:spAutoFit/>
+          </a:bodyPr>
+          <a:lstStyle/>
+          <a:p>
+            <a:pPr>
+              <a:spcAft>
+                <a:spcPts val="1000"/>
+              </a:spcAft>
+              <a:defRPr sz="1900" b="0">
+                <a:solidFill>
+                  <a:srgbClr val="F5EFE3"/>
+                </a:solidFill>
+                <a:latin typeface="Aptos"/>
+              </a:defRPr>
+            </a:pPr>
+            <a:r>
+              <a:t>Atman = Selbst · Das Verhältnis zu Brahman wird unterschiedlich verstanden.</a:t>
             </a:r>
           </a:p>
         </p:txBody>
@@ -7130,14 +10287,92 @@
       <p:grpSpPr/>
       <p:sp>
         <p:nvSpPr>
-          <p:cNvPr id="2" name="Rectangle 1"/>
+          <p:cNvPr id="2" name="TextBox 1"/>
+          <p:cNvSpPr txBox="1"/>
+          <p:nvPr/>
+        </p:nvSpPr>
+        <p:spPr>
+          <a:xfrm>
+            <a:off x="594360" y="365760"/>
+            <a:ext cx="10058400" cy="274320"/>
+          </a:xfrm>
+          <a:prstGeom prst="rect">
+            <a:avLst/>
+          </a:prstGeom>
+          <a:noFill/>
+        </p:spPr>
+        <p:txBody>
+          <a:bodyPr wrap="square" lIns="0" rIns="0" tIns="0" bIns="0">
+            <a:spAutoFit/>
+          </a:bodyPr>
+          <a:lstStyle/>
+          <a:p>
+            <a:pPr>
+              <a:spcAft>
+                <a:spcPts val="1000"/>
+              </a:spcAft>
+              <a:defRPr sz="1100" b="1">
+                <a:solidFill>
+                  <a:srgbClr val="C89C51"/>
+                </a:solidFill>
+                <a:latin typeface="Aptos"/>
+              </a:defRPr>
+            </a:pPr>
+            <a:r>
+              <a:t>05 / ETHIK</a:t>
+            </a:r>
+          </a:p>
+        </p:txBody>
+      </p:sp>
+      <p:sp>
+        <p:nvSpPr>
+          <p:cNvPr id="3" name="TextBox 2"/>
+          <p:cNvSpPr txBox="1"/>
+          <p:nvPr/>
+        </p:nvSpPr>
+        <p:spPr>
+          <a:xfrm>
+            <a:off x="594360" y="868680"/>
+            <a:ext cx="10972800" cy="1005840"/>
+          </a:xfrm>
+          <a:prstGeom prst="rect">
+            <a:avLst/>
+          </a:prstGeom>
+          <a:noFill/>
+        </p:spPr>
+        <p:txBody>
+          <a:bodyPr wrap="square" lIns="0" rIns="0" tIns="0" bIns="0">
+            <a:spAutoFit/>
+          </a:bodyPr>
+          <a:lstStyle/>
+          <a:p>
+            <a:pPr>
+              <a:spcAft>
+                <a:spcPts val="1000"/>
+              </a:spcAft>
+              <a:defRPr sz="3400" b="1">
+                <a:solidFill>
+                  <a:srgbClr val="143D43"/>
+                </a:solidFill>
+                <a:latin typeface="Aptos"/>
+              </a:defRPr>
+            </a:pPr>
+            <a:r>
+              <a:t>Dharma: Wie soll ich leben?</a:t>
+            </a:r>
+          </a:p>
+        </p:txBody>
+      </p:sp>
+      <p:sp>
+        <p:nvSpPr>
+          <p:cNvPr id="4" name="Rectangle 3"/>
           <p:cNvSpPr/>
           <p:nvPr/>
         </p:nvSpPr>
         <p:spPr>
           <a:xfrm>
-            <a:off x="548640" y="594360"/>
-            <a:ext cx="109728" cy="5440680"/>
+            <a:off x="594360" y="6382512"/>
+            <a:ext cx="10972800" cy="18288"/>
           </a:xfrm>
           <a:prstGeom prst="rect">
             <a:avLst/>
@@ -7173,14 +10408,14 @@
       </p:sp>
       <p:sp>
         <p:nvSpPr>
-          <p:cNvPr id="3" name="TextBox 2"/>
+          <p:cNvPr id="5" name="TextBox 4"/>
           <p:cNvSpPr txBox="1"/>
           <p:nvPr/>
         </p:nvSpPr>
         <p:spPr>
           <a:xfrm>
-            <a:off x="868680" y="457200"/>
-            <a:ext cx="10607040" cy="365760"/>
+            <a:off x="594360" y="6510528"/>
+            <a:ext cx="8229600" cy="182880"/>
           </a:xfrm>
           <a:prstGeom prst="rect">
             <a:avLst/>
@@ -7188,16 +10423,16 @@
           <a:noFill/>
         </p:spPr>
         <p:txBody>
-          <a:bodyPr wrap="square">
+          <a:bodyPr wrap="square" lIns="0" rIns="0" tIns="0" bIns="0">
             <a:spAutoFit/>
           </a:bodyPr>
           <a:lstStyle/>
           <a:p>
             <a:pPr>
               <a:spcAft>
-                <a:spcPts val="1800"/>
-              </a:spcAft>
-              <a:defRPr sz="1200" b="1">
+                <a:spcPts val="1000"/>
+              </a:spcAft>
+              <a:defRPr sz="900" b="0">
                 <a:solidFill>
                   <a:srgbClr val="C89C51"/>
                 </a:solidFill>
@@ -7205,21 +10440,21 @@
               </a:defRPr>
             </a:pPr>
             <a:r>
-              <a:t>HINDUISMUS · RELIGION 13</a:t>
-            </a:r>
-          </a:p>
-        </p:txBody>
-      </p:sp>
-      <p:sp>
-        <p:nvSpPr>
-          <p:cNvPr id="4" name="TextBox 3"/>
+              <a:t>RELIGION · KLASSE 13     /     VIELFALT VERSTEHEN</a:t>
+            </a:r>
+          </a:p>
+        </p:txBody>
+      </p:sp>
+      <p:sp>
+        <p:nvSpPr>
+          <p:cNvPr id="6" name="TextBox 5"/>
           <p:cNvSpPr txBox="1"/>
           <p:nvPr/>
         </p:nvSpPr>
         <p:spPr>
           <a:xfrm>
-            <a:off x="868680" y="1005840"/>
-            <a:ext cx="10515600" cy="1143000"/>
+            <a:off x="10972800" y="6492240"/>
+            <a:ext cx="594360" cy="228600"/>
           </a:xfrm>
           <a:prstGeom prst="rect">
             <a:avLst/>
@@ -7227,38 +10462,124 @@
           <a:noFill/>
         </p:spPr>
         <p:txBody>
-          <a:bodyPr wrap="square">
+          <a:bodyPr wrap="square" lIns="0" rIns="0" tIns="0" bIns="0">
             <a:spAutoFit/>
           </a:bodyPr>
           <a:lstStyle/>
           <a:p>
             <a:pPr>
               <a:spcAft>
-                <a:spcPts val="1800"/>
-              </a:spcAft>
-              <a:defRPr sz="3400" b="1">
-                <a:solidFill>
-                  <a:srgbClr val="143D43"/>
-                </a:solidFill>
-                <a:latin typeface="Aptos"/>
-              </a:defRPr>
-            </a:pPr>
-            <a:r>
-              <a:t>Dharma: Wie soll ich leben?</a:t>
-            </a:r>
-          </a:p>
-        </p:txBody>
-      </p:sp>
-      <p:sp>
-        <p:nvSpPr>
-          <p:cNvPr id="5" name="TextBox 4"/>
+                <a:spcPts val="1000"/>
+              </a:spcAft>
+              <a:defRPr sz="1000" b="0">
+                <a:solidFill>
+                  <a:srgbClr val="C89C51"/>
+                </a:solidFill>
+                <a:latin typeface="Aptos"/>
+              </a:defRPr>
+            </a:pPr>
+            <a:r>
+              <a:t>06</a:t>
+            </a:r>
+          </a:p>
+        </p:txBody>
+      </p:sp>
+      <p:sp>
+        <p:nvSpPr>
+          <p:cNvPr id="7" name="Rounded Rectangle 6"/>
+          <p:cNvSpPr/>
+          <p:nvPr/>
+        </p:nvSpPr>
+        <p:spPr>
+          <a:xfrm>
+            <a:off x="640080" y="2103120"/>
+            <a:ext cx="5943600" cy="3474720"/>
+          </a:xfrm>
+          <a:prstGeom prst="roundRect">
+            <a:avLst/>
+          </a:prstGeom>
+          <a:solidFill>
+            <a:srgbClr val="FFFFFF"/>
+          </a:solidFill>
+          <a:ln>
+            <a:noFill/>
+          </a:ln>
+        </p:spPr>
+        <p:style>
+          <a:lnRef idx="1">
+            <a:schemeClr val="accent1"/>
+          </a:lnRef>
+          <a:fillRef idx="3">
+            <a:schemeClr val="accent1"/>
+          </a:fillRef>
+          <a:effectRef idx="2">
+            <a:schemeClr val="accent1"/>
+          </a:effectRef>
+          <a:fontRef idx="minor">
+            <a:schemeClr val="lt1"/>
+          </a:fontRef>
+        </p:style>
+        <p:txBody>
+          <a:bodyPr rtlCol="0" anchor="ctr"/>
+          <a:lstStyle/>
+          <a:p>
+            <a:pPr algn="ctr"/>
+          </a:p>
+        </p:txBody>
+      </p:sp>
+      <p:sp>
+        <p:nvSpPr>
+          <p:cNvPr id="8" name="Rectangle 7"/>
+          <p:cNvSpPr/>
+          <p:nvPr/>
+        </p:nvSpPr>
+        <p:spPr>
+          <a:xfrm>
+            <a:off x="822959" y="2304288"/>
+            <a:ext cx="54864" cy="384048"/>
+          </a:xfrm>
+          <a:prstGeom prst="rect">
+            <a:avLst/>
+          </a:prstGeom>
+          <a:solidFill>
+            <a:srgbClr val="C89C51"/>
+          </a:solidFill>
+          <a:ln>
+            <a:noFill/>
+          </a:ln>
+        </p:spPr>
+        <p:style>
+          <a:lnRef idx="1">
+            <a:schemeClr val="accent1"/>
+          </a:lnRef>
+          <a:fillRef idx="3">
+            <a:schemeClr val="accent1"/>
+          </a:fillRef>
+          <a:effectRef idx="2">
+            <a:schemeClr val="accent1"/>
+          </a:effectRef>
+          <a:fontRef idx="minor">
+            <a:schemeClr val="lt1"/>
+          </a:fontRef>
+        </p:style>
+        <p:txBody>
+          <a:bodyPr rtlCol="0" anchor="ctr"/>
+          <a:lstStyle/>
+          <a:p>
+            <a:pPr algn="ctr"/>
+          </a:p>
+        </p:txBody>
+      </p:sp>
+      <p:sp>
+        <p:nvSpPr>
+          <p:cNvPr id="9" name="TextBox 8"/>
           <p:cNvSpPr txBox="1"/>
           <p:nvPr/>
         </p:nvSpPr>
         <p:spPr>
           <a:xfrm>
-            <a:off x="914400" y="2377440"/>
-            <a:ext cx="10241280" cy="3566160"/>
+            <a:off x="1005840" y="2286000"/>
+            <a:ext cx="5394960" cy="548640"/>
           </a:xfrm>
           <a:prstGeom prst="rect">
             <a:avLst/>
@@ -7266,86 +10587,38 @@
           <a:noFill/>
         </p:spPr>
         <p:txBody>
-          <a:bodyPr wrap="square">
+          <a:bodyPr wrap="square" lIns="0" rIns="0" tIns="0" bIns="0">
             <a:spAutoFit/>
           </a:bodyPr>
           <a:lstStyle/>
           <a:p>
             <a:pPr>
               <a:spcAft>
-                <a:spcPts val="1800"/>
-              </a:spcAft>
-              <a:defRPr sz="2500" b="0">
-                <a:solidFill>
-                  <a:srgbClr val="173238"/>
-                </a:solidFill>
-                <a:latin typeface="Aptos"/>
-              </a:defRPr>
-            </a:pPr>
-            <a:r>
-              <a:t>Dharma: Ordnung, Pflicht und angemessenes Handeln</a:t>
-            </a:r>
-          </a:p>
-          <a:p>
-            <a:pPr>
-              <a:spcAft>
-                <a:spcPts val="1800"/>
-              </a:spcAft>
-              <a:defRPr sz="2500" b="0">
-                <a:solidFill>
-                  <a:srgbClr val="173238"/>
-                </a:solidFill>
-                <a:latin typeface="Aptos"/>
-              </a:defRPr>
-            </a:pPr>
-            <a:r>
-              <a:t>Verantwortung hängt auch von Lebenssituation ab</a:t>
-            </a:r>
-          </a:p>
-          <a:p>
-            <a:pPr>
-              <a:spcAft>
-                <a:spcPts val="1800"/>
-              </a:spcAft>
-              <a:defRPr sz="2500" b="0">
-                <a:solidFill>
-                  <a:srgbClr val="173238"/>
-                </a:solidFill>
-                <a:latin typeface="Aptos"/>
-              </a:defRPr>
-            </a:pPr>
-            <a:r>
-              <a:t>Ahimsa: Nichtverletzen als wichtiges Ideal</a:t>
-            </a:r>
-          </a:p>
-          <a:p>
-            <a:pPr>
-              <a:spcAft>
-                <a:spcPts val="1800"/>
-              </a:spcAft>
-              <a:defRPr sz="2500" b="0">
-                <a:solidFill>
-                  <a:srgbClr val="173238"/>
-                </a:solidFill>
-                <a:latin typeface="Aptos"/>
-              </a:defRPr>
-            </a:pPr>
-            <a:r>
-              <a:t>Spannungsfeld: Tradition, Gewissen und Gerechtigkeit</a:t>
-            </a:r>
-          </a:p>
-        </p:txBody>
-      </p:sp>
-      <p:sp>
-        <p:nvSpPr>
-          <p:cNvPr id="6" name="TextBox 5"/>
+                <a:spcPts val="1000"/>
+              </a:spcAft>
+              <a:defRPr sz="2300" b="1">
+                <a:solidFill>
+                  <a:srgbClr val="143D43"/>
+                </a:solidFill>
+                <a:latin typeface="Aptos"/>
+              </a:defRPr>
+            </a:pPr>
+            <a:r>
+              <a:t>Verantwortlich handeln</a:t>
+            </a:r>
+          </a:p>
+        </p:txBody>
+      </p:sp>
+      <p:sp>
+        <p:nvSpPr>
+          <p:cNvPr id="10" name="TextBox 9"/>
           <p:cNvSpPr txBox="1"/>
           <p:nvPr/>
         </p:nvSpPr>
         <p:spPr>
           <a:xfrm>
-            <a:off x="914400" y="6446520"/>
-            <a:ext cx="9144000" cy="228600"/>
+            <a:off x="914400" y="2971800"/>
+            <a:ext cx="5394960" cy="2514600"/>
           </a:xfrm>
           <a:prstGeom prst="rect">
             <a:avLst/>
@@ -7353,38 +10626,113 @@
           <a:noFill/>
         </p:spPr>
         <p:txBody>
-          <a:bodyPr wrap="square">
+          <a:bodyPr wrap="square" lIns="0" rIns="0" tIns="0" bIns="0">
             <a:spAutoFit/>
           </a:bodyPr>
           <a:lstStyle/>
           <a:p>
             <a:pPr>
               <a:spcAft>
-                <a:spcPts val="1800"/>
-              </a:spcAft>
-              <a:defRPr sz="1000" b="0">
-                <a:solidFill>
-                  <a:srgbClr val="C89C51"/>
-                </a:solidFill>
-                <a:latin typeface="Aptos"/>
-              </a:defRPr>
-            </a:pPr>
-            <a:r>
-              <a:t>Vielfalt verstehen · Begriffe verbinden · kritisch nachfragen</a:t>
-            </a:r>
-          </a:p>
-        </p:txBody>
-      </p:sp>
-      <p:sp>
-        <p:nvSpPr>
-          <p:cNvPr id="7" name="TextBox 6"/>
+                <a:spcPts val="1000"/>
+              </a:spcAft>
+              <a:defRPr sz="2000" b="0">
+                <a:solidFill>
+                  <a:srgbClr val="173238"/>
+                </a:solidFill>
+                <a:latin typeface="Aptos"/>
+              </a:defRPr>
+            </a:pPr>
+            <a:r>
+              <a:t>Dharma: Ordnung, Pflicht, Lebensführung</a:t>
+            </a:r>
+          </a:p>
+          <a:p>
+            <a:pPr>
+              <a:spcAft>
+                <a:spcPts val="1000"/>
+              </a:spcAft>
+              <a:defRPr sz="2000" b="0">
+                <a:solidFill>
+                  <a:srgbClr val="173238"/>
+                </a:solidFill>
+                <a:latin typeface="Aptos"/>
+              </a:defRPr>
+            </a:pPr>
+            <a:r>
+              <a:t>Ahimsa: Nichtverletzen als wichtiges Ideal</a:t>
+            </a:r>
+          </a:p>
+          <a:p>
+            <a:pPr>
+              <a:spcAft>
+                <a:spcPts val="1000"/>
+              </a:spcAft>
+              <a:defRPr sz="2000" b="0">
+                <a:solidFill>
+                  <a:srgbClr val="173238"/>
+                </a:solidFill>
+                <a:latin typeface="Aptos"/>
+              </a:defRPr>
+            </a:pPr>
+            <a:r>
+              <a:t>Pflichten können in Konflikt geraten.</a:t>
+            </a:r>
+          </a:p>
+        </p:txBody>
+      </p:sp>
+      <p:sp>
+        <p:nvSpPr>
+          <p:cNvPr id="11" name="Rounded Rectangle 10"/>
+          <p:cNvSpPr/>
+          <p:nvPr/>
+        </p:nvSpPr>
+        <p:spPr>
+          <a:xfrm>
+            <a:off x="6949440" y="2103120"/>
+            <a:ext cx="4572000" cy="3474720"/>
+          </a:xfrm>
+          <a:prstGeom prst="roundRect">
+            <a:avLst/>
+          </a:prstGeom>
+          <a:solidFill>
+            <a:srgbClr val="143D43"/>
+          </a:solidFill>
+          <a:ln>
+            <a:noFill/>
+          </a:ln>
+        </p:spPr>
+        <p:style>
+          <a:lnRef idx="1">
+            <a:schemeClr val="accent1"/>
+          </a:lnRef>
+          <a:fillRef idx="3">
+            <a:schemeClr val="accent1"/>
+          </a:fillRef>
+          <a:effectRef idx="2">
+            <a:schemeClr val="accent1"/>
+          </a:effectRef>
+          <a:fontRef idx="minor">
+            <a:schemeClr val="lt1"/>
+          </a:fontRef>
+        </p:style>
+        <p:txBody>
+          <a:bodyPr rtlCol="0" anchor="ctr"/>
+          <a:lstStyle/>
+          <a:p>
+            <a:pPr algn="ctr"/>
+          </a:p>
+        </p:txBody>
+      </p:sp>
+      <p:sp>
+        <p:nvSpPr>
+          <p:cNvPr id="12" name="TextBox 11"/>
           <p:cNvSpPr txBox="1"/>
           <p:nvPr/>
         </p:nvSpPr>
         <p:spPr>
           <a:xfrm>
-            <a:off x="10972800" y="6428232"/>
-            <a:ext cx="457200" cy="274320"/>
+            <a:off x="7315200" y="2560320"/>
+            <a:ext cx="3840480" cy="2651760"/>
           </a:xfrm>
           <a:prstGeom prst="rect">
             <a:avLst/>
@@ -7392,24 +10740,72 @@
           <a:noFill/>
         </p:spPr>
         <p:txBody>
-          <a:bodyPr wrap="square">
+          <a:bodyPr wrap="square" lIns="0" rIns="0" tIns="0" bIns="0">
             <a:spAutoFit/>
           </a:bodyPr>
           <a:lstStyle/>
           <a:p>
             <a:pPr>
               <a:spcAft>
-                <a:spcPts val="1800"/>
-              </a:spcAft>
-              <a:defRPr sz="1100" b="0">
-                <a:solidFill>
-                  <a:srgbClr val="C89C51"/>
-                </a:solidFill>
-                <a:latin typeface="Aptos"/>
-              </a:defRPr>
-            </a:pPr>
-            <a:r>
-              <a:t>6</a:t>
+                <a:spcPts val="1000"/>
+              </a:spcAft>
+              <a:defRPr sz="2800" b="1">
+                <a:solidFill>
+                  <a:srgbClr val="F5EFE3"/>
+                </a:solidFill>
+                <a:latin typeface="Aptos"/>
+              </a:defRPr>
+            </a:pPr>
+            <a:r>
+              <a:t>Was tun, wenn</a:t>
+            </a:r>
+          </a:p>
+          <a:p>
+            <a:pPr>
+              <a:spcAft>
+                <a:spcPts val="1000"/>
+              </a:spcAft>
+              <a:defRPr sz="2800" b="1">
+                <a:solidFill>
+                  <a:srgbClr val="F5EFE3"/>
+                </a:solidFill>
+                <a:latin typeface="Aptos"/>
+              </a:defRPr>
+            </a:pPr>
+            <a:r>
+              <a:t>Tradition und</a:t>
+            </a:r>
+          </a:p>
+          <a:p>
+            <a:pPr>
+              <a:spcAft>
+                <a:spcPts val="1000"/>
+              </a:spcAft>
+              <a:defRPr sz="2800" b="1">
+                <a:solidFill>
+                  <a:srgbClr val="F5EFE3"/>
+                </a:solidFill>
+                <a:latin typeface="Aptos"/>
+              </a:defRPr>
+            </a:pPr>
+            <a:r>
+              <a:t>eigenes Gewissen</a:t>
+            </a:r>
+          </a:p>
+          <a:p>
+            <a:pPr>
+              <a:spcAft>
+                <a:spcPts val="1000"/>
+              </a:spcAft>
+              <a:defRPr sz="2800" b="1">
+                <a:solidFill>
+                  <a:srgbClr val="F5EFE3"/>
+                </a:solidFill>
+                <a:latin typeface="Aptos"/>
+              </a:defRPr>
+            </a:pPr>
+            <a:r>
+              <a:t>sich widersprechen?</a:t>
             </a:r>
           </a:p>
         </p:txBody>
@@ -7442,14 +10838,92 @@
       <p:grpSpPr/>
       <p:sp>
         <p:nvSpPr>
-          <p:cNvPr id="2" name="Rectangle 1"/>
+          <p:cNvPr id="2" name="TextBox 1"/>
+          <p:cNvSpPr txBox="1"/>
+          <p:nvPr/>
+        </p:nvSpPr>
+        <p:spPr>
+          <a:xfrm>
+            <a:off x="594360" y="365760"/>
+            <a:ext cx="10058400" cy="274320"/>
+          </a:xfrm>
+          <a:prstGeom prst="rect">
+            <a:avLst/>
+          </a:prstGeom>
+          <a:noFill/>
+        </p:spPr>
+        <p:txBody>
+          <a:bodyPr wrap="square" lIns="0" rIns="0" tIns="0" bIns="0">
+            <a:spAutoFit/>
+          </a:bodyPr>
+          <a:lstStyle/>
+          <a:p>
+            <a:pPr>
+              <a:spcAft>
+                <a:spcPts val="1000"/>
+              </a:spcAft>
+              <a:defRPr sz="1100" b="1">
+                <a:solidFill>
+                  <a:srgbClr val="C89C51"/>
+                </a:solidFill>
+                <a:latin typeface="Aptos"/>
+              </a:defRPr>
+            </a:pPr>
+            <a:r>
+              <a:t>06 / RELIGIÖSE WEGE</a:t>
+            </a:r>
+          </a:p>
+        </p:txBody>
+      </p:sp>
+      <p:sp>
+        <p:nvSpPr>
+          <p:cNvPr id="3" name="TextBox 2"/>
+          <p:cNvSpPr txBox="1"/>
+          <p:nvPr/>
+        </p:nvSpPr>
+        <p:spPr>
+          <a:xfrm>
+            <a:off x="594360" y="868680"/>
+            <a:ext cx="10972800" cy="1005840"/>
+          </a:xfrm>
+          <a:prstGeom prst="rect">
+            <a:avLst/>
+          </a:prstGeom>
+          <a:noFill/>
+        </p:spPr>
+        <p:txBody>
+          <a:bodyPr wrap="square" lIns="0" rIns="0" tIns="0" bIns="0">
+            <a:spAutoFit/>
+          </a:bodyPr>
+          <a:lstStyle/>
+          <a:p>
+            <a:pPr>
+              <a:spcAft>
+                <a:spcPts val="1000"/>
+              </a:spcAft>
+              <a:defRPr sz="3400" b="1">
+                <a:solidFill>
+                  <a:srgbClr val="143D43"/>
+                </a:solidFill>
+                <a:latin typeface="Aptos"/>
+              </a:defRPr>
+            </a:pPr>
+            <a:r>
+              <a:t>Mehrere Wege zur Befreiung</a:t>
+            </a:r>
+          </a:p>
+        </p:txBody>
+      </p:sp>
+      <p:sp>
+        <p:nvSpPr>
+          <p:cNvPr id="4" name="Rectangle 3"/>
           <p:cNvSpPr/>
           <p:nvPr/>
         </p:nvSpPr>
         <p:spPr>
           <a:xfrm>
-            <a:off x="548640" y="594360"/>
-            <a:ext cx="109728" cy="5440680"/>
+            <a:off x="594360" y="6382512"/>
+            <a:ext cx="10972800" cy="18288"/>
           </a:xfrm>
           <a:prstGeom prst="rect">
             <a:avLst/>
@@ -7485,14 +10959,14 @@
       </p:sp>
       <p:sp>
         <p:nvSpPr>
-          <p:cNvPr id="3" name="TextBox 2"/>
+          <p:cNvPr id="5" name="TextBox 4"/>
           <p:cNvSpPr txBox="1"/>
           <p:nvPr/>
         </p:nvSpPr>
         <p:spPr>
           <a:xfrm>
-            <a:off x="868680" y="457200"/>
-            <a:ext cx="10607040" cy="365760"/>
+            <a:off x="594360" y="6510528"/>
+            <a:ext cx="8229600" cy="182880"/>
           </a:xfrm>
           <a:prstGeom prst="rect">
             <a:avLst/>
@@ -7500,16 +10974,16 @@
           <a:noFill/>
         </p:spPr>
         <p:txBody>
-          <a:bodyPr wrap="square">
+          <a:bodyPr wrap="square" lIns="0" rIns="0" tIns="0" bIns="0">
             <a:spAutoFit/>
           </a:bodyPr>
           <a:lstStyle/>
           <a:p>
             <a:pPr>
               <a:spcAft>
-                <a:spcPts val="1800"/>
-              </a:spcAft>
-              <a:defRPr sz="1200" b="1">
+                <a:spcPts val="1000"/>
+              </a:spcAft>
+              <a:defRPr sz="900" b="0">
                 <a:solidFill>
                   <a:srgbClr val="C89C51"/>
                 </a:solidFill>
@@ -7517,21 +10991,21 @@
               </a:defRPr>
             </a:pPr>
             <a:r>
-              <a:t>HINDUISMUS · RELIGION 13</a:t>
-            </a:r>
-          </a:p>
-        </p:txBody>
-      </p:sp>
-      <p:sp>
-        <p:nvSpPr>
-          <p:cNvPr id="4" name="TextBox 3"/>
+              <a:t>RELIGION · KLASSE 13     /     VIELFALT VERSTEHEN</a:t>
+            </a:r>
+          </a:p>
+        </p:txBody>
+      </p:sp>
+      <p:sp>
+        <p:nvSpPr>
+          <p:cNvPr id="6" name="TextBox 5"/>
           <p:cNvSpPr txBox="1"/>
           <p:nvPr/>
         </p:nvSpPr>
         <p:spPr>
           <a:xfrm>
-            <a:off x="868680" y="1005840"/>
-            <a:ext cx="10515600" cy="1143000"/>
+            <a:off x="10972800" y="6492240"/>
+            <a:ext cx="594360" cy="228600"/>
           </a:xfrm>
           <a:prstGeom prst="rect">
             <a:avLst/>
@@ -7539,38 +11013,124 @@
           <a:noFill/>
         </p:spPr>
         <p:txBody>
-          <a:bodyPr wrap="square">
+          <a:bodyPr wrap="square" lIns="0" rIns="0" tIns="0" bIns="0">
             <a:spAutoFit/>
           </a:bodyPr>
           <a:lstStyle/>
           <a:p>
             <a:pPr>
               <a:spcAft>
-                <a:spcPts val="1800"/>
-              </a:spcAft>
-              <a:defRPr sz="3400" b="1">
-                <a:solidFill>
-                  <a:srgbClr val="143D43"/>
-                </a:solidFill>
-                <a:latin typeface="Aptos"/>
-              </a:defRPr>
-            </a:pPr>
-            <a:r>
-              <a:t>Mehrere Wege zur Befreiung</a:t>
-            </a:r>
-          </a:p>
-        </p:txBody>
-      </p:sp>
-      <p:sp>
-        <p:nvSpPr>
-          <p:cNvPr id="5" name="TextBox 4"/>
+                <a:spcPts val="1000"/>
+              </a:spcAft>
+              <a:defRPr sz="1000" b="0">
+                <a:solidFill>
+                  <a:srgbClr val="C89C51"/>
+                </a:solidFill>
+                <a:latin typeface="Aptos"/>
+              </a:defRPr>
+            </a:pPr>
+            <a:r>
+              <a:t>07</a:t>
+            </a:r>
+          </a:p>
+        </p:txBody>
+      </p:sp>
+      <p:sp>
+        <p:nvSpPr>
+          <p:cNvPr id="7" name="Rounded Rectangle 6"/>
+          <p:cNvSpPr/>
+          <p:nvPr/>
+        </p:nvSpPr>
+        <p:spPr>
+          <a:xfrm>
+            <a:off x="640080" y="2011680"/>
+            <a:ext cx="5303520" cy="1783080"/>
+          </a:xfrm>
+          <a:prstGeom prst="roundRect">
+            <a:avLst/>
+          </a:prstGeom>
+          <a:solidFill>
+            <a:srgbClr val="FFFFFF"/>
+          </a:solidFill>
+          <a:ln>
+            <a:noFill/>
+          </a:ln>
+        </p:spPr>
+        <p:style>
+          <a:lnRef idx="1">
+            <a:schemeClr val="accent1"/>
+          </a:lnRef>
+          <a:fillRef idx="3">
+            <a:schemeClr val="accent1"/>
+          </a:fillRef>
+          <a:effectRef idx="2">
+            <a:schemeClr val="accent1"/>
+          </a:effectRef>
+          <a:fontRef idx="minor">
+            <a:schemeClr val="lt1"/>
+          </a:fontRef>
+        </p:style>
+        <p:txBody>
+          <a:bodyPr rtlCol="0" anchor="ctr"/>
+          <a:lstStyle/>
+          <a:p>
+            <a:pPr algn="ctr"/>
+          </a:p>
+        </p:txBody>
+      </p:sp>
+      <p:sp>
+        <p:nvSpPr>
+          <p:cNvPr id="8" name="Rectangle 7"/>
+          <p:cNvSpPr/>
+          <p:nvPr/>
+        </p:nvSpPr>
+        <p:spPr>
+          <a:xfrm>
+            <a:off x="822959" y="2212848"/>
+            <a:ext cx="54864" cy="384048"/>
+          </a:xfrm>
+          <a:prstGeom prst="rect">
+            <a:avLst/>
+          </a:prstGeom>
+          <a:solidFill>
+            <a:srgbClr val="C89C51"/>
+          </a:solidFill>
+          <a:ln>
+            <a:noFill/>
+          </a:ln>
+        </p:spPr>
+        <p:style>
+          <a:lnRef idx="1">
+            <a:schemeClr val="accent1"/>
+          </a:lnRef>
+          <a:fillRef idx="3">
+            <a:schemeClr val="accent1"/>
+          </a:fillRef>
+          <a:effectRef idx="2">
+            <a:schemeClr val="accent1"/>
+          </a:effectRef>
+          <a:fontRef idx="minor">
+            <a:schemeClr val="lt1"/>
+          </a:fontRef>
+        </p:style>
+        <p:txBody>
+          <a:bodyPr rtlCol="0" anchor="ctr"/>
+          <a:lstStyle/>
+          <a:p>
+            <a:pPr algn="ctr"/>
+          </a:p>
+        </p:txBody>
+      </p:sp>
+      <p:sp>
+        <p:nvSpPr>
+          <p:cNvPr id="9" name="TextBox 8"/>
           <p:cNvSpPr txBox="1"/>
           <p:nvPr/>
         </p:nvSpPr>
         <p:spPr>
           <a:xfrm>
-            <a:off x="914400" y="2377440"/>
-            <a:ext cx="10241280" cy="3566160"/>
+            <a:off x="1005840" y="2194560"/>
+            <a:ext cx="4754880" cy="548640"/>
           </a:xfrm>
           <a:prstGeom prst="rect">
             <a:avLst/>
@@ -7578,86 +11138,38 @@
           <a:noFill/>
         </p:spPr>
         <p:txBody>
-          <a:bodyPr wrap="square">
+          <a:bodyPr wrap="square" lIns="0" rIns="0" tIns="0" bIns="0">
             <a:spAutoFit/>
           </a:bodyPr>
           <a:lstStyle/>
           <a:p>
             <a:pPr>
               <a:spcAft>
-                <a:spcPts val="1800"/>
-              </a:spcAft>
-              <a:defRPr sz="2500" b="0">
-                <a:solidFill>
-                  <a:srgbClr val="173238"/>
-                </a:solidFill>
-                <a:latin typeface="Aptos"/>
-              </a:defRPr>
-            </a:pPr>
-            <a:r>
-              <a:t>Bhakti: Hingabe und Gottesliebe</a:t>
-            </a:r>
-          </a:p>
-          <a:p>
-            <a:pPr>
-              <a:spcAft>
-                <a:spcPts val="1800"/>
-              </a:spcAft>
-              <a:defRPr sz="2500" b="0">
-                <a:solidFill>
-                  <a:srgbClr val="173238"/>
-                </a:solidFill>
-                <a:latin typeface="Aptos"/>
-              </a:defRPr>
-            </a:pPr>
-            <a:r>
-              <a:t>Jnana: Erkenntnis und Einsicht</a:t>
-            </a:r>
-          </a:p>
-          <a:p>
-            <a:pPr>
-              <a:spcAft>
-                <a:spcPts val="1800"/>
-              </a:spcAft>
-              <a:defRPr sz="2500" b="0">
-                <a:solidFill>
-                  <a:srgbClr val="173238"/>
-                </a:solidFill>
-                <a:latin typeface="Aptos"/>
-              </a:defRPr>
-            </a:pPr>
-            <a:r>
-              <a:t>Karma-Yoga: Handeln ohne Anhaften an den Erfolg</a:t>
-            </a:r>
-          </a:p>
-          <a:p>
-            <a:pPr>
-              <a:spcAft>
-                <a:spcPts val="1800"/>
-              </a:spcAft>
-              <a:defRPr sz="2500" b="0">
-                <a:solidFill>
-                  <a:srgbClr val="173238"/>
-                </a:solidFill>
-                <a:latin typeface="Aptos"/>
-              </a:defRPr>
-            </a:pPr>
-            <a:r>
-              <a:t>Meditation und Yoga: spirituelle Übung</a:t>
-            </a:r>
-          </a:p>
-        </p:txBody>
-      </p:sp>
-      <p:sp>
-        <p:nvSpPr>
-          <p:cNvPr id="6" name="TextBox 5"/>
+                <a:spcPts val="1000"/>
+              </a:spcAft>
+              <a:defRPr sz="2300" b="1">
+                <a:solidFill>
+                  <a:srgbClr val="143D43"/>
+                </a:solidFill>
+                <a:latin typeface="Aptos"/>
+              </a:defRPr>
+            </a:pPr>
+            <a:r>
+              <a:t>Bhakti</a:t>
+            </a:r>
+          </a:p>
+        </p:txBody>
+      </p:sp>
+      <p:sp>
+        <p:nvSpPr>
+          <p:cNvPr id="10" name="TextBox 9"/>
           <p:cNvSpPr txBox="1"/>
           <p:nvPr/>
         </p:nvSpPr>
         <p:spPr>
           <a:xfrm>
-            <a:off x="914400" y="6446520"/>
-            <a:ext cx="9144000" cy="228600"/>
+            <a:off x="914400" y="2880360"/>
+            <a:ext cx="4754880" cy="822959"/>
           </a:xfrm>
           <a:prstGeom prst="rect">
             <a:avLst/>
@@ -7665,38 +11177,124 @@
           <a:noFill/>
         </p:spPr>
         <p:txBody>
-          <a:bodyPr wrap="square">
+          <a:bodyPr wrap="square" lIns="0" rIns="0" tIns="0" bIns="0">
             <a:spAutoFit/>
           </a:bodyPr>
           <a:lstStyle/>
           <a:p>
             <a:pPr>
               <a:spcAft>
-                <a:spcPts val="1800"/>
-              </a:spcAft>
-              <a:defRPr sz="1000" b="0">
-                <a:solidFill>
-                  <a:srgbClr val="C89C51"/>
-                </a:solidFill>
-                <a:latin typeface="Aptos"/>
-              </a:defRPr>
-            </a:pPr>
-            <a:r>
-              <a:t>Vielfalt verstehen · Begriffe verbinden · kritisch nachfragen</a:t>
-            </a:r>
-          </a:p>
-        </p:txBody>
-      </p:sp>
-      <p:sp>
-        <p:nvSpPr>
-          <p:cNvPr id="7" name="TextBox 6"/>
+                <a:spcPts val="1000"/>
+              </a:spcAft>
+              <a:defRPr sz="2000" b="0">
+                <a:solidFill>
+                  <a:srgbClr val="173238"/>
+                </a:solidFill>
+                <a:latin typeface="Aptos"/>
+              </a:defRPr>
+            </a:pPr>
+            <a:r>
+              <a:t>Hingabe und Gottesliebe</a:t>
+            </a:r>
+          </a:p>
+        </p:txBody>
+      </p:sp>
+      <p:sp>
+        <p:nvSpPr>
+          <p:cNvPr id="11" name="Rounded Rectangle 10"/>
+          <p:cNvSpPr/>
+          <p:nvPr/>
+        </p:nvSpPr>
+        <p:spPr>
+          <a:xfrm>
+            <a:off x="6217920" y="2011680"/>
+            <a:ext cx="5303520" cy="1783080"/>
+          </a:xfrm>
+          <a:prstGeom prst="roundRect">
+            <a:avLst/>
+          </a:prstGeom>
+          <a:solidFill>
+            <a:srgbClr val="FFFFFF"/>
+          </a:solidFill>
+          <a:ln>
+            <a:noFill/>
+          </a:ln>
+        </p:spPr>
+        <p:style>
+          <a:lnRef idx="1">
+            <a:schemeClr val="accent1"/>
+          </a:lnRef>
+          <a:fillRef idx="3">
+            <a:schemeClr val="accent1"/>
+          </a:fillRef>
+          <a:effectRef idx="2">
+            <a:schemeClr val="accent1"/>
+          </a:effectRef>
+          <a:fontRef idx="minor">
+            <a:schemeClr val="lt1"/>
+          </a:fontRef>
+        </p:style>
+        <p:txBody>
+          <a:bodyPr rtlCol="0" anchor="ctr"/>
+          <a:lstStyle/>
+          <a:p>
+            <a:pPr algn="ctr"/>
+          </a:p>
+        </p:txBody>
+      </p:sp>
+      <p:sp>
+        <p:nvSpPr>
+          <p:cNvPr id="12" name="Rectangle 11"/>
+          <p:cNvSpPr/>
+          <p:nvPr/>
+        </p:nvSpPr>
+        <p:spPr>
+          <a:xfrm>
+            <a:off x="6400800" y="2212848"/>
+            <a:ext cx="54864" cy="384048"/>
+          </a:xfrm>
+          <a:prstGeom prst="rect">
+            <a:avLst/>
+          </a:prstGeom>
+          <a:solidFill>
+            <a:srgbClr val="C89C51"/>
+          </a:solidFill>
+          <a:ln>
+            <a:noFill/>
+          </a:ln>
+        </p:spPr>
+        <p:style>
+          <a:lnRef idx="1">
+            <a:schemeClr val="accent1"/>
+          </a:lnRef>
+          <a:fillRef idx="3">
+            <a:schemeClr val="accent1"/>
+          </a:fillRef>
+          <a:effectRef idx="2">
+            <a:schemeClr val="accent1"/>
+          </a:effectRef>
+          <a:fontRef idx="minor">
+            <a:schemeClr val="lt1"/>
+          </a:fontRef>
+        </p:style>
+        <p:txBody>
+          <a:bodyPr rtlCol="0" anchor="ctr"/>
+          <a:lstStyle/>
+          <a:p>
+            <a:pPr algn="ctr"/>
+          </a:p>
+        </p:txBody>
+      </p:sp>
+      <p:sp>
+        <p:nvSpPr>
+          <p:cNvPr id="13" name="TextBox 12"/>
           <p:cNvSpPr txBox="1"/>
           <p:nvPr/>
         </p:nvSpPr>
         <p:spPr>
           <a:xfrm>
-            <a:off x="10972800" y="6428232"/>
-            <a:ext cx="457200" cy="274320"/>
+            <a:off x="6583680" y="2194560"/>
+            <a:ext cx="4754880" cy="548640"/>
           </a:xfrm>
           <a:prstGeom prst="rect">
             <a:avLst/>
@@ -7704,24 +11302,391 @@
           <a:noFill/>
         </p:spPr>
         <p:txBody>
-          <a:bodyPr wrap="square">
+          <a:bodyPr wrap="square" lIns="0" rIns="0" tIns="0" bIns="0">
             <a:spAutoFit/>
           </a:bodyPr>
           <a:lstStyle/>
           <a:p>
             <a:pPr>
               <a:spcAft>
-                <a:spcPts val="1800"/>
-              </a:spcAft>
-              <a:defRPr sz="1100" b="0">
-                <a:solidFill>
-                  <a:srgbClr val="C89C51"/>
-                </a:solidFill>
-                <a:latin typeface="Aptos"/>
-              </a:defRPr>
-            </a:pPr>
-            <a:r>
-              <a:t>7</a:t>
+                <a:spcPts val="1000"/>
+              </a:spcAft>
+              <a:defRPr sz="2300" b="1">
+                <a:solidFill>
+                  <a:srgbClr val="143D43"/>
+                </a:solidFill>
+                <a:latin typeface="Aptos"/>
+              </a:defRPr>
+            </a:pPr>
+            <a:r>
+              <a:t>Jnana</a:t>
+            </a:r>
+          </a:p>
+        </p:txBody>
+      </p:sp>
+      <p:sp>
+        <p:nvSpPr>
+          <p:cNvPr id="14" name="TextBox 13"/>
+          <p:cNvSpPr txBox="1"/>
+          <p:nvPr/>
+        </p:nvSpPr>
+        <p:spPr>
+          <a:xfrm>
+            <a:off x="6492240" y="2880360"/>
+            <a:ext cx="4754880" cy="822959"/>
+          </a:xfrm>
+          <a:prstGeom prst="rect">
+            <a:avLst/>
+          </a:prstGeom>
+          <a:noFill/>
+        </p:spPr>
+        <p:txBody>
+          <a:bodyPr wrap="square" lIns="0" rIns="0" tIns="0" bIns="0">
+            <a:spAutoFit/>
+          </a:bodyPr>
+          <a:lstStyle/>
+          <a:p>
+            <a:pPr>
+              <a:spcAft>
+                <a:spcPts val="1000"/>
+              </a:spcAft>
+              <a:defRPr sz="2000" b="0">
+                <a:solidFill>
+                  <a:srgbClr val="173238"/>
+                </a:solidFill>
+                <a:latin typeface="Aptos"/>
+              </a:defRPr>
+            </a:pPr>
+            <a:r>
+              <a:t>Erkenntnis und Einsicht</a:t>
+            </a:r>
+          </a:p>
+        </p:txBody>
+      </p:sp>
+      <p:sp>
+        <p:nvSpPr>
+          <p:cNvPr id="15" name="Rounded Rectangle 14"/>
+          <p:cNvSpPr/>
+          <p:nvPr/>
+        </p:nvSpPr>
+        <p:spPr>
+          <a:xfrm>
+            <a:off x="640080" y="3977639"/>
+            <a:ext cx="5303520" cy="1783080"/>
+          </a:xfrm>
+          <a:prstGeom prst="roundRect">
+            <a:avLst/>
+          </a:prstGeom>
+          <a:solidFill>
+            <a:srgbClr val="FFFFFF"/>
+          </a:solidFill>
+          <a:ln>
+            <a:noFill/>
+          </a:ln>
+        </p:spPr>
+        <p:style>
+          <a:lnRef idx="1">
+            <a:schemeClr val="accent1"/>
+          </a:lnRef>
+          <a:fillRef idx="3">
+            <a:schemeClr val="accent1"/>
+          </a:fillRef>
+          <a:effectRef idx="2">
+            <a:schemeClr val="accent1"/>
+          </a:effectRef>
+          <a:fontRef idx="minor">
+            <a:schemeClr val="lt1"/>
+          </a:fontRef>
+        </p:style>
+        <p:txBody>
+          <a:bodyPr rtlCol="0" anchor="ctr"/>
+          <a:lstStyle/>
+          <a:p>
+            <a:pPr algn="ctr"/>
+          </a:p>
+        </p:txBody>
+      </p:sp>
+      <p:sp>
+        <p:nvSpPr>
+          <p:cNvPr id="16" name="Rectangle 15"/>
+          <p:cNvSpPr/>
+          <p:nvPr/>
+        </p:nvSpPr>
+        <p:spPr>
+          <a:xfrm>
+            <a:off x="822959" y="4178807"/>
+            <a:ext cx="54864" cy="384048"/>
+          </a:xfrm>
+          <a:prstGeom prst="rect">
+            <a:avLst/>
+          </a:prstGeom>
+          <a:solidFill>
+            <a:srgbClr val="C89C51"/>
+          </a:solidFill>
+          <a:ln>
+            <a:noFill/>
+          </a:ln>
+        </p:spPr>
+        <p:style>
+          <a:lnRef idx="1">
+            <a:schemeClr val="accent1"/>
+          </a:lnRef>
+          <a:fillRef idx="3">
+            <a:schemeClr val="accent1"/>
+          </a:fillRef>
+          <a:effectRef idx="2">
+            <a:schemeClr val="accent1"/>
+          </a:effectRef>
+          <a:fontRef idx="minor">
+            <a:schemeClr val="lt1"/>
+          </a:fontRef>
+        </p:style>
+        <p:txBody>
+          <a:bodyPr rtlCol="0" anchor="ctr"/>
+          <a:lstStyle/>
+          <a:p>
+            <a:pPr algn="ctr"/>
+          </a:p>
+        </p:txBody>
+      </p:sp>
+      <p:sp>
+        <p:nvSpPr>
+          <p:cNvPr id="17" name="TextBox 16"/>
+          <p:cNvSpPr txBox="1"/>
+          <p:nvPr/>
+        </p:nvSpPr>
+        <p:spPr>
+          <a:xfrm>
+            <a:off x="1005840" y="4160520"/>
+            <a:ext cx="4754880" cy="548640"/>
+          </a:xfrm>
+          <a:prstGeom prst="rect">
+            <a:avLst/>
+          </a:prstGeom>
+          <a:noFill/>
+        </p:spPr>
+        <p:txBody>
+          <a:bodyPr wrap="square" lIns="0" rIns="0" tIns="0" bIns="0">
+            <a:spAutoFit/>
+          </a:bodyPr>
+          <a:lstStyle/>
+          <a:p>
+            <a:pPr>
+              <a:spcAft>
+                <a:spcPts val="1000"/>
+              </a:spcAft>
+              <a:defRPr sz="2300" b="1">
+                <a:solidFill>
+                  <a:srgbClr val="143D43"/>
+                </a:solidFill>
+                <a:latin typeface="Aptos"/>
+              </a:defRPr>
+            </a:pPr>
+            <a:r>
+              <a:t>Karma-Yoga</a:t>
+            </a:r>
+          </a:p>
+        </p:txBody>
+      </p:sp>
+      <p:sp>
+        <p:nvSpPr>
+          <p:cNvPr id="18" name="TextBox 17"/>
+          <p:cNvSpPr txBox="1"/>
+          <p:nvPr/>
+        </p:nvSpPr>
+        <p:spPr>
+          <a:xfrm>
+            <a:off x="914400" y="4846320"/>
+            <a:ext cx="4754880" cy="822959"/>
+          </a:xfrm>
+          <a:prstGeom prst="rect">
+            <a:avLst/>
+          </a:prstGeom>
+          <a:noFill/>
+        </p:spPr>
+        <p:txBody>
+          <a:bodyPr wrap="square" lIns="0" rIns="0" tIns="0" bIns="0">
+            <a:spAutoFit/>
+          </a:bodyPr>
+          <a:lstStyle/>
+          <a:p>
+            <a:pPr>
+              <a:spcAft>
+                <a:spcPts val="1000"/>
+              </a:spcAft>
+              <a:defRPr sz="2000" b="0">
+                <a:solidFill>
+                  <a:srgbClr val="173238"/>
+                </a:solidFill>
+                <a:latin typeface="Aptos"/>
+              </a:defRPr>
+            </a:pPr>
+            <a:r>
+              <a:t>Handeln ohne Anhaften am Erfolg</a:t>
+            </a:r>
+          </a:p>
+        </p:txBody>
+      </p:sp>
+      <p:sp>
+        <p:nvSpPr>
+          <p:cNvPr id="19" name="Rounded Rectangle 18"/>
+          <p:cNvSpPr/>
+          <p:nvPr/>
+        </p:nvSpPr>
+        <p:spPr>
+          <a:xfrm>
+            <a:off x="6217920" y="3977639"/>
+            <a:ext cx="5303520" cy="1783080"/>
+          </a:xfrm>
+          <a:prstGeom prst="roundRect">
+            <a:avLst/>
+          </a:prstGeom>
+          <a:solidFill>
+            <a:srgbClr val="FFFFFF"/>
+          </a:solidFill>
+          <a:ln>
+            <a:noFill/>
+          </a:ln>
+        </p:spPr>
+        <p:style>
+          <a:lnRef idx="1">
+            <a:schemeClr val="accent1"/>
+          </a:lnRef>
+          <a:fillRef idx="3">
+            <a:schemeClr val="accent1"/>
+          </a:fillRef>
+          <a:effectRef idx="2">
+            <a:schemeClr val="accent1"/>
+          </a:effectRef>
+          <a:fontRef idx="minor">
+            <a:schemeClr val="lt1"/>
+          </a:fontRef>
+        </p:style>
+        <p:txBody>
+          <a:bodyPr rtlCol="0" anchor="ctr"/>
+          <a:lstStyle/>
+          <a:p>
+            <a:pPr algn="ctr"/>
+          </a:p>
+        </p:txBody>
+      </p:sp>
+      <p:sp>
+        <p:nvSpPr>
+          <p:cNvPr id="20" name="Rectangle 19"/>
+          <p:cNvSpPr/>
+          <p:nvPr/>
+        </p:nvSpPr>
+        <p:spPr>
+          <a:xfrm>
+            <a:off x="6400800" y="4178807"/>
+            <a:ext cx="54864" cy="384048"/>
+          </a:xfrm>
+          <a:prstGeom prst="rect">
+            <a:avLst/>
+          </a:prstGeom>
+          <a:solidFill>
+            <a:srgbClr val="C89C51"/>
+          </a:solidFill>
+          <a:ln>
+            <a:noFill/>
+          </a:ln>
+        </p:spPr>
+        <p:style>
+          <a:lnRef idx="1">
+            <a:schemeClr val="accent1"/>
+          </a:lnRef>
+          <a:fillRef idx="3">
+            <a:schemeClr val="accent1"/>
+          </a:fillRef>
+          <a:effectRef idx="2">
+            <a:schemeClr val="accent1"/>
+          </a:effectRef>
+          <a:fontRef idx="minor">
+            <a:schemeClr val="lt1"/>
+          </a:fontRef>
+        </p:style>
+        <p:txBody>
+          <a:bodyPr rtlCol="0" anchor="ctr"/>
+          <a:lstStyle/>
+          <a:p>
+            <a:pPr algn="ctr"/>
+          </a:p>
+        </p:txBody>
+      </p:sp>
+      <p:sp>
+        <p:nvSpPr>
+          <p:cNvPr id="21" name="TextBox 20"/>
+          <p:cNvSpPr txBox="1"/>
+          <p:nvPr/>
+        </p:nvSpPr>
+        <p:spPr>
+          <a:xfrm>
+            <a:off x="6583680" y="4160520"/>
+            <a:ext cx="4754880" cy="548640"/>
+          </a:xfrm>
+          <a:prstGeom prst="rect">
+            <a:avLst/>
+          </a:prstGeom>
+          <a:noFill/>
+        </p:spPr>
+        <p:txBody>
+          <a:bodyPr wrap="square" lIns="0" rIns="0" tIns="0" bIns="0">
+            <a:spAutoFit/>
+          </a:bodyPr>
+          <a:lstStyle/>
+          <a:p>
+            <a:pPr>
+              <a:spcAft>
+                <a:spcPts val="1000"/>
+              </a:spcAft>
+              <a:defRPr sz="2300" b="1">
+                <a:solidFill>
+                  <a:srgbClr val="143D43"/>
+                </a:solidFill>
+                <a:latin typeface="Aptos"/>
+              </a:defRPr>
+            </a:pPr>
+            <a:r>
+              <a:t>Meditation &amp; Yoga</a:t>
+            </a:r>
+          </a:p>
+        </p:txBody>
+      </p:sp>
+      <p:sp>
+        <p:nvSpPr>
+          <p:cNvPr id="22" name="TextBox 21"/>
+          <p:cNvSpPr txBox="1"/>
+          <p:nvPr/>
+        </p:nvSpPr>
+        <p:spPr>
+          <a:xfrm>
+            <a:off x="6492240" y="4846320"/>
+            <a:ext cx="4754880" cy="822959"/>
+          </a:xfrm>
+          <a:prstGeom prst="rect">
+            <a:avLst/>
+          </a:prstGeom>
+          <a:noFill/>
+        </p:spPr>
+        <p:txBody>
+          <a:bodyPr wrap="square" lIns="0" rIns="0" tIns="0" bIns="0">
+            <a:spAutoFit/>
+          </a:bodyPr>
+          <a:lstStyle/>
+          <a:p>
+            <a:pPr>
+              <a:spcAft>
+                <a:spcPts val="1000"/>
+              </a:spcAft>
+              <a:defRPr sz="2000" b="0">
+                <a:solidFill>
+                  <a:srgbClr val="173238"/>
+                </a:solidFill>
+                <a:latin typeface="Aptos"/>
+              </a:defRPr>
+            </a:pPr>
+            <a:r>
+              <a:t>Spirituelle Übung und Sammlung</a:t>
             </a:r>
           </a:p>
         </p:txBody>
@@ -7754,14 +11719,92 @@
       <p:grpSpPr/>
       <p:sp>
         <p:nvSpPr>
-          <p:cNvPr id="2" name="Rectangle 1"/>
+          <p:cNvPr id="2" name="TextBox 1"/>
+          <p:cNvSpPr txBox="1"/>
+          <p:nvPr/>
+        </p:nvSpPr>
+        <p:spPr>
+          <a:xfrm>
+            <a:off x="594360" y="365760"/>
+            <a:ext cx="10058400" cy="274320"/>
+          </a:xfrm>
+          <a:prstGeom prst="rect">
+            <a:avLst/>
+          </a:prstGeom>
+          <a:noFill/>
+        </p:spPr>
+        <p:txBody>
+          <a:bodyPr wrap="square" lIns="0" rIns="0" tIns="0" bIns="0">
+            <a:spAutoFit/>
+          </a:bodyPr>
+          <a:lstStyle/>
+          <a:p>
+            <a:pPr>
+              <a:spcAft>
+                <a:spcPts val="1000"/>
+              </a:spcAft>
+              <a:defRPr sz="1100" b="1">
+                <a:solidFill>
+                  <a:srgbClr val="C89C51"/>
+                </a:solidFill>
+                <a:latin typeface="Aptos"/>
+              </a:defRPr>
+            </a:pPr>
+            <a:r>
+              <a:t>07 / ALLTAG &amp; FESTE</a:t>
+            </a:r>
+          </a:p>
+        </p:txBody>
+      </p:sp>
+      <p:sp>
+        <p:nvSpPr>
+          <p:cNvPr id="3" name="TextBox 2"/>
+          <p:cNvSpPr txBox="1"/>
+          <p:nvPr/>
+        </p:nvSpPr>
+        <p:spPr>
+          <a:xfrm>
+            <a:off x="594360" y="868680"/>
+            <a:ext cx="10972800" cy="1005840"/>
+          </a:xfrm>
+          <a:prstGeom prst="rect">
+            <a:avLst/>
+          </a:prstGeom>
+          <a:noFill/>
+        </p:spPr>
+        <p:txBody>
+          <a:bodyPr wrap="square" lIns="0" rIns="0" tIns="0" bIns="0">
+            <a:spAutoFit/>
+          </a:bodyPr>
+          <a:lstStyle/>
+          <a:p>
+            <a:pPr>
+              <a:spcAft>
+                <a:spcPts val="1000"/>
+              </a:spcAft>
+              <a:defRPr sz="3400" b="1">
+                <a:solidFill>
+                  <a:srgbClr val="143D43"/>
+                </a:solidFill>
+                <a:latin typeface="Aptos"/>
+              </a:defRPr>
+            </a:pPr>
+            <a:r>
+              <a:t>Religion wird gelebt</a:t>
+            </a:r>
+          </a:p>
+        </p:txBody>
+      </p:sp>
+      <p:sp>
+        <p:nvSpPr>
+          <p:cNvPr id="4" name="Rectangle 3"/>
           <p:cNvSpPr/>
           <p:nvPr/>
         </p:nvSpPr>
         <p:spPr>
           <a:xfrm>
-            <a:off x="548640" y="594360"/>
-            <a:ext cx="109728" cy="5440680"/>
+            <a:off x="594360" y="6382512"/>
+            <a:ext cx="10972800" cy="18288"/>
           </a:xfrm>
           <a:prstGeom prst="rect">
             <a:avLst/>
@@ -7797,14 +11840,14 @@
       </p:sp>
       <p:sp>
         <p:nvSpPr>
-          <p:cNvPr id="3" name="TextBox 2"/>
+          <p:cNvPr id="5" name="TextBox 4"/>
           <p:cNvSpPr txBox="1"/>
           <p:nvPr/>
         </p:nvSpPr>
         <p:spPr>
           <a:xfrm>
-            <a:off x="868680" y="457200"/>
-            <a:ext cx="10607040" cy="365760"/>
+            <a:off x="594360" y="6510528"/>
+            <a:ext cx="8229600" cy="182880"/>
           </a:xfrm>
           <a:prstGeom prst="rect">
             <a:avLst/>
@@ -7812,16 +11855,16 @@
           <a:noFill/>
         </p:spPr>
         <p:txBody>
-          <a:bodyPr wrap="square">
+          <a:bodyPr wrap="square" lIns="0" rIns="0" tIns="0" bIns="0">
             <a:spAutoFit/>
           </a:bodyPr>
           <a:lstStyle/>
           <a:p>
             <a:pPr>
               <a:spcAft>
-                <a:spcPts val="1800"/>
-              </a:spcAft>
-              <a:defRPr sz="1200" b="1">
+                <a:spcPts val="1000"/>
+              </a:spcAft>
+              <a:defRPr sz="900" b="0">
                 <a:solidFill>
                   <a:srgbClr val="C89C51"/>
                 </a:solidFill>
@@ -7829,21 +11872,21 @@
               </a:defRPr>
             </a:pPr>
             <a:r>
-              <a:t>HINDUISMUS · RELIGION 13</a:t>
-            </a:r>
-          </a:p>
-        </p:txBody>
-      </p:sp>
-      <p:sp>
-        <p:nvSpPr>
-          <p:cNvPr id="4" name="TextBox 3"/>
+              <a:t>RELIGION · KLASSE 13     /     VIELFALT VERSTEHEN</a:t>
+            </a:r>
+          </a:p>
+        </p:txBody>
+      </p:sp>
+      <p:sp>
+        <p:nvSpPr>
+          <p:cNvPr id="6" name="TextBox 5"/>
           <p:cNvSpPr txBox="1"/>
           <p:nvPr/>
         </p:nvSpPr>
         <p:spPr>
           <a:xfrm>
-            <a:off x="868680" y="1005840"/>
-            <a:ext cx="10515600" cy="1143000"/>
+            <a:off x="10972800" y="6492240"/>
+            <a:ext cx="594360" cy="228600"/>
           </a:xfrm>
           <a:prstGeom prst="rect">
             <a:avLst/>
@@ -7851,38 +11894,124 @@
           <a:noFill/>
         </p:spPr>
         <p:txBody>
-          <a:bodyPr wrap="square">
+          <a:bodyPr wrap="square" lIns="0" rIns="0" tIns="0" bIns="0">
             <a:spAutoFit/>
           </a:bodyPr>
           <a:lstStyle/>
           <a:p>
             <a:pPr>
               <a:spcAft>
-                <a:spcPts val="1800"/>
-              </a:spcAft>
-              <a:defRPr sz="3400" b="1">
-                <a:solidFill>
-                  <a:srgbClr val="143D43"/>
-                </a:solidFill>
-                <a:latin typeface="Aptos"/>
-              </a:defRPr>
-            </a:pPr>
-            <a:r>
-              <a:t>Religion im Alltag</a:t>
-            </a:r>
-          </a:p>
-        </p:txBody>
-      </p:sp>
-      <p:sp>
-        <p:nvSpPr>
-          <p:cNvPr id="5" name="TextBox 4"/>
+                <a:spcPts val="1000"/>
+              </a:spcAft>
+              <a:defRPr sz="1000" b="0">
+                <a:solidFill>
+                  <a:srgbClr val="C89C51"/>
+                </a:solidFill>
+                <a:latin typeface="Aptos"/>
+              </a:defRPr>
+            </a:pPr>
+            <a:r>
+              <a:t>08</a:t>
+            </a:r>
+          </a:p>
+        </p:txBody>
+      </p:sp>
+      <p:sp>
+        <p:nvSpPr>
+          <p:cNvPr id="7" name="Rounded Rectangle 6"/>
+          <p:cNvSpPr/>
+          <p:nvPr/>
+        </p:nvSpPr>
+        <p:spPr>
+          <a:xfrm>
+            <a:off x="640080" y="2057400"/>
+            <a:ext cx="6766560" cy="3931920"/>
+          </a:xfrm>
+          <a:prstGeom prst="roundRect">
+            <a:avLst/>
+          </a:prstGeom>
+          <a:solidFill>
+            <a:srgbClr val="FFFFFF"/>
+          </a:solidFill>
+          <a:ln>
+            <a:noFill/>
+          </a:ln>
+        </p:spPr>
+        <p:style>
+          <a:lnRef idx="1">
+            <a:schemeClr val="accent1"/>
+          </a:lnRef>
+          <a:fillRef idx="3">
+            <a:schemeClr val="accent1"/>
+          </a:fillRef>
+          <a:effectRef idx="2">
+            <a:schemeClr val="accent1"/>
+          </a:effectRef>
+          <a:fontRef idx="minor">
+            <a:schemeClr val="lt1"/>
+          </a:fontRef>
+        </p:style>
+        <p:txBody>
+          <a:bodyPr rtlCol="0" anchor="ctr"/>
+          <a:lstStyle/>
+          <a:p>
+            <a:pPr algn="ctr"/>
+          </a:p>
+        </p:txBody>
+      </p:sp>
+      <p:sp>
+        <p:nvSpPr>
+          <p:cNvPr id="8" name="Rectangle 7"/>
+          <p:cNvSpPr/>
+          <p:nvPr/>
+        </p:nvSpPr>
+        <p:spPr>
+          <a:xfrm>
+            <a:off x="822959" y="2258568"/>
+            <a:ext cx="54864" cy="384048"/>
+          </a:xfrm>
+          <a:prstGeom prst="rect">
+            <a:avLst/>
+          </a:prstGeom>
+          <a:solidFill>
+            <a:srgbClr val="C89C51"/>
+          </a:solidFill>
+          <a:ln>
+            <a:noFill/>
+          </a:ln>
+        </p:spPr>
+        <p:style>
+          <a:lnRef idx="1">
+            <a:schemeClr val="accent1"/>
+          </a:lnRef>
+          <a:fillRef idx="3">
+            <a:schemeClr val="accent1"/>
+          </a:fillRef>
+          <a:effectRef idx="2">
+            <a:schemeClr val="accent1"/>
+          </a:effectRef>
+          <a:fontRef idx="minor">
+            <a:schemeClr val="lt1"/>
+          </a:fontRef>
+        </p:style>
+        <p:txBody>
+          <a:bodyPr rtlCol="0" anchor="ctr"/>
+          <a:lstStyle/>
+          <a:p>
+            <a:pPr algn="ctr"/>
+          </a:p>
+        </p:txBody>
+      </p:sp>
+      <p:sp>
+        <p:nvSpPr>
+          <p:cNvPr id="9" name="TextBox 8"/>
           <p:cNvSpPr txBox="1"/>
           <p:nvPr/>
         </p:nvSpPr>
         <p:spPr>
           <a:xfrm>
-            <a:off x="914400" y="2377440"/>
-            <a:ext cx="10241280" cy="3566160"/>
+            <a:off x="1005840" y="2240280"/>
+            <a:ext cx="6217920" cy="548640"/>
           </a:xfrm>
           <a:prstGeom prst="rect">
             <a:avLst/>
@@ -7890,86 +12019,38 @@
           <a:noFill/>
         </p:spPr>
         <p:txBody>
-          <a:bodyPr wrap="square">
+          <a:bodyPr wrap="square" lIns="0" rIns="0" tIns="0" bIns="0">
             <a:spAutoFit/>
           </a:bodyPr>
           <a:lstStyle/>
           <a:p>
             <a:pPr>
               <a:spcAft>
-                <a:spcPts val="1800"/>
-              </a:spcAft>
-              <a:defRPr sz="2500" b="0">
-                <a:solidFill>
-                  <a:srgbClr val="173238"/>
-                </a:solidFill>
-                <a:latin typeface="Aptos"/>
-              </a:defRPr>
-            </a:pPr>
-            <a:r>
-              <a:t>Puja: Verehrung zu Hause oder im Tempel</a:t>
-            </a:r>
-          </a:p>
-          <a:p>
-            <a:pPr>
-              <a:spcAft>
-                <a:spcPts val="1800"/>
-              </a:spcAft>
-              <a:defRPr sz="2500" b="0">
-                <a:solidFill>
-                  <a:srgbClr val="173238"/>
-                </a:solidFill>
-                <a:latin typeface="Aptos"/>
-              </a:defRPr>
-            </a:pPr>
-            <a:r>
-              <a:t>Darshan: die Gottheit sehen und von ihr gesehen werden</a:t>
-            </a:r>
-          </a:p>
-          <a:p>
-            <a:pPr>
-              <a:spcAft>
-                <a:spcPts val="1800"/>
-              </a:spcAft>
-              <a:defRPr sz="2500" b="0">
-                <a:solidFill>
-                  <a:srgbClr val="173238"/>
-                </a:solidFill>
-                <a:latin typeface="Aptos"/>
-              </a:defRPr>
-            </a:pPr>
-            <a:r>
-              <a:t>Pilgerreisen, Mantras, Speisen und Familienrituale</a:t>
-            </a:r>
-          </a:p>
-          <a:p>
-            <a:pPr>
-              <a:spcAft>
-                <a:spcPts val="1800"/>
-              </a:spcAft>
-              <a:defRPr sz="2500" b="0">
-                <a:solidFill>
-                  <a:srgbClr val="173238"/>
-                </a:solidFill>
-                <a:latin typeface="Aptos"/>
-              </a:defRPr>
-            </a:pPr>
-            <a:r>
-              <a:t>Feste: Diwali und Holi – regional unterschiedlich</a:t>
-            </a:r>
-          </a:p>
-        </p:txBody>
-      </p:sp>
-      <p:sp>
-        <p:nvSpPr>
-          <p:cNvPr id="6" name="TextBox 5"/>
+                <a:spcPts val="1000"/>
+              </a:spcAft>
+              <a:defRPr sz="2300" b="1">
+                <a:solidFill>
+                  <a:srgbClr val="143D43"/>
+                </a:solidFill>
+                <a:latin typeface="Aptos"/>
+              </a:defRPr>
+            </a:pPr>
+            <a:r>
+              <a:t>Zu Hause, im Tempel, unterwegs</a:t>
+            </a:r>
+          </a:p>
+        </p:txBody>
+      </p:sp>
+      <p:sp>
+        <p:nvSpPr>
+          <p:cNvPr id="10" name="TextBox 9"/>
           <p:cNvSpPr txBox="1"/>
           <p:nvPr/>
         </p:nvSpPr>
         <p:spPr>
           <a:xfrm>
-            <a:off x="914400" y="6446520"/>
-            <a:ext cx="9144000" cy="228600"/>
+            <a:off x="914400" y="2926080"/>
+            <a:ext cx="6217920" cy="2971800"/>
           </a:xfrm>
           <a:prstGeom prst="rect">
             <a:avLst/>
@@ -7977,38 +12058,111 @@
           <a:noFill/>
         </p:spPr>
         <p:txBody>
-          <a:bodyPr wrap="square">
+          <a:bodyPr wrap="square" lIns="0" rIns="0" tIns="0" bIns="0">
             <a:spAutoFit/>
           </a:bodyPr>
           <a:lstStyle/>
           <a:p>
             <a:pPr>
               <a:spcAft>
-                <a:spcPts val="1800"/>
-              </a:spcAft>
-              <a:defRPr sz="1000" b="0">
-                <a:solidFill>
-                  <a:srgbClr val="C89C51"/>
-                </a:solidFill>
-                <a:latin typeface="Aptos"/>
-              </a:defRPr>
-            </a:pPr>
-            <a:r>
-              <a:t>Vielfalt verstehen · Begriffe verbinden · kritisch nachfragen</a:t>
-            </a:r>
-          </a:p>
-        </p:txBody>
-      </p:sp>
-      <p:sp>
-        <p:nvSpPr>
-          <p:cNvPr id="7" name="TextBox 6"/>
+                <a:spcPts val="1000"/>
+              </a:spcAft>
+              <a:defRPr sz="2000" b="0">
+                <a:solidFill>
+                  <a:srgbClr val="173238"/>
+                </a:solidFill>
+                <a:latin typeface="Aptos"/>
+              </a:defRPr>
+            </a:pPr>
+            <a:r>
+              <a:t>Puja: Verehrung mit Licht, Blumen, Speisen</a:t>
+            </a:r>
+          </a:p>
+          <a:p>
+            <a:pPr>
+              <a:spcAft>
+                <a:spcPts val="1000"/>
+              </a:spcAft>
+              <a:defRPr sz="2000" b="0">
+                <a:solidFill>
+                  <a:srgbClr val="173238"/>
+                </a:solidFill>
+                <a:latin typeface="Aptos"/>
+              </a:defRPr>
+            </a:pPr>
+            <a:r>
+              <a:t>Darshan: sehen und gesehen werden</a:t>
+            </a:r>
+          </a:p>
+          <a:p>
+            <a:pPr>
+              <a:spcAft>
+                <a:spcPts val="1000"/>
+              </a:spcAft>
+              <a:defRPr sz="2000" b="0">
+                <a:solidFill>
+                  <a:srgbClr val="173238"/>
+                </a:solidFill>
+                <a:latin typeface="Aptos"/>
+              </a:defRPr>
+            </a:pPr>
+            <a:r>
+              <a:t>Diwali: Lichterfest · Holi: Frühlingsfest</a:t>
+            </a:r>
+          </a:p>
+          <a:p>
+            <a:pPr>
+              <a:spcAft>
+                <a:spcPts val="1000"/>
+              </a:spcAft>
+              <a:defRPr sz="2000" b="0">
+                <a:solidFill>
+                  <a:srgbClr val="173238"/>
+                </a:solidFill>
+                <a:latin typeface="Aptos"/>
+              </a:defRPr>
+            </a:pPr>
+            <a:r>
+              <a:t>Bedeutungen und Praktiken variieren.</a:t>
+            </a:r>
+          </a:p>
+        </p:txBody>
+      </p:sp>
+      <p:pic>
+        <p:nvPicPr>
+          <p:cNvPr id="11" name="Picture 10" descr="hindu_illustration.png"/>
+          <p:cNvPicPr>
+            <a:picLocks noChangeAspect="1"/>
+          </p:cNvPicPr>
+          <p:nvPr/>
+        </p:nvPicPr>
+        <p:blipFill>
+          <a:blip r:embed="rId3"/>
+          <a:srcRect l="69000" t="45000"/>
+          <a:stretch>
+            <a:fillRect/>
+          </a:stretch>
+        </p:blipFill>
+        <p:spPr>
+          <a:xfrm>
+            <a:off x="7818120" y="2057400"/>
+            <a:ext cx="3657600" cy="3566160"/>
+          </a:xfrm>
+          <a:prstGeom prst="rect">
+            <a:avLst/>
+          </a:prstGeom>
+        </p:spPr>
+      </p:pic>
+      <p:sp>
+        <p:nvSpPr>
+          <p:cNvPr id="12" name="TextBox 11"/>
           <p:cNvSpPr txBox="1"/>
           <p:nvPr/>
         </p:nvSpPr>
         <p:spPr>
           <a:xfrm>
-            <a:off x="10972800" y="6428232"/>
-            <a:ext cx="457200" cy="274320"/>
+            <a:off x="7818120" y="5715000"/>
+            <a:ext cx="3657600" cy="320040"/>
           </a:xfrm>
           <a:prstGeom prst="rect">
             <a:avLst/>
@@ -8016,24 +12170,24 @@
           <a:noFill/>
         </p:spPr>
         <p:txBody>
-          <a:bodyPr wrap="square">
+          <a:bodyPr wrap="square" lIns="0" rIns="0" tIns="0" bIns="0">
             <a:spAutoFit/>
           </a:bodyPr>
           <a:lstStyle/>
           <a:p>
             <a:pPr>
               <a:spcAft>
-                <a:spcPts val="1800"/>
+                <a:spcPts val="1000"/>
               </a:spcAft>
               <a:defRPr sz="1100" b="0">
                 <a:solidFill>
-                  <a:srgbClr val="C89C51"/>
-                </a:solidFill>
-                <a:latin typeface="Aptos"/>
-              </a:defRPr>
-            </a:pPr>
-            <a:r>
-              <a:t>8</a:t>
+                  <a:srgbClr val="577477"/>
+                </a:solidFill>
+                <a:latin typeface="Aptos"/>
+              </a:defRPr>
+            </a:pPr>
+            <a:r>
+              <a:t>Diya-Lampen · KI-Illustration</a:t>
             </a:r>
           </a:p>
         </p:txBody>
@@ -8066,14 +12220,92 @@
       <p:grpSpPr/>
       <p:sp>
         <p:nvSpPr>
-          <p:cNvPr id="2" name="Rectangle 1"/>
+          <p:cNvPr id="2" name="TextBox 1"/>
+          <p:cNvSpPr txBox="1"/>
+          <p:nvPr/>
+        </p:nvSpPr>
+        <p:spPr>
+          <a:xfrm>
+            <a:off x="594360" y="365760"/>
+            <a:ext cx="10058400" cy="274320"/>
+          </a:xfrm>
+          <a:prstGeom prst="rect">
+            <a:avLst/>
+          </a:prstGeom>
+          <a:noFill/>
+        </p:spPr>
+        <p:txBody>
+          <a:bodyPr wrap="square" lIns="0" rIns="0" tIns="0" bIns="0">
+            <a:spAutoFit/>
+          </a:bodyPr>
+          <a:lstStyle/>
+          <a:p>
+            <a:pPr>
+              <a:spcAft>
+                <a:spcPts val="1000"/>
+              </a:spcAft>
+              <a:defRPr sz="1100" b="1">
+                <a:solidFill>
+                  <a:srgbClr val="C89C51"/>
+                </a:solidFill>
+                <a:latin typeface="Aptos"/>
+              </a:defRPr>
+            </a:pPr>
+            <a:r>
+              <a:t>08 / KRITISCHER BLICK</a:t>
+            </a:r>
+          </a:p>
+        </p:txBody>
+      </p:sp>
+      <p:sp>
+        <p:nvSpPr>
+          <p:cNvPr id="3" name="TextBox 2"/>
+          <p:cNvSpPr txBox="1"/>
+          <p:nvPr/>
+        </p:nvSpPr>
+        <p:spPr>
+          <a:xfrm>
+            <a:off x="594360" y="868680"/>
+            <a:ext cx="10972800" cy="1005840"/>
+          </a:xfrm>
+          <a:prstGeom prst="rect">
+            <a:avLst/>
+          </a:prstGeom>
+          <a:noFill/>
+        </p:spPr>
+        <p:txBody>
+          <a:bodyPr wrap="square" lIns="0" rIns="0" tIns="0" bIns="0">
+            <a:spAutoFit/>
+          </a:bodyPr>
+          <a:lstStyle/>
+          <a:p>
+            <a:pPr>
+              <a:spcAft>
+                <a:spcPts val="1000"/>
+              </a:spcAft>
+              <a:defRPr sz="3400" b="1">
+                <a:solidFill>
+                  <a:srgbClr val="143D43"/>
+                </a:solidFill>
+                <a:latin typeface="Aptos"/>
+              </a:defRPr>
+            </a:pPr>
+            <a:r>
+              <a:t>Kaste: Tradition und Ungleichheit</a:t>
+            </a:r>
+          </a:p>
+        </p:txBody>
+      </p:sp>
+      <p:sp>
+        <p:nvSpPr>
+          <p:cNvPr id="4" name="Rectangle 3"/>
           <p:cNvSpPr/>
           <p:nvPr/>
         </p:nvSpPr>
         <p:spPr>
           <a:xfrm>
-            <a:off x="548640" y="594360"/>
-            <a:ext cx="109728" cy="5440680"/>
+            <a:off x="594360" y="6382512"/>
+            <a:ext cx="10972800" cy="18288"/>
           </a:xfrm>
           <a:prstGeom prst="rect">
             <a:avLst/>
@@ -8109,14 +12341,14 @@
       </p:sp>
       <p:sp>
         <p:nvSpPr>
-          <p:cNvPr id="3" name="TextBox 2"/>
+          <p:cNvPr id="5" name="TextBox 4"/>
           <p:cNvSpPr txBox="1"/>
           <p:nvPr/>
         </p:nvSpPr>
         <p:spPr>
           <a:xfrm>
-            <a:off x="868680" y="457200"/>
-            <a:ext cx="10607040" cy="365760"/>
+            <a:off x="594360" y="6510528"/>
+            <a:ext cx="8229600" cy="182880"/>
           </a:xfrm>
           <a:prstGeom prst="rect">
             <a:avLst/>
@@ -8124,16 +12356,16 @@
           <a:noFill/>
         </p:spPr>
         <p:txBody>
-          <a:bodyPr wrap="square">
+          <a:bodyPr wrap="square" lIns="0" rIns="0" tIns="0" bIns="0">
             <a:spAutoFit/>
           </a:bodyPr>
           <a:lstStyle/>
           <a:p>
             <a:pPr>
               <a:spcAft>
-                <a:spcPts val="1800"/>
-              </a:spcAft>
-              <a:defRPr sz="1200" b="1">
+                <a:spcPts val="1000"/>
+              </a:spcAft>
+              <a:defRPr sz="900" b="0">
                 <a:solidFill>
                   <a:srgbClr val="C89C51"/>
                 </a:solidFill>
@@ -8141,21 +12373,21 @@
               </a:defRPr>
             </a:pPr>
             <a:r>
-              <a:t>HINDUISMUS · RELIGION 13</a:t>
-            </a:r>
-          </a:p>
-        </p:txBody>
-      </p:sp>
-      <p:sp>
-        <p:nvSpPr>
-          <p:cNvPr id="4" name="TextBox 3"/>
+              <a:t>RELIGION · KLASSE 13     /     VIELFALT VERSTEHEN</a:t>
+            </a:r>
+          </a:p>
+        </p:txBody>
+      </p:sp>
+      <p:sp>
+        <p:nvSpPr>
+          <p:cNvPr id="6" name="TextBox 5"/>
           <p:cNvSpPr txBox="1"/>
           <p:nvPr/>
         </p:nvSpPr>
         <p:spPr>
           <a:xfrm>
-            <a:off x="868680" y="1005840"/>
-            <a:ext cx="10515600" cy="1143000"/>
+            <a:off x="10972800" y="6492240"/>
+            <a:ext cx="594360" cy="228600"/>
           </a:xfrm>
           <a:prstGeom prst="rect">
             <a:avLst/>
@@ -8163,38 +12395,124 @@
           <a:noFill/>
         </p:spPr>
         <p:txBody>
-          <a:bodyPr wrap="square">
+          <a:bodyPr wrap="square" lIns="0" rIns="0" tIns="0" bIns="0">
             <a:spAutoFit/>
           </a:bodyPr>
           <a:lstStyle/>
           <a:p>
             <a:pPr>
               <a:spcAft>
-                <a:spcPts val="1800"/>
-              </a:spcAft>
-              <a:defRPr sz="3400" b="1">
-                <a:solidFill>
-                  <a:srgbClr val="143D43"/>
-                </a:solidFill>
-                <a:latin typeface="Aptos"/>
-              </a:defRPr>
-            </a:pPr>
-            <a:r>
-              <a:t>Kaste: religiöse und soziale Fragen</a:t>
-            </a:r>
-          </a:p>
-        </p:txBody>
-      </p:sp>
-      <p:sp>
-        <p:nvSpPr>
-          <p:cNvPr id="5" name="TextBox 4"/>
+                <a:spcPts val="1000"/>
+              </a:spcAft>
+              <a:defRPr sz="1000" b="0">
+                <a:solidFill>
+                  <a:srgbClr val="C89C51"/>
+                </a:solidFill>
+                <a:latin typeface="Aptos"/>
+              </a:defRPr>
+            </a:pPr>
+            <a:r>
+              <a:t>09</a:t>
+            </a:r>
+          </a:p>
+        </p:txBody>
+      </p:sp>
+      <p:sp>
+        <p:nvSpPr>
+          <p:cNvPr id="7" name="Rounded Rectangle 6"/>
+          <p:cNvSpPr/>
+          <p:nvPr/>
+        </p:nvSpPr>
+        <p:spPr>
+          <a:xfrm>
+            <a:off x="640080" y="2057400"/>
+            <a:ext cx="5303520" cy="2194560"/>
+          </a:xfrm>
+          <a:prstGeom prst="roundRect">
+            <a:avLst/>
+          </a:prstGeom>
+          <a:solidFill>
+            <a:srgbClr val="FFFFFF"/>
+          </a:solidFill>
+          <a:ln>
+            <a:noFill/>
+          </a:ln>
+        </p:spPr>
+        <p:style>
+          <a:lnRef idx="1">
+            <a:schemeClr val="accent1"/>
+          </a:lnRef>
+          <a:fillRef idx="3">
+            <a:schemeClr val="accent1"/>
+          </a:fillRef>
+          <a:effectRef idx="2">
+            <a:schemeClr val="accent1"/>
+          </a:effectRef>
+          <a:fontRef idx="minor">
+            <a:schemeClr val="lt1"/>
+          </a:fontRef>
+        </p:style>
+        <p:txBody>
+          <a:bodyPr rtlCol="0" anchor="ctr"/>
+          <a:lstStyle/>
+          <a:p>
+            <a:pPr algn="ctr"/>
+          </a:p>
+        </p:txBody>
+      </p:sp>
+      <p:sp>
+        <p:nvSpPr>
+          <p:cNvPr id="8" name="Rectangle 7"/>
+          <p:cNvSpPr/>
+          <p:nvPr/>
+        </p:nvSpPr>
+        <p:spPr>
+          <a:xfrm>
+            <a:off x="822959" y="2258568"/>
+            <a:ext cx="54864" cy="384048"/>
+          </a:xfrm>
+          <a:prstGeom prst="rect">
+            <a:avLst/>
+          </a:prstGeom>
+          <a:solidFill>
+            <a:srgbClr val="C89C51"/>
+          </a:solidFill>
+          <a:ln>
+            <a:noFill/>
+          </a:ln>
+        </p:spPr>
+        <p:style>
+          <a:lnRef idx="1">
+            <a:schemeClr val="accent1"/>
+          </a:lnRef>
+          <a:fillRef idx="3">
+            <a:schemeClr val="accent1"/>
+          </a:fillRef>
+          <a:effectRef idx="2">
+            <a:schemeClr val="accent1"/>
+          </a:effectRef>
+          <a:fontRef idx="minor">
+            <a:schemeClr val="lt1"/>
+          </a:fontRef>
+        </p:style>
+        <p:txBody>
+          <a:bodyPr rtlCol="0" anchor="ctr"/>
+          <a:lstStyle/>
+          <a:p>
+            <a:pPr algn="ctr"/>
+          </a:p>
+        </p:txBody>
+      </p:sp>
+      <p:sp>
+        <p:nvSpPr>
+          <p:cNvPr id="9" name="TextBox 8"/>
           <p:cNvSpPr txBox="1"/>
           <p:nvPr/>
         </p:nvSpPr>
         <p:spPr>
           <a:xfrm>
-            <a:off x="914400" y="2377440"/>
-            <a:ext cx="10241280" cy="3566160"/>
+            <a:off x="1005840" y="2240280"/>
+            <a:ext cx="4754880" cy="548640"/>
           </a:xfrm>
           <a:prstGeom prst="rect">
             <a:avLst/>
@@ -8202,86 +12520,38 @@
           <a:noFill/>
         </p:spPr>
         <p:txBody>
-          <a:bodyPr wrap="square">
+          <a:bodyPr wrap="square" lIns="0" rIns="0" tIns="0" bIns="0">
             <a:spAutoFit/>
           </a:bodyPr>
           <a:lstStyle/>
           <a:p>
             <a:pPr>
               <a:spcAft>
-                <a:spcPts val="1800"/>
-              </a:spcAft>
-              <a:defRPr sz="2500" b="0">
-                <a:solidFill>
-                  <a:srgbClr val="173238"/>
-                </a:solidFill>
-                <a:latin typeface="Aptos"/>
-              </a:defRPr>
-            </a:pPr>
-            <a:r>
-              <a:t>Varna: traditionelles Modell sozialer Kategorien</a:t>
-            </a:r>
-          </a:p>
-          <a:p>
-            <a:pPr>
-              <a:spcAft>
-                <a:spcPts val="1800"/>
-              </a:spcAft>
-              <a:defRPr sz="2500" b="0">
-                <a:solidFill>
-                  <a:srgbClr val="173238"/>
-                </a:solidFill>
-                <a:latin typeface="Aptos"/>
-              </a:defRPr>
-            </a:pPr>
-            <a:r>
-              <a:t>Jati: vielfältige soziale Gruppen und Zugehörigkeiten</a:t>
-            </a:r>
-          </a:p>
-          <a:p>
-            <a:pPr>
-              <a:spcAft>
-                <a:spcPts val="1800"/>
-              </a:spcAft>
-              <a:defRPr sz="2500" b="0">
-                <a:solidFill>
-                  <a:srgbClr val="173238"/>
-                </a:solidFill>
-                <a:latin typeface="Aptos"/>
-              </a:defRPr>
-            </a:pPr>
-            <a:r>
-              <a:t>Dalits: Geschichte von Ausgrenzung und Widerstand</a:t>
-            </a:r>
-          </a:p>
-          <a:p>
-            <a:pPr>
-              <a:spcAft>
-                <a:spcPts val="1800"/>
-              </a:spcAft>
-              <a:defRPr sz="2500" b="0">
-                <a:solidFill>
-                  <a:srgbClr val="173238"/>
-                </a:solidFill>
-                <a:latin typeface="Aptos"/>
-              </a:defRPr>
-            </a:pPr>
-            <a:r>
-              <a:t>Diskriminierung besteht trotz rechtlicher Verbote fort</a:t>
-            </a:r>
-          </a:p>
-        </p:txBody>
-      </p:sp>
-      <p:sp>
-        <p:nvSpPr>
-          <p:cNvPr id="6" name="TextBox 5"/>
+                <a:spcPts val="1000"/>
+              </a:spcAft>
+              <a:defRPr sz="2300" b="1">
+                <a:solidFill>
+                  <a:srgbClr val="143D43"/>
+                </a:solidFill>
+                <a:latin typeface="Aptos"/>
+              </a:defRPr>
+            </a:pPr>
+            <a:r>
+              <a:t>Varna</a:t>
+            </a:r>
+          </a:p>
+        </p:txBody>
+      </p:sp>
+      <p:sp>
+        <p:nvSpPr>
+          <p:cNvPr id="10" name="TextBox 9"/>
           <p:cNvSpPr txBox="1"/>
           <p:nvPr/>
         </p:nvSpPr>
         <p:spPr>
           <a:xfrm>
-            <a:off x="914400" y="6446520"/>
-            <a:ext cx="9144000" cy="228600"/>
+            <a:off x="914400" y="2926080"/>
+            <a:ext cx="4754880" cy="1234439"/>
           </a:xfrm>
           <a:prstGeom prst="rect">
             <a:avLst/>
@@ -8289,38 +12559,124 @@
           <a:noFill/>
         </p:spPr>
         <p:txBody>
-          <a:bodyPr wrap="square">
+          <a:bodyPr wrap="square" lIns="0" rIns="0" tIns="0" bIns="0">
             <a:spAutoFit/>
           </a:bodyPr>
           <a:lstStyle/>
           <a:p>
             <a:pPr>
               <a:spcAft>
-                <a:spcPts val="1800"/>
-              </a:spcAft>
-              <a:defRPr sz="1000" b="0">
-                <a:solidFill>
-                  <a:srgbClr val="C89C51"/>
-                </a:solidFill>
-                <a:latin typeface="Aptos"/>
-              </a:defRPr>
-            </a:pPr>
-            <a:r>
-              <a:t>Vielfalt verstehen · Begriffe verbinden · kritisch nachfragen</a:t>
-            </a:r>
-          </a:p>
-        </p:txBody>
-      </p:sp>
-      <p:sp>
-        <p:nvSpPr>
-          <p:cNvPr id="7" name="TextBox 6"/>
+                <a:spcPts val="1000"/>
+              </a:spcAft>
+              <a:defRPr sz="2000" b="0">
+                <a:solidFill>
+                  <a:srgbClr val="173238"/>
+                </a:solidFill>
+                <a:latin typeface="Aptos"/>
+              </a:defRPr>
+            </a:pPr>
+            <a:r>
+              <a:t>Traditionelles Modell sozialer Kategorien</a:t>
+            </a:r>
+          </a:p>
+        </p:txBody>
+      </p:sp>
+      <p:sp>
+        <p:nvSpPr>
+          <p:cNvPr id="11" name="Rounded Rectangle 10"/>
+          <p:cNvSpPr/>
+          <p:nvPr/>
+        </p:nvSpPr>
+        <p:spPr>
+          <a:xfrm>
+            <a:off x="6217920" y="2057400"/>
+            <a:ext cx="5303520" cy="2194560"/>
+          </a:xfrm>
+          <a:prstGeom prst="roundRect">
+            <a:avLst/>
+          </a:prstGeom>
+          <a:solidFill>
+            <a:srgbClr val="FFFFFF"/>
+          </a:solidFill>
+          <a:ln>
+            <a:noFill/>
+          </a:ln>
+        </p:spPr>
+        <p:style>
+          <a:lnRef idx="1">
+            <a:schemeClr val="accent1"/>
+          </a:lnRef>
+          <a:fillRef idx="3">
+            <a:schemeClr val="accent1"/>
+          </a:fillRef>
+          <a:effectRef idx="2">
+            <a:schemeClr val="accent1"/>
+          </a:effectRef>
+          <a:fontRef idx="minor">
+            <a:schemeClr val="lt1"/>
+          </a:fontRef>
+        </p:style>
+        <p:txBody>
+          <a:bodyPr rtlCol="0" anchor="ctr"/>
+          <a:lstStyle/>
+          <a:p>
+            <a:pPr algn="ctr"/>
+          </a:p>
+        </p:txBody>
+      </p:sp>
+      <p:sp>
+        <p:nvSpPr>
+          <p:cNvPr id="12" name="Rectangle 11"/>
+          <p:cNvSpPr/>
+          <p:nvPr/>
+        </p:nvSpPr>
+        <p:spPr>
+          <a:xfrm>
+            <a:off x="6400800" y="2258568"/>
+            <a:ext cx="54864" cy="384048"/>
+          </a:xfrm>
+          <a:prstGeom prst="rect">
+            <a:avLst/>
+          </a:prstGeom>
+          <a:solidFill>
+            <a:srgbClr val="C89C51"/>
+          </a:solidFill>
+          <a:ln>
+            <a:noFill/>
+          </a:ln>
+        </p:spPr>
+        <p:style>
+          <a:lnRef idx="1">
+            <a:schemeClr val="accent1"/>
+          </a:lnRef>
+          <a:fillRef idx="3">
+            <a:schemeClr val="accent1"/>
+          </a:fillRef>
+          <a:effectRef idx="2">
+            <a:schemeClr val="accent1"/>
+          </a:effectRef>
+          <a:fontRef idx="minor">
+            <a:schemeClr val="lt1"/>
+          </a:fontRef>
+        </p:style>
+        <p:txBody>
+          <a:bodyPr rtlCol="0" anchor="ctr"/>
+          <a:lstStyle/>
+          <a:p>
+            <a:pPr algn="ctr"/>
+          </a:p>
+        </p:txBody>
+      </p:sp>
+      <p:sp>
+        <p:nvSpPr>
+          <p:cNvPr id="13" name="TextBox 12"/>
           <p:cNvSpPr txBox="1"/>
           <p:nvPr/>
         </p:nvSpPr>
         <p:spPr>
           <a:xfrm>
-            <a:off x="10972800" y="6428232"/>
-            <a:ext cx="457200" cy="274320"/>
+            <a:off x="6583680" y="2240280"/>
+            <a:ext cx="4754880" cy="548640"/>
           </a:xfrm>
           <a:prstGeom prst="rect">
             <a:avLst/>
@@ -8328,24 +12684,118 @@
           <a:noFill/>
         </p:spPr>
         <p:txBody>
-          <a:bodyPr wrap="square">
+          <a:bodyPr wrap="square" lIns="0" rIns="0" tIns="0" bIns="0">
             <a:spAutoFit/>
           </a:bodyPr>
           <a:lstStyle/>
           <a:p>
             <a:pPr>
               <a:spcAft>
-                <a:spcPts val="1800"/>
-              </a:spcAft>
-              <a:defRPr sz="1100" b="0">
-                <a:solidFill>
-                  <a:srgbClr val="C89C51"/>
-                </a:solidFill>
-                <a:latin typeface="Aptos"/>
-              </a:defRPr>
-            </a:pPr>
-            <a:r>
-              <a:t>9</a:t>
+                <a:spcPts val="1000"/>
+              </a:spcAft>
+              <a:defRPr sz="2300" b="1">
+                <a:solidFill>
+                  <a:srgbClr val="143D43"/>
+                </a:solidFill>
+                <a:latin typeface="Aptos"/>
+              </a:defRPr>
+            </a:pPr>
+            <a:r>
+              <a:t>Jati</a:t>
+            </a:r>
+          </a:p>
+        </p:txBody>
+      </p:sp>
+      <p:sp>
+        <p:nvSpPr>
+          <p:cNvPr id="14" name="TextBox 13"/>
+          <p:cNvSpPr txBox="1"/>
+          <p:nvPr/>
+        </p:nvSpPr>
+        <p:spPr>
+          <a:xfrm>
+            <a:off x="6492240" y="2926080"/>
+            <a:ext cx="4754880" cy="1234439"/>
+          </a:xfrm>
+          <a:prstGeom prst="rect">
+            <a:avLst/>
+          </a:prstGeom>
+          <a:noFill/>
+        </p:spPr>
+        <p:txBody>
+          <a:bodyPr wrap="square" lIns="0" rIns="0" tIns="0" bIns="0">
+            <a:spAutoFit/>
+          </a:bodyPr>
+          <a:lstStyle/>
+          <a:p>
+            <a:pPr>
+              <a:spcAft>
+                <a:spcPts val="1000"/>
+              </a:spcAft>
+              <a:defRPr sz="2000" b="0">
+                <a:solidFill>
+                  <a:srgbClr val="173238"/>
+                </a:solidFill>
+                <a:latin typeface="Aptos"/>
+              </a:defRPr>
+            </a:pPr>
+            <a:r>
+              <a:t>Viele konkrete soziale Gruppen</a:t>
+            </a:r>
+          </a:p>
+        </p:txBody>
+      </p:sp>
+      <p:sp>
+        <p:nvSpPr>
+          <p:cNvPr id="15" name="TextBox 14"/>
+          <p:cNvSpPr txBox="1"/>
+          <p:nvPr/>
+        </p:nvSpPr>
+        <p:spPr>
+          <a:xfrm>
+            <a:off x="731520" y="4572000"/>
+            <a:ext cx="10698480" cy="1371600"/>
+          </a:xfrm>
+          <a:prstGeom prst="rect">
+            <a:avLst/>
+          </a:prstGeom>
+          <a:noFill/>
+        </p:spPr>
+        <p:txBody>
+          <a:bodyPr wrap="square" lIns="0" rIns="0" tIns="0" bIns="0">
+            <a:spAutoFit/>
+          </a:bodyPr>
+          <a:lstStyle/>
+          <a:p>
+            <a:pPr>
+              <a:spcAft>
+                <a:spcPts val="1000"/>
+              </a:spcAft>
+              <a:defRPr sz="2300" b="0">
+                <a:solidFill>
+                  <a:srgbClr val="143D43"/>
+                </a:solidFill>
+                <a:latin typeface="Aptos"/>
+              </a:defRPr>
+            </a:pPr>
+            <a:r>
+              <a:t>Dalits: Ausgrenzung, Widerstand und Selbstbestimmung</a:t>
+            </a:r>
+          </a:p>
+          <a:p>
+            <a:pPr>
+              <a:spcAft>
+                <a:spcPts val="1000"/>
+              </a:spcAft>
+              <a:defRPr sz="2300" b="0">
+                <a:solidFill>
+                  <a:srgbClr val="143D43"/>
+                </a:solidFill>
+                <a:latin typeface="Aptos"/>
+              </a:defRPr>
+            </a:pPr>
+            <a:r>
+              <a:t>„Unberührbarkeit“ ist rechtlich abgeschafft – Diskriminierung besteht fort.</a:t>
             </a:r>
           </a:p>
         </p:txBody>
